--- a/exports/pptx/lessons/middle-module-05-dot-addition/day-03-single-column.pptx
+++ b/exports/pptx/lessons/middle-module-05-dot-addition/day-03-single-column.pptx
@@ -17,9 +17,16 @@
     <p:sldId id="265" r:id="rId11"/>
     <p:sldId id="266" r:id="rId12"/>
     <p:sldId id="267" r:id="rId13"/>
+    <p:sldId id="268" r:id="rId14"/>
+    <p:sldId id="269" r:id="rId15"/>
+    <p:sldId id="270" r:id="rId16"/>
+    <p:sldId id="271" r:id="rId17"/>
+    <p:sldId id="272" r:id="rId18"/>
+    <p:sldId id="273" r:id="rId19"/>
+    <p:sldId id="274" r:id="rId20"/>
   </p:sldIdLst>
   <p:notesMasterIdLst>
-    <p:notesMasterId r:id="rId14"/>
+    <p:notesMasterId r:id="rId21"/>
   </p:notesMasterIdLst>
   <p:sldSz cx="9144000" cy="5143500"/>
   <p:notesSz cx="5143500" cy="9144000"/>
@@ -801,6 +808,622 @@
             <a:fld id="{F7021451-1387-4CA6-816F-3879F97B5CBC}" type="slidenum">
               <a:rPr lang="en-US"/>
               <a:t>12</a:t>
+            </a:fld>
+            <a:endParaRPr lang="en-US"/>
+          </a:p>
+        </p:txBody>
+      </p:sp>
+    </p:spTree>
+    <p:extLst>
+      <p:ext uri="{BB962C8B-B14F-4D97-AF65-F5344CB8AC3E}">
+        <p14:creationId xmlns:p14="http://schemas.microsoft.com/office/powerpoint/2010/main" val="1024086991"/>
+      </p:ext>
+    </p:extLst>
+  </p:cSld>
+  <p:clrMapOvr>
+    <a:masterClrMapping/>
+  </p:clrMapOvr>
+</p:notes>
+</file>
+
+<file path=ppt/notesSlides/notesSlide13.xml><?xml version="1.0" encoding="utf-8"?>
+<p:notes xmlns:a="http://schemas.openxmlformats.org/drawingml/2006/main" xmlns:r="http://schemas.openxmlformats.org/officeDocument/2006/relationships" xmlns:p="http://schemas.openxmlformats.org/presentationml/2006/main">
+  <p:cSld>
+    <p:spTree>
+      <p:nvGrpSpPr>
+        <p:cNvPr id="1" name=""/>
+        <p:cNvGrpSpPr/>
+        <p:nvPr/>
+      </p:nvGrpSpPr>
+      <p:grpSpPr>
+        <a:xfrm>
+          <a:off x="0" y="0"/>
+          <a:ext cx="0" cy="0"/>
+          <a:chOff x="0" y="0"/>
+          <a:chExt cx="0" cy="0"/>
+        </a:xfrm>
+      </p:grpSpPr>
+      <p:sp>
+        <p:nvSpPr>
+          <p:cNvPr id="2" name="Slide Image Placeholder 1"/>
+          <p:cNvSpPr>
+            <a:spLocks noGrp="1" noRot="1" noChangeAspect="1"/>
+          </p:cNvSpPr>
+          <p:nvPr>
+            <p:ph type="sldImg"/>
+          </p:nvPr>
+        </p:nvSpPr>
+        <p:spPr/>
+      </p:sp>
+      <p:sp>
+        <p:nvSpPr>
+          <p:cNvPr id="3" name="Notes Placeholder 2"/>
+          <p:cNvSpPr>
+            <a:spLocks noGrp="1"/>
+          </p:cNvSpPr>
+          <p:nvPr>
+            <p:ph type="body" idx="1"/>
+          </p:nvPr>
+        </p:nvSpPr>
+        <p:spPr/>
+        <p:txBody>
+          <a:bodyPr/>
+          <a:lstStyle/>
+          <a:p>
+            <a:r>
+              <a:rPr lang="en-US" dirty="0"/>
+              <a:t/>
+            </a:r>
+            <a:endParaRPr lang="en-US" dirty="0"/>
+          </a:p>
+        </p:txBody>
+      </p:sp>
+      <p:sp>
+        <p:nvSpPr>
+          <p:cNvPr id="4" name="Slide Number Placeholder 3"/>
+          <p:cNvSpPr>
+            <a:spLocks noGrp="1"/>
+          </p:cNvSpPr>
+          <p:nvPr>
+            <p:ph type="sldNum" sz="quarter" idx="10"/>
+          </p:nvPr>
+        </p:nvSpPr>
+        <p:spPr/>
+        <p:txBody>
+          <a:bodyPr/>
+          <a:lstStyle/>
+          <a:p>
+            <a:fld id="{F7021451-1387-4CA6-816F-3879F97B5CBC}" type="slidenum">
+              <a:rPr lang="en-US"/>
+              <a:t>13</a:t>
+            </a:fld>
+            <a:endParaRPr lang="en-US"/>
+          </a:p>
+        </p:txBody>
+      </p:sp>
+    </p:spTree>
+    <p:extLst>
+      <p:ext uri="{BB962C8B-B14F-4D97-AF65-F5344CB8AC3E}">
+        <p14:creationId xmlns:p14="http://schemas.microsoft.com/office/powerpoint/2010/main" val="1024086991"/>
+      </p:ext>
+    </p:extLst>
+  </p:cSld>
+  <p:clrMapOvr>
+    <a:masterClrMapping/>
+  </p:clrMapOvr>
+</p:notes>
+</file>
+
+<file path=ppt/notesSlides/notesSlide14.xml><?xml version="1.0" encoding="utf-8"?>
+<p:notes xmlns:a="http://schemas.openxmlformats.org/drawingml/2006/main" xmlns:r="http://schemas.openxmlformats.org/officeDocument/2006/relationships" xmlns:p="http://schemas.openxmlformats.org/presentationml/2006/main">
+  <p:cSld>
+    <p:spTree>
+      <p:nvGrpSpPr>
+        <p:cNvPr id="1" name=""/>
+        <p:cNvGrpSpPr/>
+        <p:nvPr/>
+      </p:nvGrpSpPr>
+      <p:grpSpPr>
+        <a:xfrm>
+          <a:off x="0" y="0"/>
+          <a:ext cx="0" cy="0"/>
+          <a:chOff x="0" y="0"/>
+          <a:chExt cx="0" cy="0"/>
+        </a:xfrm>
+      </p:grpSpPr>
+      <p:sp>
+        <p:nvSpPr>
+          <p:cNvPr id="2" name="Slide Image Placeholder 1"/>
+          <p:cNvSpPr>
+            <a:spLocks noGrp="1" noRot="1" noChangeAspect="1"/>
+          </p:cNvSpPr>
+          <p:nvPr>
+            <p:ph type="sldImg"/>
+          </p:nvPr>
+        </p:nvSpPr>
+        <p:spPr/>
+      </p:sp>
+      <p:sp>
+        <p:nvSpPr>
+          <p:cNvPr id="3" name="Notes Placeholder 2"/>
+          <p:cNvSpPr>
+            <a:spLocks noGrp="1"/>
+          </p:cNvSpPr>
+          <p:nvPr>
+            <p:ph type="body" idx="1"/>
+          </p:nvPr>
+        </p:nvSpPr>
+        <p:spPr/>
+        <p:txBody>
+          <a:bodyPr/>
+          <a:lstStyle/>
+          <a:p>
+            <a:r>
+              <a:rPr lang="en-US" dirty="0"/>
+              <a:t/>
+            </a:r>
+            <a:endParaRPr lang="en-US" dirty="0"/>
+          </a:p>
+        </p:txBody>
+      </p:sp>
+      <p:sp>
+        <p:nvSpPr>
+          <p:cNvPr id="4" name="Slide Number Placeholder 3"/>
+          <p:cNvSpPr>
+            <a:spLocks noGrp="1"/>
+          </p:cNvSpPr>
+          <p:nvPr>
+            <p:ph type="sldNum" sz="quarter" idx="10"/>
+          </p:nvPr>
+        </p:nvSpPr>
+        <p:spPr/>
+        <p:txBody>
+          <a:bodyPr/>
+          <a:lstStyle/>
+          <a:p>
+            <a:fld id="{F7021451-1387-4CA6-816F-3879F97B5CBC}" type="slidenum">
+              <a:rPr lang="en-US"/>
+              <a:t>14</a:t>
+            </a:fld>
+            <a:endParaRPr lang="en-US"/>
+          </a:p>
+        </p:txBody>
+      </p:sp>
+    </p:spTree>
+    <p:extLst>
+      <p:ext uri="{BB962C8B-B14F-4D97-AF65-F5344CB8AC3E}">
+        <p14:creationId xmlns:p14="http://schemas.microsoft.com/office/powerpoint/2010/main" val="1024086991"/>
+      </p:ext>
+    </p:extLst>
+  </p:cSld>
+  <p:clrMapOvr>
+    <a:masterClrMapping/>
+  </p:clrMapOvr>
+</p:notes>
+</file>
+
+<file path=ppt/notesSlides/notesSlide15.xml><?xml version="1.0" encoding="utf-8"?>
+<p:notes xmlns:a="http://schemas.openxmlformats.org/drawingml/2006/main" xmlns:r="http://schemas.openxmlformats.org/officeDocument/2006/relationships" xmlns:p="http://schemas.openxmlformats.org/presentationml/2006/main">
+  <p:cSld>
+    <p:spTree>
+      <p:nvGrpSpPr>
+        <p:cNvPr id="1" name=""/>
+        <p:cNvGrpSpPr/>
+        <p:nvPr/>
+      </p:nvGrpSpPr>
+      <p:grpSpPr>
+        <a:xfrm>
+          <a:off x="0" y="0"/>
+          <a:ext cx="0" cy="0"/>
+          <a:chOff x="0" y="0"/>
+          <a:chExt cx="0" cy="0"/>
+        </a:xfrm>
+      </p:grpSpPr>
+      <p:sp>
+        <p:nvSpPr>
+          <p:cNvPr id="2" name="Slide Image Placeholder 1"/>
+          <p:cNvSpPr>
+            <a:spLocks noGrp="1" noRot="1" noChangeAspect="1"/>
+          </p:cNvSpPr>
+          <p:nvPr>
+            <p:ph type="sldImg"/>
+          </p:nvPr>
+        </p:nvSpPr>
+        <p:spPr/>
+      </p:sp>
+      <p:sp>
+        <p:nvSpPr>
+          <p:cNvPr id="3" name="Notes Placeholder 2"/>
+          <p:cNvSpPr>
+            <a:spLocks noGrp="1"/>
+          </p:cNvSpPr>
+          <p:nvPr>
+            <p:ph type="body" idx="1"/>
+          </p:nvPr>
+        </p:nvSpPr>
+        <p:spPr/>
+        <p:txBody>
+          <a:bodyPr/>
+          <a:lstStyle/>
+          <a:p>
+            <a:r>
+              <a:rPr lang="en-US" dirty="0"/>
+              <a:t/>
+            </a:r>
+            <a:endParaRPr lang="en-US" dirty="0"/>
+          </a:p>
+        </p:txBody>
+      </p:sp>
+      <p:sp>
+        <p:nvSpPr>
+          <p:cNvPr id="4" name="Slide Number Placeholder 3"/>
+          <p:cNvSpPr>
+            <a:spLocks noGrp="1"/>
+          </p:cNvSpPr>
+          <p:nvPr>
+            <p:ph type="sldNum" sz="quarter" idx="10"/>
+          </p:nvPr>
+        </p:nvSpPr>
+        <p:spPr/>
+        <p:txBody>
+          <a:bodyPr/>
+          <a:lstStyle/>
+          <a:p>
+            <a:fld id="{F7021451-1387-4CA6-816F-3879F97B5CBC}" type="slidenum">
+              <a:rPr lang="en-US"/>
+              <a:t>15</a:t>
+            </a:fld>
+            <a:endParaRPr lang="en-US"/>
+          </a:p>
+        </p:txBody>
+      </p:sp>
+    </p:spTree>
+    <p:extLst>
+      <p:ext uri="{BB962C8B-B14F-4D97-AF65-F5344CB8AC3E}">
+        <p14:creationId xmlns:p14="http://schemas.microsoft.com/office/powerpoint/2010/main" val="1024086991"/>
+      </p:ext>
+    </p:extLst>
+  </p:cSld>
+  <p:clrMapOvr>
+    <a:masterClrMapping/>
+  </p:clrMapOvr>
+</p:notes>
+</file>
+
+<file path=ppt/notesSlides/notesSlide16.xml><?xml version="1.0" encoding="utf-8"?>
+<p:notes xmlns:a="http://schemas.openxmlformats.org/drawingml/2006/main" xmlns:r="http://schemas.openxmlformats.org/officeDocument/2006/relationships" xmlns:p="http://schemas.openxmlformats.org/presentationml/2006/main">
+  <p:cSld>
+    <p:spTree>
+      <p:nvGrpSpPr>
+        <p:cNvPr id="1" name=""/>
+        <p:cNvGrpSpPr/>
+        <p:nvPr/>
+      </p:nvGrpSpPr>
+      <p:grpSpPr>
+        <a:xfrm>
+          <a:off x="0" y="0"/>
+          <a:ext cx="0" cy="0"/>
+          <a:chOff x="0" y="0"/>
+          <a:chExt cx="0" cy="0"/>
+        </a:xfrm>
+      </p:grpSpPr>
+      <p:sp>
+        <p:nvSpPr>
+          <p:cNvPr id="2" name="Slide Image Placeholder 1"/>
+          <p:cNvSpPr>
+            <a:spLocks noGrp="1" noRot="1" noChangeAspect="1"/>
+          </p:cNvSpPr>
+          <p:nvPr>
+            <p:ph type="sldImg"/>
+          </p:nvPr>
+        </p:nvSpPr>
+        <p:spPr/>
+      </p:sp>
+      <p:sp>
+        <p:nvSpPr>
+          <p:cNvPr id="3" name="Notes Placeholder 2"/>
+          <p:cNvSpPr>
+            <a:spLocks noGrp="1"/>
+          </p:cNvSpPr>
+          <p:nvPr>
+            <p:ph type="body" idx="1"/>
+          </p:nvPr>
+        </p:nvSpPr>
+        <p:spPr/>
+        <p:txBody>
+          <a:bodyPr/>
+          <a:lstStyle/>
+          <a:p>
+            <a:r>
+              <a:rPr lang="en-US" dirty="0"/>
+              <a:t/>
+            </a:r>
+            <a:endParaRPr lang="en-US" dirty="0"/>
+          </a:p>
+        </p:txBody>
+      </p:sp>
+      <p:sp>
+        <p:nvSpPr>
+          <p:cNvPr id="4" name="Slide Number Placeholder 3"/>
+          <p:cNvSpPr>
+            <a:spLocks noGrp="1"/>
+          </p:cNvSpPr>
+          <p:nvPr>
+            <p:ph type="sldNum" sz="quarter" idx="10"/>
+          </p:nvPr>
+        </p:nvSpPr>
+        <p:spPr/>
+        <p:txBody>
+          <a:bodyPr/>
+          <a:lstStyle/>
+          <a:p>
+            <a:fld id="{F7021451-1387-4CA6-816F-3879F97B5CBC}" type="slidenum">
+              <a:rPr lang="en-US"/>
+              <a:t>16</a:t>
+            </a:fld>
+            <a:endParaRPr lang="en-US"/>
+          </a:p>
+        </p:txBody>
+      </p:sp>
+    </p:spTree>
+    <p:extLst>
+      <p:ext uri="{BB962C8B-B14F-4D97-AF65-F5344CB8AC3E}">
+        <p14:creationId xmlns:p14="http://schemas.microsoft.com/office/powerpoint/2010/main" val="1024086991"/>
+      </p:ext>
+    </p:extLst>
+  </p:cSld>
+  <p:clrMapOvr>
+    <a:masterClrMapping/>
+  </p:clrMapOvr>
+</p:notes>
+</file>
+
+<file path=ppt/notesSlides/notesSlide17.xml><?xml version="1.0" encoding="utf-8"?>
+<p:notes xmlns:a="http://schemas.openxmlformats.org/drawingml/2006/main" xmlns:r="http://schemas.openxmlformats.org/officeDocument/2006/relationships" xmlns:p="http://schemas.openxmlformats.org/presentationml/2006/main">
+  <p:cSld>
+    <p:spTree>
+      <p:nvGrpSpPr>
+        <p:cNvPr id="1" name=""/>
+        <p:cNvGrpSpPr/>
+        <p:nvPr/>
+      </p:nvGrpSpPr>
+      <p:grpSpPr>
+        <a:xfrm>
+          <a:off x="0" y="0"/>
+          <a:ext cx="0" cy="0"/>
+          <a:chOff x="0" y="0"/>
+          <a:chExt cx="0" cy="0"/>
+        </a:xfrm>
+      </p:grpSpPr>
+      <p:sp>
+        <p:nvSpPr>
+          <p:cNvPr id="2" name="Slide Image Placeholder 1"/>
+          <p:cNvSpPr>
+            <a:spLocks noGrp="1" noRot="1" noChangeAspect="1"/>
+          </p:cNvSpPr>
+          <p:nvPr>
+            <p:ph type="sldImg"/>
+          </p:nvPr>
+        </p:nvSpPr>
+        <p:spPr/>
+      </p:sp>
+      <p:sp>
+        <p:nvSpPr>
+          <p:cNvPr id="3" name="Notes Placeholder 2"/>
+          <p:cNvSpPr>
+            <a:spLocks noGrp="1"/>
+          </p:cNvSpPr>
+          <p:nvPr>
+            <p:ph type="body" idx="1"/>
+          </p:nvPr>
+        </p:nvSpPr>
+        <p:spPr/>
+        <p:txBody>
+          <a:bodyPr/>
+          <a:lstStyle/>
+          <a:p>
+            <a:r>
+              <a:rPr lang="en-US" dirty="0"/>
+              <a:t/>
+            </a:r>
+            <a:endParaRPr lang="en-US" dirty="0"/>
+          </a:p>
+        </p:txBody>
+      </p:sp>
+      <p:sp>
+        <p:nvSpPr>
+          <p:cNvPr id="4" name="Slide Number Placeholder 3"/>
+          <p:cNvSpPr>
+            <a:spLocks noGrp="1"/>
+          </p:cNvSpPr>
+          <p:nvPr>
+            <p:ph type="sldNum" sz="quarter" idx="10"/>
+          </p:nvPr>
+        </p:nvSpPr>
+        <p:spPr/>
+        <p:txBody>
+          <a:bodyPr/>
+          <a:lstStyle/>
+          <a:p>
+            <a:fld id="{F7021451-1387-4CA6-816F-3879F97B5CBC}" type="slidenum">
+              <a:rPr lang="en-US"/>
+              <a:t>17</a:t>
+            </a:fld>
+            <a:endParaRPr lang="en-US"/>
+          </a:p>
+        </p:txBody>
+      </p:sp>
+    </p:spTree>
+    <p:extLst>
+      <p:ext uri="{BB962C8B-B14F-4D97-AF65-F5344CB8AC3E}">
+        <p14:creationId xmlns:p14="http://schemas.microsoft.com/office/powerpoint/2010/main" val="1024086991"/>
+      </p:ext>
+    </p:extLst>
+  </p:cSld>
+  <p:clrMapOvr>
+    <a:masterClrMapping/>
+  </p:clrMapOvr>
+</p:notes>
+</file>
+
+<file path=ppt/notesSlides/notesSlide18.xml><?xml version="1.0" encoding="utf-8"?>
+<p:notes xmlns:a="http://schemas.openxmlformats.org/drawingml/2006/main" xmlns:r="http://schemas.openxmlformats.org/officeDocument/2006/relationships" xmlns:p="http://schemas.openxmlformats.org/presentationml/2006/main">
+  <p:cSld>
+    <p:spTree>
+      <p:nvGrpSpPr>
+        <p:cNvPr id="1" name=""/>
+        <p:cNvGrpSpPr/>
+        <p:nvPr/>
+      </p:nvGrpSpPr>
+      <p:grpSpPr>
+        <a:xfrm>
+          <a:off x="0" y="0"/>
+          <a:ext cx="0" cy="0"/>
+          <a:chOff x="0" y="0"/>
+          <a:chExt cx="0" cy="0"/>
+        </a:xfrm>
+      </p:grpSpPr>
+      <p:sp>
+        <p:nvSpPr>
+          <p:cNvPr id="2" name="Slide Image Placeholder 1"/>
+          <p:cNvSpPr>
+            <a:spLocks noGrp="1" noRot="1" noChangeAspect="1"/>
+          </p:cNvSpPr>
+          <p:nvPr>
+            <p:ph type="sldImg"/>
+          </p:nvPr>
+        </p:nvSpPr>
+        <p:spPr/>
+      </p:sp>
+      <p:sp>
+        <p:nvSpPr>
+          <p:cNvPr id="3" name="Notes Placeholder 2"/>
+          <p:cNvSpPr>
+            <a:spLocks noGrp="1"/>
+          </p:cNvSpPr>
+          <p:nvPr>
+            <p:ph type="body" idx="1"/>
+          </p:nvPr>
+        </p:nvSpPr>
+        <p:spPr/>
+        <p:txBody>
+          <a:bodyPr/>
+          <a:lstStyle/>
+          <a:p>
+            <a:r>
+              <a:rPr lang="en-US" dirty="0"/>
+              <a:t/>
+            </a:r>
+            <a:endParaRPr lang="en-US" dirty="0"/>
+          </a:p>
+        </p:txBody>
+      </p:sp>
+      <p:sp>
+        <p:nvSpPr>
+          <p:cNvPr id="4" name="Slide Number Placeholder 3"/>
+          <p:cNvSpPr>
+            <a:spLocks noGrp="1"/>
+          </p:cNvSpPr>
+          <p:nvPr>
+            <p:ph type="sldNum" sz="quarter" idx="10"/>
+          </p:nvPr>
+        </p:nvSpPr>
+        <p:spPr/>
+        <p:txBody>
+          <a:bodyPr/>
+          <a:lstStyle/>
+          <a:p>
+            <a:fld id="{F7021451-1387-4CA6-816F-3879F97B5CBC}" type="slidenum">
+              <a:rPr lang="en-US"/>
+              <a:t>18</a:t>
+            </a:fld>
+            <a:endParaRPr lang="en-US"/>
+          </a:p>
+        </p:txBody>
+      </p:sp>
+    </p:spTree>
+    <p:extLst>
+      <p:ext uri="{BB962C8B-B14F-4D97-AF65-F5344CB8AC3E}">
+        <p14:creationId xmlns:p14="http://schemas.microsoft.com/office/powerpoint/2010/main" val="1024086991"/>
+      </p:ext>
+    </p:extLst>
+  </p:cSld>
+  <p:clrMapOvr>
+    <a:masterClrMapping/>
+  </p:clrMapOvr>
+</p:notes>
+</file>
+
+<file path=ppt/notesSlides/notesSlide19.xml><?xml version="1.0" encoding="utf-8"?>
+<p:notes xmlns:a="http://schemas.openxmlformats.org/drawingml/2006/main" xmlns:r="http://schemas.openxmlformats.org/officeDocument/2006/relationships" xmlns:p="http://schemas.openxmlformats.org/presentationml/2006/main">
+  <p:cSld>
+    <p:spTree>
+      <p:nvGrpSpPr>
+        <p:cNvPr id="1" name=""/>
+        <p:cNvGrpSpPr/>
+        <p:nvPr/>
+      </p:nvGrpSpPr>
+      <p:grpSpPr>
+        <a:xfrm>
+          <a:off x="0" y="0"/>
+          <a:ext cx="0" cy="0"/>
+          <a:chOff x="0" y="0"/>
+          <a:chExt cx="0" cy="0"/>
+        </a:xfrm>
+      </p:grpSpPr>
+      <p:sp>
+        <p:nvSpPr>
+          <p:cNvPr id="2" name="Slide Image Placeholder 1"/>
+          <p:cNvSpPr>
+            <a:spLocks noGrp="1" noRot="1" noChangeAspect="1"/>
+          </p:cNvSpPr>
+          <p:nvPr>
+            <p:ph type="sldImg"/>
+          </p:nvPr>
+        </p:nvSpPr>
+        <p:spPr/>
+      </p:sp>
+      <p:sp>
+        <p:nvSpPr>
+          <p:cNvPr id="3" name="Notes Placeholder 2"/>
+          <p:cNvSpPr>
+            <a:spLocks noGrp="1"/>
+          </p:cNvSpPr>
+          <p:nvPr>
+            <p:ph type="body" idx="1"/>
+          </p:nvPr>
+        </p:nvSpPr>
+        <p:spPr/>
+        <p:txBody>
+          <a:bodyPr/>
+          <a:lstStyle/>
+          <a:p>
+            <a:r>
+              <a:rPr lang="en-US" dirty="0"/>
+              <a:t/>
+            </a:r>
+            <a:endParaRPr lang="en-US" dirty="0"/>
+          </a:p>
+        </p:txBody>
+      </p:sp>
+      <p:sp>
+        <p:nvSpPr>
+          <p:cNvPr id="4" name="Slide Number Placeholder 3"/>
+          <p:cNvSpPr>
+            <a:spLocks noGrp="1"/>
+          </p:cNvSpPr>
+          <p:nvPr>
+            <p:ph type="sldNum" sz="quarter" idx="10"/>
+          </p:nvPr>
+        </p:nvSpPr>
+        <p:spPr/>
+        <p:txBody>
+          <a:bodyPr/>
+          <a:lstStyle/>
+          <a:p>
+            <a:fld id="{F7021451-1387-4CA6-816F-3879F97B5CBC}" type="slidenum">
+              <a:rPr lang="en-US"/>
+              <a:t>19</a:t>
             </a:fld>
             <a:endParaRPr lang="en-US"/>
           </a:p>
@@ -2100,102 +2723,6 @@
         </p:nvSpPr>
         <p:spPr>
           <a:xfrm>
-            <a:off x="406301" y="1223963"/>
-            <a:ext cx="8498026" cy="274290"/>
-          </a:xfrm>
-          <a:prstGeom prst="rect">
-            <a:avLst/>
-          </a:prstGeom>
-          <a:noFill/>
-          <a:ln/>
-        </p:spPr>
-        <p:txBody>
-          <a:bodyPr wrap="square" lIns="0" tIns="0" rIns="0" bIns="0" rtlCol="0" anchor="t"/>
-          <a:lstStyle/>
-          <a:p>
-            <a:pPr algn="l" indent="0" marL="0">
-              <a:lnSpc>
-                <a:spcPts val="2160"/>
-              </a:lnSpc>
-              <a:spcBef>
-                <a:spcPts val="600"/>
-              </a:spcBef>
-              <a:spcAft>
-                <a:spcPts val="800"/>
-              </a:spcAft>
-              <a:buNone/>
-            </a:pPr>
-            <a:r>
-              <a:rPr lang="en-US" sz="1800" b="1" dirty="0">
-                <a:solidFill>
-                  <a:srgbClr val="FE4447"/>
-                </a:solidFill>
-                <a:latin typeface="Georgia" pitchFamily="34" charset="0"/>
-                <a:ea typeface="Georgia" pitchFamily="34" charset="-122"/>
-                <a:cs typeface="Georgia" pitchFamily="34" charset="-120"/>
-              </a:rPr>
-              <a:t>Learning objective</a:t>
-            </a:r>
-            <a:endParaRPr lang="en-US" sz="1800" dirty="0"/>
-          </a:p>
-        </p:txBody>
-      </p:sp>
-      <p:sp>
-        <p:nvSpPr>
-          <p:cNvPr id="6" name="Text 4"/>
-          <p:cNvSpPr/>
-          <p:nvPr/>
-        </p:nvSpPr>
-        <p:spPr>
-          <a:xfrm>
-            <a:off x="406301" y="1637854"/>
-            <a:ext cx="8498026" cy="426541"/>
-          </a:xfrm>
-          <a:prstGeom prst="rect">
-            <a:avLst/>
-          </a:prstGeom>
-          <a:noFill/>
-          <a:ln/>
-        </p:spPr>
-        <p:txBody>
-          <a:bodyPr wrap="square" lIns="0" tIns="0" rIns="0" bIns="0" rtlCol="0" anchor="t"/>
-          <a:lstStyle/>
-          <a:p>
-            <a:pPr algn="l" indent="0" marL="0">
-              <a:lnSpc>
-                <a:spcPts val="1680"/>
-              </a:lnSpc>
-              <a:spcBef>
-                <a:spcPts val="300"/>
-              </a:spcBef>
-              <a:spcAft>
-                <a:spcPts val="300"/>
-              </a:spcAft>
-              <a:buNone/>
-            </a:pPr>
-            <a:r>
-              <a:rPr lang="en-US" sz="1200" dirty="0">
-                <a:solidFill>
-                  <a:srgbClr val="1C2833"/>
-                </a:solidFill>
-                <a:latin typeface="Arial" pitchFamily="34" charset="0"/>
-                <a:ea typeface="Arial" pitchFamily="34" charset="-122"/>
-                <a:cs typeface="Arial" pitchFamily="34" charset="-120"/>
-              </a:rPr>
-              <a:t>By the end of this lesson, students will add a single column of 4–6 single-digit numbers using the dot method, correctly identifying both the units digit and the number of dots (the carry).</a:t>
-            </a:r>
-            <a:endParaRPr lang="en-US" sz="1200" dirty="0"/>
-          </a:p>
-        </p:txBody>
-      </p:sp>
-      <p:sp>
-        <p:nvSpPr>
-          <p:cNvPr id="7" name="Text 5"/>
-          <p:cNvSpPr/>
-          <p:nvPr/>
-        </p:nvSpPr>
-        <p:spPr>
-          <a:xfrm>
             <a:off x="406301" y="4434929"/>
             <a:ext cx="8498026" cy="213271"/>
           </a:xfrm>
@@ -2340,7 +2867,7 @@
                 <a:ea typeface="Georgia" pitchFamily="34" charset="-122"/>
                 <a:cs typeface="Georgia" pitchFamily="34" charset="-120"/>
               </a:rPr>
-              <a:t>Differentiation</a:t>
+              <a:t>Core (15 min) — The procedure formalised (cont.)</a:t>
             </a:r>
             <a:endParaRPr lang="en-US" sz="1800" dirty="0"/>
           </a:p>
@@ -2354,8 +2881,8 @@
         </p:nvSpPr>
         <p:spPr>
           <a:xfrm>
-            <a:off x="634901" y="883593"/>
-            <a:ext cx="8102798" cy="525661"/>
+            <a:off x="406301" y="870942"/>
+            <a:ext cx="8498026" cy="213271"/>
           </a:xfrm>
           <a:prstGeom prst="rect">
             <a:avLst/>
@@ -2367,18 +2894,20 @@
           <a:bodyPr wrap="square" lIns="0" tIns="0" rIns="0" bIns="0" rtlCol="0" anchor="t"/>
           <a:lstStyle/>
           <a:p>
-            <a:pPr algn="l" marL="342900" indent="-342900">
-              <a:lnSpc>
-                <a:spcPts val="1620"/>
-              </a:lnSpc>
-              <a:spcAft>
-                <a:spcPts val="300"/>
-              </a:spcAft>
-              <a:buSzPct val="100000"/>
-              <a:buChar char="•"/>
-            </a:pPr>
-            <a:r>
-              <a:rPr lang="en-US" sz="1200" b="1" dirty="0">
+            <a:pPr algn="l" indent="0" marL="0">
+              <a:lnSpc>
+                <a:spcPts val="1680"/>
+              </a:lnSpc>
+              <a:spcBef>
+                <a:spcPts val="300"/>
+              </a:spcBef>
+              <a:spcAft>
+                <a:spcPts val="300"/>
+              </a:spcAft>
+              <a:buNone/>
+            </a:pPr>
+            <a:r>
+              <a:rPr lang="en-US" sz="1200" dirty="0">
                 <a:solidFill>
                   <a:srgbClr val="1C2833"/>
                 </a:solidFill>
@@ -2386,71 +2915,7 @@
                 <a:ea typeface="Arial" pitchFamily="34" charset="-122"/>
                 <a:cs typeface="Arial" pitchFamily="34" charset="-120"/>
               </a:rPr>
-              <a:t>Tier up:</a:t>
-            </a:r>
-            <a:pPr algn="l" indent="0" marL="0">
-              <a:lnSpc>
-                <a:spcPts val="1620"/>
-              </a:lnSpc>
-              <a:spcAft>
-                <a:spcPts val="300"/>
-              </a:spcAft>
-              <a:buNone/>
-            </a:pPr>
-            <a:r>
-              <a:rPr lang="en-US" sz="1200" dirty="0">
-                <a:solidFill>
-                  <a:srgbClr val="1C2833"/>
-                </a:solidFill>
-                <a:latin typeface="Arial" pitchFamily="34" charset="0"/>
-                <a:ea typeface="Arial" pitchFamily="34" charset="-122"/>
-                <a:cs typeface="Arial" pitchFamily="34" charset="-120"/>
-              </a:rPr>
-              <a:t> Solve columns of 8–10 numbers each (challenge sheet).</a:t>
-            </a:r>
-            <a:endParaRPr lang="en-US" sz="1200" dirty="0"/>
-          </a:p>
-          <a:p>
-            <a:pPr algn="l" marL="342900" indent="-342900">
-              <a:lnSpc>
-                <a:spcPts val="1620"/>
-              </a:lnSpc>
-              <a:spcAft>
-                <a:spcPts val="300"/>
-              </a:spcAft>
-              <a:buSzPct val="100000"/>
-              <a:buChar char="•"/>
-            </a:pPr>
-            <a:r>
-              <a:rPr lang="en-US" sz="1200" b="1" dirty="0">
-                <a:solidFill>
-                  <a:srgbClr val="1C2833"/>
-                </a:solidFill>
-                <a:latin typeface="Arial" pitchFamily="34" charset="0"/>
-                <a:ea typeface="Arial" pitchFamily="34" charset="-122"/>
-                <a:cs typeface="Arial" pitchFamily="34" charset="-120"/>
-              </a:rPr>
-              <a:t>Tier down:</a:t>
-            </a:r>
-            <a:pPr algn="l" indent="0" marL="0">
-              <a:lnSpc>
-                <a:spcPts val="1620"/>
-              </a:lnSpc>
-              <a:spcAft>
-                <a:spcPts val="300"/>
-              </a:spcAft>
-              <a:buNone/>
-            </a:pPr>
-            <a:r>
-              <a:rPr lang="en-US" sz="1200" dirty="0">
-                <a:solidFill>
-                  <a:srgbClr val="1C2833"/>
-                </a:solidFill>
-                <a:latin typeface="Arial" pitchFamily="34" charset="0"/>
-                <a:ea typeface="Arial" pitchFamily="34" charset="-122"/>
-                <a:cs typeface="Arial" pitchFamily="34" charset="-120"/>
-              </a:rPr>
-              <a:t> Stick to columns of 4 numbers each. Build up.</a:t>
+              <a:t>(Be honest with yourself — recount aloud. Models the self-checking habit.)</a:t>
             </a:r>
             <a:endParaRPr lang="en-US" sz="1200" dirty="0"/>
           </a:p>
@@ -2608,7 +3073,7 @@
                 <a:ea typeface="Georgia" pitchFamily="34" charset="-122"/>
                 <a:cs typeface="Georgia" pitchFamily="34" charset="-120"/>
               </a:rPr>
-              <a:t>Teacher notes</a:t>
+              <a:t>Core (15 min) — The procedure formalised (cont.)</a:t>
             </a:r>
             <a:endParaRPr lang="en-US" sz="1800" dirty="0"/>
           </a:p>
@@ -2623,7 +3088,7 @@
         <p:spPr>
           <a:xfrm>
             <a:off x="406301" y="870942"/>
-            <a:ext cx="8498026" cy="639812"/>
+            <a:ext cx="8498026" cy="213271"/>
           </a:xfrm>
           <a:prstGeom prst="rect">
             <a:avLst/>
@@ -2656,7 +3121,7 @@
                 <a:ea typeface="Arial" pitchFamily="34" charset="-122"/>
                 <a:cs typeface="Arial" pitchFamily="34" charset="-120"/>
               </a:rPr>
-              <a:t>– Common error: students forget that the dot count IS the carry — they recount the dots wrongly. Reinforce: 1 dot = +1 carry, 2 dots = +2 carry, etc. – A second common error: students mark a dot but forget to subtract 10 from the running total — so they keep counting up. Watch for total &gt; 20 mid-column; if so, they missed a subtraction.</a:t>
+              <a:t>Correct walk-through:</a:t>
             </a:r>
             <a:endParaRPr lang="en-US" sz="1200" dirty="0"/>
           </a:p>
@@ -2665,6 +3130,364 @@
       <p:sp>
         <p:nvSpPr>
           <p:cNvPr id="5" name="Text 3"/>
+          <p:cNvSpPr/>
+          <p:nvPr/>
+        </p:nvSpPr>
+        <p:spPr>
+          <a:xfrm>
+            <a:off x="634901" y="1173063"/>
+            <a:ext cx="8102798" cy="2232124"/>
+          </a:xfrm>
+          <a:prstGeom prst="rect">
+            <a:avLst/>
+          </a:prstGeom>
+          <a:noFill/>
+          <a:ln/>
+        </p:spPr>
+        <p:txBody>
+          <a:bodyPr wrap="square" lIns="0" tIns="0" rIns="0" bIns="0" rtlCol="0" anchor="t"/>
+          <a:lstStyle/>
+          <a:p>
+            <a:pPr algn="l" marL="342900" indent="-342900">
+              <a:lnSpc>
+                <a:spcPts val="1620"/>
+              </a:lnSpc>
+              <a:spcAft>
+                <a:spcPts val="300"/>
+              </a:spcAft>
+              <a:buSzPct val="100000"/>
+              <a:buChar char="•"/>
+            </a:pPr>
+            <a:r>
+              <a:rPr lang="en-US" sz="1200" dirty="0">
+                <a:solidFill>
+                  <a:srgbClr val="1C2833"/>
+                </a:solidFill>
+                <a:latin typeface="Arial" pitchFamily="34" charset="0"/>
+                <a:ea typeface="Arial" pitchFamily="34" charset="-122"/>
+                <a:cs typeface="Arial" pitchFamily="34" charset="-120"/>
+              </a:rPr>
+              <a:t>Start: 0</a:t>
+            </a:r>
+            <a:endParaRPr lang="en-US" sz="1200" dirty="0"/>
+          </a:p>
+          <a:p>
+            <a:pPr algn="l" marL="342900" indent="-342900">
+              <a:lnSpc>
+                <a:spcPts val="1620"/>
+              </a:lnSpc>
+              <a:spcAft>
+                <a:spcPts val="300"/>
+              </a:spcAft>
+              <a:buSzPct val="100000"/>
+              <a:buChar char="•"/>
+            </a:pPr>
+            <a:r>
+              <a:rPr lang="en-US" sz="1200" dirty="0">
+                <a:solidFill>
+                  <a:srgbClr val="1C2833"/>
+                </a:solidFill>
+                <a:latin typeface="Arial" pitchFamily="34" charset="0"/>
+                <a:ea typeface="Arial" pitchFamily="34" charset="-122"/>
+                <a:cs typeface="Arial" pitchFamily="34" charset="-120"/>
+              </a:rPr>
+              <a:t>+ 6 → 6</a:t>
+            </a:r>
+            <a:endParaRPr lang="en-US" sz="1200" dirty="0"/>
+          </a:p>
+          <a:p>
+            <a:pPr algn="l" marL="342900" indent="-342900">
+              <a:lnSpc>
+                <a:spcPts val="1620"/>
+              </a:lnSpc>
+              <a:spcAft>
+                <a:spcPts val="300"/>
+              </a:spcAft>
+              <a:buSzPct val="100000"/>
+              <a:buChar char="•"/>
+            </a:pPr>
+            <a:r>
+              <a:rPr lang="en-US" sz="1200" dirty="0">
+                <a:solidFill>
+                  <a:srgbClr val="1C2833"/>
+                </a:solidFill>
+                <a:latin typeface="Arial" pitchFamily="34" charset="0"/>
+                <a:ea typeface="Arial" pitchFamily="34" charset="-122"/>
+                <a:cs typeface="Arial" pitchFamily="34" charset="-120"/>
+              </a:rPr>
+              <a:t>+ 3 → 9</a:t>
+            </a:r>
+            <a:endParaRPr lang="en-US" sz="1200" dirty="0"/>
+          </a:p>
+          <a:p>
+            <a:pPr algn="l" marL="342900" indent="-342900">
+              <a:lnSpc>
+                <a:spcPts val="1620"/>
+              </a:lnSpc>
+              <a:spcAft>
+                <a:spcPts val="300"/>
+              </a:spcAft>
+              <a:buSzPct val="100000"/>
+              <a:buChar char="•"/>
+            </a:pPr>
+            <a:r>
+              <a:rPr lang="en-US" sz="1200" dirty="0">
+                <a:solidFill>
+                  <a:srgbClr val="1C2833"/>
+                </a:solidFill>
+                <a:latin typeface="Arial" pitchFamily="34" charset="0"/>
+                <a:ea typeface="Arial" pitchFamily="34" charset="-122"/>
+                <a:cs typeface="Arial" pitchFamily="34" charset="-120"/>
+              </a:rPr>
+              <a:t>+ 7 → 16. Total ≥ 10: mark </a:t>
+            </a:r>
+            <a:pPr algn="l" indent="0" marL="0">
+              <a:lnSpc>
+                <a:spcPts val="1620"/>
+              </a:lnSpc>
+              <a:spcAft>
+                <a:spcPts val="300"/>
+              </a:spcAft>
+              <a:buNone/>
+            </a:pPr>
+            <a:r>
+              <a:rPr lang="en-US" sz="1200" b="1" dirty="0">
+                <a:solidFill>
+                  <a:srgbClr val="1C2833"/>
+                </a:solidFill>
+                <a:latin typeface="Arial" pitchFamily="34" charset="0"/>
+                <a:ea typeface="Arial" pitchFamily="34" charset="-122"/>
+                <a:cs typeface="Arial" pitchFamily="34" charset="-120"/>
+              </a:rPr>
+              <a:t>·</a:t>
+            </a:r>
+            <a:pPr algn="l" indent="0" marL="0">
+              <a:lnSpc>
+                <a:spcPts val="1620"/>
+              </a:lnSpc>
+              <a:spcAft>
+                <a:spcPts val="300"/>
+              </a:spcAft>
+              <a:buNone/>
+            </a:pPr>
+            <a:r>
+              <a:rPr lang="en-US" sz="1200" dirty="0">
+                <a:solidFill>
+                  <a:srgbClr val="1C2833"/>
+                </a:solidFill>
+                <a:latin typeface="Arial" pitchFamily="34" charset="0"/>
+                <a:ea typeface="Arial" pitchFamily="34" charset="-122"/>
+                <a:cs typeface="Arial" pitchFamily="34" charset="-120"/>
+              </a:rPr>
+              <a:t> above 7. Total = 6.</a:t>
+            </a:r>
+            <a:endParaRPr lang="en-US" sz="1200" dirty="0"/>
+          </a:p>
+          <a:p>
+            <a:pPr algn="l" marL="342900" indent="-342900">
+              <a:lnSpc>
+                <a:spcPts val="1620"/>
+              </a:lnSpc>
+              <a:spcAft>
+                <a:spcPts val="300"/>
+              </a:spcAft>
+              <a:buSzPct val="100000"/>
+              <a:buChar char="•"/>
+            </a:pPr>
+            <a:r>
+              <a:rPr lang="en-US" sz="1200" dirty="0">
+                <a:solidFill>
+                  <a:srgbClr val="1C2833"/>
+                </a:solidFill>
+                <a:latin typeface="Arial" pitchFamily="34" charset="0"/>
+                <a:ea typeface="Arial" pitchFamily="34" charset="-122"/>
+                <a:cs typeface="Arial" pitchFamily="34" charset="-120"/>
+              </a:rPr>
+              <a:t>+ 5 → 11. Total ≥ 10: mark </a:t>
+            </a:r>
+            <a:pPr algn="l" indent="0" marL="0">
+              <a:lnSpc>
+                <a:spcPts val="1620"/>
+              </a:lnSpc>
+              <a:spcAft>
+                <a:spcPts val="300"/>
+              </a:spcAft>
+              <a:buNone/>
+            </a:pPr>
+            <a:r>
+              <a:rPr lang="en-US" sz="1200" b="1" dirty="0">
+                <a:solidFill>
+                  <a:srgbClr val="1C2833"/>
+                </a:solidFill>
+                <a:latin typeface="Arial" pitchFamily="34" charset="0"/>
+                <a:ea typeface="Arial" pitchFamily="34" charset="-122"/>
+                <a:cs typeface="Arial" pitchFamily="34" charset="-120"/>
+              </a:rPr>
+              <a:t>·</a:t>
+            </a:r>
+            <a:pPr algn="l" indent="0" marL="0">
+              <a:lnSpc>
+                <a:spcPts val="1620"/>
+              </a:lnSpc>
+              <a:spcAft>
+                <a:spcPts val="300"/>
+              </a:spcAft>
+              <a:buNone/>
+            </a:pPr>
+            <a:r>
+              <a:rPr lang="en-US" sz="1200" dirty="0">
+                <a:solidFill>
+                  <a:srgbClr val="1C2833"/>
+                </a:solidFill>
+                <a:latin typeface="Arial" pitchFamily="34" charset="0"/>
+                <a:ea typeface="Arial" pitchFamily="34" charset="-122"/>
+                <a:cs typeface="Arial" pitchFamily="34" charset="-120"/>
+              </a:rPr>
+              <a:t> above 5. Total = 1.</a:t>
+            </a:r>
+            <a:endParaRPr lang="en-US" sz="1200" dirty="0"/>
+          </a:p>
+          <a:p>
+            <a:pPr algn="l" marL="342900" indent="-342900">
+              <a:lnSpc>
+                <a:spcPts val="1620"/>
+              </a:lnSpc>
+              <a:spcAft>
+                <a:spcPts val="300"/>
+              </a:spcAft>
+              <a:buSzPct val="100000"/>
+              <a:buChar char="•"/>
+            </a:pPr>
+            <a:r>
+              <a:rPr lang="en-US" sz="1200" dirty="0">
+                <a:solidFill>
+                  <a:srgbClr val="1C2833"/>
+                </a:solidFill>
+                <a:latin typeface="Arial" pitchFamily="34" charset="0"/>
+                <a:ea typeface="Arial" pitchFamily="34" charset="-122"/>
+                <a:cs typeface="Arial" pitchFamily="34" charset="-120"/>
+              </a:rPr>
+              <a:t>+ 8 → 9.</a:t>
+            </a:r>
+            <a:endParaRPr lang="en-US" sz="1200" dirty="0"/>
+          </a:p>
+          <a:p>
+            <a:pPr algn="l" marL="342900" indent="-342900">
+              <a:lnSpc>
+                <a:spcPts val="1620"/>
+              </a:lnSpc>
+              <a:spcAft>
+                <a:spcPts val="300"/>
+              </a:spcAft>
+              <a:buSzPct val="100000"/>
+              <a:buChar char="•"/>
+            </a:pPr>
+            <a:r>
+              <a:rPr lang="en-US" sz="1200" dirty="0">
+                <a:solidFill>
+                  <a:srgbClr val="1C2833"/>
+                </a:solidFill>
+                <a:latin typeface="Arial" pitchFamily="34" charset="0"/>
+                <a:ea typeface="Arial" pitchFamily="34" charset="-122"/>
+                <a:cs typeface="Arial" pitchFamily="34" charset="-120"/>
+              </a:rPr>
+              <a:t>+ 4 → 13. Total ≥ 10: mark </a:t>
+            </a:r>
+            <a:pPr algn="l" indent="0" marL="0">
+              <a:lnSpc>
+                <a:spcPts val="1620"/>
+              </a:lnSpc>
+              <a:spcAft>
+                <a:spcPts val="300"/>
+              </a:spcAft>
+              <a:buNone/>
+            </a:pPr>
+            <a:r>
+              <a:rPr lang="en-US" sz="1200" b="1" dirty="0">
+                <a:solidFill>
+                  <a:srgbClr val="1C2833"/>
+                </a:solidFill>
+                <a:latin typeface="Arial" pitchFamily="34" charset="0"/>
+                <a:ea typeface="Arial" pitchFamily="34" charset="-122"/>
+                <a:cs typeface="Arial" pitchFamily="34" charset="-120"/>
+              </a:rPr>
+              <a:t>·</a:t>
+            </a:r>
+            <a:pPr algn="l" indent="0" marL="0">
+              <a:lnSpc>
+                <a:spcPts val="1620"/>
+              </a:lnSpc>
+              <a:spcAft>
+                <a:spcPts val="300"/>
+              </a:spcAft>
+              <a:buNone/>
+            </a:pPr>
+            <a:r>
+              <a:rPr lang="en-US" sz="1200" dirty="0">
+                <a:solidFill>
+                  <a:srgbClr val="1C2833"/>
+                </a:solidFill>
+                <a:latin typeface="Arial" pitchFamily="34" charset="0"/>
+                <a:ea typeface="Arial" pitchFamily="34" charset="-122"/>
+                <a:cs typeface="Arial" pitchFamily="34" charset="-120"/>
+              </a:rPr>
+              <a:t> above 4. Total = 3.</a:t>
+            </a:r>
+            <a:endParaRPr lang="en-US" sz="1200" dirty="0"/>
+          </a:p>
+          <a:p>
+            <a:pPr algn="l" marL="342900" indent="-342900">
+              <a:lnSpc>
+                <a:spcPts val="1620"/>
+              </a:lnSpc>
+              <a:spcAft>
+                <a:spcPts val="300"/>
+              </a:spcAft>
+              <a:buSzPct val="100000"/>
+              <a:buChar char="•"/>
+            </a:pPr>
+            <a:r>
+              <a:rPr lang="en-US" sz="1200" dirty="0">
+                <a:solidFill>
+                  <a:srgbClr val="1C2833"/>
+                </a:solidFill>
+                <a:latin typeface="Arial" pitchFamily="34" charset="0"/>
+                <a:ea typeface="Arial" pitchFamily="34" charset="-122"/>
+                <a:cs typeface="Arial" pitchFamily="34" charset="-120"/>
+              </a:rPr>
+              <a:t>+ 2 → 5.</a:t>
+            </a:r>
+            <a:endParaRPr lang="en-US" sz="1200" dirty="0"/>
+          </a:p>
+          <a:p>
+            <a:pPr algn="l" marL="342900" indent="-342900">
+              <a:lnSpc>
+                <a:spcPts val="1620"/>
+              </a:lnSpc>
+              <a:spcAft>
+                <a:spcPts val="300"/>
+              </a:spcAft>
+              <a:buSzPct val="100000"/>
+              <a:buChar char="•"/>
+            </a:pPr>
+            <a:r>
+              <a:rPr lang="en-US" sz="1200" b="1" dirty="0">
+                <a:solidFill>
+                  <a:srgbClr val="1C2833"/>
+                </a:solidFill>
+                <a:latin typeface="Arial" pitchFamily="34" charset="0"/>
+                <a:ea typeface="Arial" pitchFamily="34" charset="-122"/>
+                <a:cs typeface="Arial" pitchFamily="34" charset="-120"/>
+              </a:rPr>
+              <a:t>Units: 5. Dots: 3. Carry 3 to next column.</a:t>
+            </a:r>
+            <a:endParaRPr lang="en-US" sz="1200" dirty="0"/>
+          </a:p>
+        </p:txBody>
+      </p:sp>
+      <p:sp>
+        <p:nvSpPr>
+          <p:cNvPr id="6" name="Text 4"/>
           <p:cNvSpPr/>
           <p:nvPr/>
         </p:nvSpPr>
@@ -2814,6 +3637,2179 @@
                 <a:ea typeface="Georgia" pitchFamily="34" charset="-122"/>
                 <a:cs typeface="Georgia" pitchFamily="34" charset="-120"/>
               </a:rPr>
+              <a:t>Core (15 min) — The procedure formalised (cont.)</a:t>
+            </a:r>
+            <a:endParaRPr lang="en-US" sz="1800" dirty="0"/>
+          </a:p>
+        </p:txBody>
+      </p:sp>
+      <p:sp>
+        <p:nvSpPr>
+          <p:cNvPr id="4" name="Text 2"/>
+          <p:cNvSpPr/>
+          <p:nvPr/>
+        </p:nvSpPr>
+        <p:spPr>
+          <a:xfrm>
+            <a:off x="406301" y="870942"/>
+            <a:ext cx="8498026" cy="213271"/>
+          </a:xfrm>
+          <a:prstGeom prst="rect">
+            <a:avLst/>
+          </a:prstGeom>
+          <a:noFill/>
+          <a:ln/>
+        </p:spPr>
+        <p:txBody>
+          <a:bodyPr wrap="square" lIns="0" tIns="0" rIns="0" bIns="0" rtlCol="0" anchor="t"/>
+          <a:lstStyle/>
+          <a:p>
+            <a:pPr algn="l" indent="0" marL="0">
+              <a:lnSpc>
+                <a:spcPts val="1680"/>
+              </a:lnSpc>
+              <a:spcBef>
+                <a:spcPts val="300"/>
+              </a:spcBef>
+              <a:spcAft>
+                <a:spcPts val="300"/>
+              </a:spcAft>
+              <a:buNone/>
+            </a:pPr>
+            <a:r>
+              <a:rPr lang="en-US" sz="1200" dirty="0">
+                <a:solidFill>
+                  <a:srgbClr val="1C2833"/>
+                </a:solidFill>
+                <a:latin typeface="Arial" pitchFamily="34" charset="0"/>
+                <a:ea typeface="Arial" pitchFamily="34" charset="-122"/>
+                <a:cs typeface="Arial" pitchFamily="34" charset="-120"/>
+              </a:rPr>
+              <a:t>Verify by standard addition: 6+3+7+5+8+4+2 = 35. Units = 5. Carry = 3. ✓</a:t>
+            </a:r>
+            <a:endParaRPr lang="en-US" sz="1200" dirty="0"/>
+          </a:p>
+        </p:txBody>
+      </p:sp>
+      <p:sp>
+        <p:nvSpPr>
+          <p:cNvPr id="5" name="Text 3"/>
+          <p:cNvSpPr/>
+          <p:nvPr/>
+        </p:nvSpPr>
+        <p:spPr>
+          <a:xfrm>
+            <a:off x="406301" y="4434929"/>
+            <a:ext cx="8498026" cy="213271"/>
+          </a:xfrm>
+          <a:prstGeom prst="rect">
+            <a:avLst/>
+          </a:prstGeom>
+          <a:noFill/>
+          <a:ln/>
+        </p:spPr>
+        <p:txBody>
+          <a:bodyPr wrap="square" lIns="0" tIns="0" rIns="0" bIns="0" rtlCol="0" anchor="t"/>
+          <a:lstStyle/>
+          <a:p>
+            <a:pPr algn="l" indent="0" marL="0">
+              <a:lnSpc>
+                <a:spcPts val="1680"/>
+              </a:lnSpc>
+              <a:spcBef>
+                <a:spcPts val="300"/>
+              </a:spcBef>
+              <a:spcAft>
+                <a:spcPts val="300"/>
+              </a:spcAft>
+              <a:buNone/>
+            </a:pPr>
+            <a:r>
+              <a:rPr lang="en-US" sz="1200" dirty="0">
+                <a:solidFill>
+                  <a:srgbClr val="1C2833"/>
+                </a:solidFill>
+                <a:latin typeface="Arial" pitchFamily="34" charset="0"/>
+                <a:ea typeface="Arial" pitchFamily="34" charset="-122"/>
+                <a:cs typeface="Arial" pitchFamily="34" charset="-120"/>
+              </a:rPr>
+              <a:t>Middle ·  · IKS Curriculum</a:t>
+            </a:r>
+            <a:endParaRPr lang="en-US" sz="1200" dirty="0"/>
+          </a:p>
+        </p:txBody>
+      </p:sp>
+    </p:spTree>
+  </p:cSld>
+  <p:clrMapOvr>
+    <a:masterClrMapping/>
+  </p:clrMapOvr>
+</p:sld>
+</file>
+
+<file path=ppt/slides/slide13.xml><?xml version="1.0" encoding="utf-8"?>
+<p:sld xmlns:a="http://schemas.openxmlformats.org/drawingml/2006/main" xmlns:r="http://schemas.openxmlformats.org/officeDocument/2006/relationships" xmlns:p="http://schemas.openxmlformats.org/presentationml/2006/main">
+  <p:cSld name="Slide 13">
+    <p:bg>
+      <p:bgPr>
+        <a:solidFill>
+          <a:srgbClr val="FFFFFF"/>
+        </a:solidFill>
+      </p:bgPr>
+    </p:bg>
+    <p:spTree>
+      <p:nvGrpSpPr>
+        <p:cNvPr id="1" name=""/>
+        <p:cNvGrpSpPr/>
+        <p:nvPr/>
+      </p:nvGrpSpPr>
+      <p:grpSpPr>
+        <a:xfrm>
+          <a:off x="0" y="0"/>
+          <a:ext cx="0" cy="0"/>
+          <a:chOff x="0" y="0"/>
+          <a:chExt cx="0" cy="0"/>
+        </a:xfrm>
+      </p:grpSpPr>
+      <p:sp>
+        <p:nvSpPr>
+          <p:cNvPr id="2" name="Text 0"/>
+          <p:cNvSpPr/>
+          <p:nvPr/>
+        </p:nvSpPr>
+        <p:spPr>
+          <a:xfrm>
+            <a:off x="0" y="0"/>
+            <a:ext cx="9144000" cy="101501"/>
+          </a:xfrm>
+          <a:prstGeom prst="rect">
+            <a:avLst/>
+          </a:prstGeom>
+          <a:solidFill>
+            <a:srgbClr val="277884"/>
+          </a:solidFill>
+          <a:ln/>
+        </p:spPr>
+        <p:txBody>
+          <a:bodyPr wrap="square" rtlCol="0" anchor="ctr"/>
+          <a:lstStyle/>
+          <a:p>
+            <a:pPr indent="0" marL="0">
+              <a:buNone/>
+            </a:pPr>
+            <a:endParaRPr lang="en-US" dirty="0"/>
+          </a:p>
+        </p:txBody>
+      </p:sp>
+      <p:sp>
+        <p:nvSpPr>
+          <p:cNvPr id="3" name="Text 1"/>
+          <p:cNvSpPr/>
+          <p:nvPr/>
+        </p:nvSpPr>
+        <p:spPr>
+          <a:xfrm>
+            <a:off x="406301" y="457051"/>
+            <a:ext cx="8498026" cy="274290"/>
+          </a:xfrm>
+          <a:prstGeom prst="rect">
+            <a:avLst/>
+          </a:prstGeom>
+          <a:noFill/>
+          <a:ln/>
+        </p:spPr>
+        <p:txBody>
+          <a:bodyPr wrap="square" lIns="0" tIns="0" rIns="0" bIns="0" rtlCol="0" anchor="t"/>
+          <a:lstStyle/>
+          <a:p>
+            <a:pPr algn="l" indent="0" marL="0">
+              <a:lnSpc>
+                <a:spcPts val="2160"/>
+              </a:lnSpc>
+              <a:spcBef>
+                <a:spcPts val="600"/>
+              </a:spcBef>
+              <a:spcAft>
+                <a:spcPts val="800"/>
+              </a:spcAft>
+              <a:buNone/>
+            </a:pPr>
+            <a:r>
+              <a:rPr lang="en-US" sz="1800" b="1" dirty="0">
+                <a:solidFill>
+                  <a:srgbClr val="FE4447"/>
+                </a:solidFill>
+                <a:latin typeface="Georgia" pitchFamily="34" charset="0"/>
+                <a:ea typeface="Georgia" pitchFamily="34" charset="-122"/>
+                <a:cs typeface="Georgia" pitchFamily="34" charset="-120"/>
+              </a:rPr>
+              <a:t>Activity (20 min) — Single-column drill</a:t>
+            </a:r>
+            <a:endParaRPr lang="en-US" sz="1800" dirty="0"/>
+          </a:p>
+        </p:txBody>
+      </p:sp>
+      <p:sp>
+        <p:nvSpPr>
+          <p:cNvPr id="4" name="Text 2"/>
+          <p:cNvSpPr/>
+          <p:nvPr/>
+        </p:nvSpPr>
+        <p:spPr>
+          <a:xfrm>
+            <a:off x="634901" y="883593"/>
+            <a:ext cx="8102798" cy="1218902"/>
+          </a:xfrm>
+          <a:prstGeom prst="rect">
+            <a:avLst/>
+          </a:prstGeom>
+          <a:noFill/>
+          <a:ln/>
+        </p:spPr>
+        <p:txBody>
+          <a:bodyPr wrap="square" lIns="0" tIns="0" rIns="0" bIns="0" rtlCol="0" anchor="t"/>
+          <a:lstStyle/>
+          <a:p>
+            <a:pPr algn="l" marL="342900" indent="-342900">
+              <a:lnSpc>
+                <a:spcPts val="1620"/>
+              </a:lnSpc>
+              <a:spcAft>
+                <a:spcPts val="300"/>
+              </a:spcAft>
+              <a:buSzPct val="100000"/>
+              <a:buChar char="•"/>
+            </a:pPr>
+            <a:r>
+              <a:rPr lang="en-US" sz="1200" dirty="0">
+                <a:solidFill>
+                  <a:srgbClr val="1C2833"/>
+                </a:solidFill>
+                <a:latin typeface="Arial" pitchFamily="34" charset="0"/>
+                <a:ea typeface="Arial" pitchFamily="34" charset="-122"/>
+                <a:cs typeface="Arial" pitchFamily="34" charset="-120"/>
+              </a:rPr>
+              <a:t>Hand out worksheet of 10 columns.</a:t>
+            </a:r>
+            <a:endParaRPr lang="en-US" sz="1200" dirty="0"/>
+          </a:p>
+          <a:p>
+            <a:pPr algn="l" marL="342900" indent="-342900">
+              <a:lnSpc>
+                <a:spcPts val="1620"/>
+              </a:lnSpc>
+              <a:spcAft>
+                <a:spcPts val="300"/>
+              </a:spcAft>
+              <a:buSzPct val="100000"/>
+              <a:buChar char="•"/>
+            </a:pPr>
+            <a:r>
+              <a:rPr lang="en-US" sz="1200" dirty="0">
+                <a:solidFill>
+                  <a:srgbClr val="1C2833"/>
+                </a:solidFill>
+                <a:latin typeface="Arial" pitchFamily="34" charset="0"/>
+                <a:ea typeface="Arial" pitchFamily="34" charset="-122"/>
+                <a:cs typeface="Arial" pitchFamily="34" charset="-120"/>
+              </a:rPr>
+              <a:t>5 minutes individual work.</a:t>
+            </a:r>
+            <a:endParaRPr lang="en-US" sz="1200" dirty="0"/>
+          </a:p>
+          <a:p>
+            <a:pPr algn="l" marL="342900" indent="-342900">
+              <a:lnSpc>
+                <a:spcPts val="1620"/>
+              </a:lnSpc>
+              <a:spcAft>
+                <a:spcPts val="300"/>
+              </a:spcAft>
+              <a:buSzPct val="100000"/>
+              <a:buChar char="•"/>
+            </a:pPr>
+            <a:r>
+              <a:rPr lang="en-US" sz="1200" dirty="0">
+                <a:solidFill>
+                  <a:srgbClr val="1C2833"/>
+                </a:solidFill>
+                <a:latin typeface="Arial" pitchFamily="34" charset="0"/>
+                <a:ea typeface="Arial" pitchFamily="34" charset="-122"/>
+                <a:cs typeface="Arial" pitchFamily="34" charset="-120"/>
+              </a:rPr>
+              <a:t>10 minutes paired correction: partner-A solves column 1 aloud while partner-B watches and corrects. Swap. Continue alternating.</a:t>
+            </a:r>
+            <a:endParaRPr lang="en-US" sz="1200" dirty="0"/>
+          </a:p>
+          <a:p>
+            <a:pPr algn="l" marL="342900" indent="-342900">
+              <a:lnSpc>
+                <a:spcPts val="1620"/>
+              </a:lnSpc>
+              <a:spcAft>
+                <a:spcPts val="300"/>
+              </a:spcAft>
+              <a:buSzPct val="100000"/>
+              <a:buChar char="•"/>
+            </a:pPr>
+            <a:r>
+              <a:rPr lang="en-US" sz="1200" dirty="0">
+                <a:solidFill>
+                  <a:srgbClr val="1C2833"/>
+                </a:solidFill>
+                <a:latin typeface="Arial" pitchFamily="34" charset="0"/>
+                <a:ea typeface="Arial" pitchFamily="34" charset="-122"/>
+                <a:cs typeface="Arial" pitchFamily="34" charset="-120"/>
+              </a:rPr>
+              <a:t>Final 5 minutes: silent retry on any column students got wrong.</a:t>
+            </a:r>
+            <a:endParaRPr lang="en-US" sz="1200" dirty="0"/>
+          </a:p>
+        </p:txBody>
+      </p:sp>
+      <p:sp>
+        <p:nvSpPr>
+          <p:cNvPr id="5" name="Text 3"/>
+          <p:cNvSpPr/>
+          <p:nvPr/>
+        </p:nvSpPr>
+        <p:spPr>
+          <a:xfrm>
+            <a:off x="406301" y="4434929"/>
+            <a:ext cx="8498026" cy="213271"/>
+          </a:xfrm>
+          <a:prstGeom prst="rect">
+            <a:avLst/>
+          </a:prstGeom>
+          <a:noFill/>
+          <a:ln/>
+        </p:spPr>
+        <p:txBody>
+          <a:bodyPr wrap="square" lIns="0" tIns="0" rIns="0" bIns="0" rtlCol="0" anchor="t"/>
+          <a:lstStyle/>
+          <a:p>
+            <a:pPr algn="l" indent="0" marL="0">
+              <a:lnSpc>
+                <a:spcPts val="1680"/>
+              </a:lnSpc>
+              <a:spcBef>
+                <a:spcPts val="300"/>
+              </a:spcBef>
+              <a:spcAft>
+                <a:spcPts val="300"/>
+              </a:spcAft>
+              <a:buNone/>
+            </a:pPr>
+            <a:r>
+              <a:rPr lang="en-US" sz="1200" dirty="0">
+                <a:solidFill>
+                  <a:srgbClr val="1C2833"/>
+                </a:solidFill>
+                <a:latin typeface="Arial" pitchFamily="34" charset="0"/>
+                <a:ea typeface="Arial" pitchFamily="34" charset="-122"/>
+                <a:cs typeface="Arial" pitchFamily="34" charset="-120"/>
+              </a:rPr>
+              <a:t>Middle ·  · IKS Curriculum</a:t>
+            </a:r>
+            <a:endParaRPr lang="en-US" sz="1200" dirty="0"/>
+          </a:p>
+        </p:txBody>
+      </p:sp>
+    </p:spTree>
+  </p:cSld>
+  <p:clrMapOvr>
+    <a:masterClrMapping/>
+  </p:clrMapOvr>
+</p:sld>
+</file>
+
+<file path=ppt/slides/slide14.xml><?xml version="1.0" encoding="utf-8"?>
+<p:sld xmlns:a="http://schemas.openxmlformats.org/drawingml/2006/main" xmlns:r="http://schemas.openxmlformats.org/officeDocument/2006/relationships" xmlns:p="http://schemas.openxmlformats.org/presentationml/2006/main">
+  <p:cSld name="Slide 14">
+    <p:bg>
+      <p:bgPr>
+        <a:solidFill>
+          <a:srgbClr val="FFFFFF"/>
+        </a:solidFill>
+      </p:bgPr>
+    </p:bg>
+    <p:spTree>
+      <p:nvGrpSpPr>
+        <p:cNvPr id="1" name=""/>
+        <p:cNvGrpSpPr/>
+        <p:nvPr/>
+      </p:nvGrpSpPr>
+      <p:grpSpPr>
+        <a:xfrm>
+          <a:off x="0" y="0"/>
+          <a:ext cx="0" cy="0"/>
+          <a:chOff x="0" y="0"/>
+          <a:chExt cx="0" cy="0"/>
+        </a:xfrm>
+      </p:grpSpPr>
+      <p:sp>
+        <p:nvSpPr>
+          <p:cNvPr id="2" name="Text 0"/>
+          <p:cNvSpPr/>
+          <p:nvPr/>
+        </p:nvSpPr>
+        <p:spPr>
+          <a:xfrm>
+            <a:off x="0" y="0"/>
+            <a:ext cx="9144000" cy="101501"/>
+          </a:xfrm>
+          <a:prstGeom prst="rect">
+            <a:avLst/>
+          </a:prstGeom>
+          <a:solidFill>
+            <a:srgbClr val="277884"/>
+          </a:solidFill>
+          <a:ln/>
+        </p:spPr>
+        <p:txBody>
+          <a:bodyPr wrap="square" rtlCol="0" anchor="ctr"/>
+          <a:lstStyle/>
+          <a:p>
+            <a:pPr indent="0" marL="0">
+              <a:buNone/>
+            </a:pPr>
+            <a:endParaRPr lang="en-US" dirty="0"/>
+          </a:p>
+        </p:txBody>
+      </p:sp>
+      <p:sp>
+        <p:nvSpPr>
+          <p:cNvPr id="3" name="Text 1"/>
+          <p:cNvSpPr/>
+          <p:nvPr/>
+        </p:nvSpPr>
+        <p:spPr>
+          <a:xfrm>
+            <a:off x="406301" y="457051"/>
+            <a:ext cx="8498026" cy="274290"/>
+          </a:xfrm>
+          <a:prstGeom prst="rect">
+            <a:avLst/>
+          </a:prstGeom>
+          <a:noFill/>
+          <a:ln/>
+        </p:spPr>
+        <p:txBody>
+          <a:bodyPr wrap="square" lIns="0" tIns="0" rIns="0" bIns="0" rtlCol="0" anchor="t"/>
+          <a:lstStyle/>
+          <a:p>
+            <a:pPr algn="l" indent="0" marL="0">
+              <a:lnSpc>
+                <a:spcPts val="2160"/>
+              </a:lnSpc>
+              <a:spcBef>
+                <a:spcPts val="600"/>
+              </a:spcBef>
+              <a:spcAft>
+                <a:spcPts val="800"/>
+              </a:spcAft>
+              <a:buNone/>
+            </a:pPr>
+            <a:r>
+              <a:rPr lang="en-US" sz="1800" b="1" dirty="0">
+                <a:solidFill>
+                  <a:srgbClr val="FE4447"/>
+                </a:solidFill>
+                <a:latin typeface="Georgia" pitchFamily="34" charset="0"/>
+                <a:ea typeface="Georgia" pitchFamily="34" charset="-122"/>
+                <a:cs typeface="Georgia" pitchFamily="34" charset="-120"/>
+              </a:rPr>
+              <a:t>Wrap-up (5 min)</a:t>
+            </a:r>
+            <a:endParaRPr lang="en-US" sz="1800" dirty="0"/>
+          </a:p>
+        </p:txBody>
+      </p:sp>
+      <p:sp>
+        <p:nvSpPr>
+          <p:cNvPr id="4" name="Text 2"/>
+          <p:cNvSpPr/>
+          <p:nvPr/>
+        </p:nvSpPr>
+        <p:spPr>
+          <a:xfrm>
+            <a:off x="634901" y="883593"/>
+            <a:ext cx="8102798" cy="788491"/>
+          </a:xfrm>
+          <a:prstGeom prst="rect">
+            <a:avLst/>
+          </a:prstGeom>
+          <a:noFill/>
+          <a:ln/>
+        </p:spPr>
+        <p:txBody>
+          <a:bodyPr wrap="square" lIns="0" tIns="0" rIns="0" bIns="0" rtlCol="0" anchor="t"/>
+          <a:lstStyle/>
+          <a:p>
+            <a:pPr algn="l" marL="342900" indent="-342900">
+              <a:lnSpc>
+                <a:spcPts val="1620"/>
+              </a:lnSpc>
+              <a:spcAft>
+                <a:spcPts val="300"/>
+              </a:spcAft>
+              <a:buSzPct val="100000"/>
+              <a:buChar char="•"/>
+            </a:pPr>
+            <a:r>
+              <a:rPr lang="en-US" sz="1200" dirty="0">
+                <a:solidFill>
+                  <a:srgbClr val="1C2833"/>
+                </a:solidFill>
+                <a:latin typeface="Arial" pitchFamily="34" charset="0"/>
+                <a:ea typeface="Arial" pitchFamily="34" charset="-122"/>
+                <a:cs typeface="Arial" pitchFamily="34" charset="-120"/>
+              </a:rPr>
+              <a:t>Hand out the </a:t>
+            </a:r>
+            <a:pPr algn="l" indent="0" marL="0">
+              <a:lnSpc>
+                <a:spcPts val="1620"/>
+              </a:lnSpc>
+              <a:spcAft>
+                <a:spcPts val="300"/>
+              </a:spcAft>
+              <a:buNone/>
+            </a:pPr>
+            <a:r>
+              <a:rPr lang="en-US" sz="1200" b="1" dirty="0">
+                <a:solidFill>
+                  <a:srgbClr val="1C2833"/>
+                </a:solidFill>
+                <a:latin typeface="Arial" pitchFamily="34" charset="0"/>
+                <a:ea typeface="Arial" pitchFamily="34" charset="-122"/>
+                <a:cs typeface="Arial" pitchFamily="34" charset="-120"/>
+              </a:rPr>
+              <a:t>formative quiz</a:t>
+            </a:r>
+            <a:pPr algn="l" indent="0" marL="0">
+              <a:lnSpc>
+                <a:spcPts val="1620"/>
+              </a:lnSpc>
+              <a:spcAft>
+                <a:spcPts val="300"/>
+              </a:spcAft>
+              <a:buNone/>
+            </a:pPr>
+            <a:r>
+              <a:rPr lang="en-US" sz="1200" dirty="0">
+                <a:solidFill>
+                  <a:srgbClr val="1C2833"/>
+                </a:solidFill>
+                <a:latin typeface="Arial" pitchFamily="34" charset="0"/>
+                <a:ea typeface="Arial" pitchFamily="34" charset="-122"/>
+                <a:cs typeface="Arial" pitchFamily="34" charset="-120"/>
+              </a:rPr>
+              <a:t> (</a:t>
+            </a:r>
+            <a:pPr algn="l" indent="0" marL="0">
+              <a:lnSpc>
+                <a:spcPts val="1620"/>
+              </a:lnSpc>
+              <a:spcAft>
+                <a:spcPts val="300"/>
+              </a:spcAft>
+              <a:buNone/>
+            </a:pPr>
+            <a:r>
+              <a:rPr lang="en-US" sz="1200" dirty="0">
+                <a:solidFill>
+                  <a:srgbClr val="1C2833"/>
+                </a:solidFill>
+                <a:latin typeface="Arial" pitchFamily="34" charset="0"/>
+                <a:ea typeface="Arial" pitchFamily="34" charset="-122"/>
+                <a:cs typeface="Arial" pitchFamily="34" charset="-120"/>
+              </a:rPr>
+              <a:t>quizzes/formative.md</a:t>
+            </a:r>
+            <a:pPr algn="l" indent="0" marL="0">
+              <a:lnSpc>
+                <a:spcPts val="1620"/>
+              </a:lnSpc>
+              <a:spcAft>
+                <a:spcPts val="300"/>
+              </a:spcAft>
+              <a:buNone/>
+            </a:pPr>
+            <a:r>
+              <a:rPr lang="en-US" sz="1200" dirty="0">
+                <a:solidFill>
+                  <a:srgbClr val="1C2833"/>
+                </a:solidFill>
+                <a:latin typeface="Arial" pitchFamily="34" charset="0"/>
+                <a:ea typeface="Arial" pitchFamily="34" charset="-122"/>
+                <a:cs typeface="Arial" pitchFamily="34" charset="-120"/>
+              </a:rPr>
+              <a:t> Part A) — 4 quick column problems, 3 min.</a:t>
+            </a:r>
+            <a:endParaRPr lang="en-US" sz="1200" dirty="0"/>
+          </a:p>
+          <a:p>
+            <a:pPr algn="l" marL="342900" indent="-342900">
+              <a:lnSpc>
+                <a:spcPts val="1620"/>
+              </a:lnSpc>
+              <a:spcAft>
+                <a:spcPts val="300"/>
+              </a:spcAft>
+              <a:buSzPct val="100000"/>
+              <a:buChar char="•"/>
+            </a:pPr>
+            <a:r>
+              <a:rPr lang="en-US" sz="1200" dirty="0">
+                <a:solidFill>
+                  <a:srgbClr val="1C2833"/>
+                </a:solidFill>
+                <a:latin typeface="Arial" pitchFamily="34" charset="0"/>
+                <a:ea typeface="Arial" pitchFamily="34" charset="-122"/>
+                <a:cs typeface="Arial" pitchFamily="34" charset="-120"/>
+              </a:rPr>
+              <a:t>Collect; mark overnight.</a:t>
+            </a:r>
+            <a:endParaRPr lang="en-US" sz="1200" dirty="0"/>
+          </a:p>
+          <a:p>
+            <a:pPr algn="l" marL="342900" indent="-342900">
+              <a:lnSpc>
+                <a:spcPts val="1620"/>
+              </a:lnSpc>
+              <a:spcAft>
+                <a:spcPts val="300"/>
+              </a:spcAft>
+              <a:buSzPct val="100000"/>
+              <a:buChar char="•"/>
+            </a:pPr>
+            <a:r>
+              <a:rPr lang="en-US" sz="1200" dirty="0">
+                <a:solidFill>
+                  <a:srgbClr val="1C2833"/>
+                </a:solidFill>
+                <a:latin typeface="Arial" pitchFamily="34" charset="0"/>
+                <a:ea typeface="Arial" pitchFamily="34" charset="-122"/>
+                <a:cs typeface="Arial" pitchFamily="34" charset="-120"/>
+              </a:rPr>
+              <a:t>Preview Day 4: </a:t>
+            </a:r>
+            <a:pPr algn="l" indent="0" marL="0">
+              <a:lnSpc>
+                <a:spcPts val="1620"/>
+              </a:lnSpc>
+              <a:spcAft>
+                <a:spcPts val="300"/>
+              </a:spcAft>
+              <a:buNone/>
+            </a:pPr>
+            <a:r>
+              <a:rPr lang="en-US" sz="1200" i="1" dirty="0">
+                <a:solidFill>
+                  <a:srgbClr val="1C2833"/>
+                </a:solidFill>
+                <a:latin typeface="Arial" pitchFamily="34" charset="0"/>
+                <a:ea typeface="Arial" pitchFamily="34" charset="-122"/>
+                <a:cs typeface="Arial" pitchFamily="34" charset="-120"/>
+              </a:rPr>
+              <a:t>"Now we put multiple columns together — with the carries flowing from one to the next."</a:t>
+            </a:r>
+            <a:endParaRPr lang="en-US" sz="1200" dirty="0"/>
+          </a:p>
+        </p:txBody>
+      </p:sp>
+      <p:sp>
+        <p:nvSpPr>
+          <p:cNvPr id="5" name="Text 3"/>
+          <p:cNvSpPr/>
+          <p:nvPr/>
+        </p:nvSpPr>
+        <p:spPr>
+          <a:xfrm>
+            <a:off x="406301" y="4434929"/>
+            <a:ext cx="8498026" cy="213271"/>
+          </a:xfrm>
+          <a:prstGeom prst="rect">
+            <a:avLst/>
+          </a:prstGeom>
+          <a:noFill/>
+          <a:ln/>
+        </p:spPr>
+        <p:txBody>
+          <a:bodyPr wrap="square" lIns="0" tIns="0" rIns="0" bIns="0" rtlCol="0" anchor="t"/>
+          <a:lstStyle/>
+          <a:p>
+            <a:pPr algn="l" indent="0" marL="0">
+              <a:lnSpc>
+                <a:spcPts val="1680"/>
+              </a:lnSpc>
+              <a:spcBef>
+                <a:spcPts val="300"/>
+              </a:spcBef>
+              <a:spcAft>
+                <a:spcPts val="300"/>
+              </a:spcAft>
+              <a:buNone/>
+            </a:pPr>
+            <a:r>
+              <a:rPr lang="en-US" sz="1200" dirty="0">
+                <a:solidFill>
+                  <a:srgbClr val="1C2833"/>
+                </a:solidFill>
+                <a:latin typeface="Arial" pitchFamily="34" charset="0"/>
+                <a:ea typeface="Arial" pitchFamily="34" charset="-122"/>
+                <a:cs typeface="Arial" pitchFamily="34" charset="-120"/>
+              </a:rPr>
+              <a:t>Middle ·  · IKS Curriculum</a:t>
+            </a:r>
+            <a:endParaRPr lang="en-US" sz="1200" dirty="0"/>
+          </a:p>
+        </p:txBody>
+      </p:sp>
+    </p:spTree>
+  </p:cSld>
+  <p:clrMapOvr>
+    <a:masterClrMapping/>
+  </p:clrMapOvr>
+</p:sld>
+</file>
+
+<file path=ppt/slides/slide15.xml><?xml version="1.0" encoding="utf-8"?>
+<p:sld xmlns:a="http://schemas.openxmlformats.org/drawingml/2006/main" xmlns:r="http://schemas.openxmlformats.org/officeDocument/2006/relationships" xmlns:p="http://schemas.openxmlformats.org/presentationml/2006/main">
+  <p:cSld name="Slide 15">
+    <p:bg>
+      <p:bgPr>
+        <a:solidFill>
+          <a:srgbClr val="FFFFFF"/>
+        </a:solidFill>
+      </p:bgPr>
+    </p:bg>
+    <p:spTree>
+      <p:nvGrpSpPr>
+        <p:cNvPr id="1" name=""/>
+        <p:cNvGrpSpPr/>
+        <p:nvPr/>
+      </p:nvGrpSpPr>
+      <p:grpSpPr>
+        <a:xfrm>
+          <a:off x="0" y="0"/>
+          <a:ext cx="0" cy="0"/>
+          <a:chOff x="0" y="0"/>
+          <a:chExt cx="0" cy="0"/>
+        </a:xfrm>
+      </p:grpSpPr>
+      <p:sp>
+        <p:nvSpPr>
+          <p:cNvPr id="2" name="Text 0"/>
+          <p:cNvSpPr/>
+          <p:nvPr/>
+        </p:nvSpPr>
+        <p:spPr>
+          <a:xfrm>
+            <a:off x="0" y="0"/>
+            <a:ext cx="9144000" cy="101501"/>
+          </a:xfrm>
+          <a:prstGeom prst="rect">
+            <a:avLst/>
+          </a:prstGeom>
+          <a:solidFill>
+            <a:srgbClr val="277884"/>
+          </a:solidFill>
+          <a:ln/>
+        </p:spPr>
+        <p:txBody>
+          <a:bodyPr wrap="square" rtlCol="0" anchor="ctr"/>
+          <a:lstStyle/>
+          <a:p>
+            <a:pPr indent="0" marL="0">
+              <a:buNone/>
+            </a:pPr>
+            <a:endParaRPr lang="en-US" dirty="0"/>
+          </a:p>
+        </p:txBody>
+      </p:sp>
+      <p:sp>
+        <p:nvSpPr>
+          <p:cNvPr id="3" name="Text 1"/>
+          <p:cNvSpPr/>
+          <p:nvPr/>
+        </p:nvSpPr>
+        <p:spPr>
+          <a:xfrm>
+            <a:off x="406301" y="457051"/>
+            <a:ext cx="8498026" cy="274290"/>
+          </a:xfrm>
+          <a:prstGeom prst="rect">
+            <a:avLst/>
+          </a:prstGeom>
+          <a:noFill/>
+          <a:ln/>
+        </p:spPr>
+        <p:txBody>
+          <a:bodyPr wrap="square" lIns="0" tIns="0" rIns="0" bIns="0" rtlCol="0" anchor="t"/>
+          <a:lstStyle/>
+          <a:p>
+            <a:pPr algn="l" indent="0" marL="0">
+              <a:lnSpc>
+                <a:spcPts val="2160"/>
+              </a:lnSpc>
+              <a:spcBef>
+                <a:spcPts val="600"/>
+              </a:spcBef>
+              <a:spcAft>
+                <a:spcPts val="800"/>
+              </a:spcAft>
+              <a:buNone/>
+            </a:pPr>
+            <a:r>
+              <a:rPr lang="en-US" sz="1800" b="1" dirty="0">
+                <a:solidFill>
+                  <a:srgbClr val="FE4447"/>
+                </a:solidFill>
+                <a:latin typeface="Georgia" pitchFamily="34" charset="0"/>
+                <a:ea typeface="Georgia" pitchFamily="34" charset="-122"/>
+                <a:cs typeface="Georgia" pitchFamily="34" charset="-120"/>
+              </a:rPr>
+              <a:t>Student-facing content</a:t>
+            </a:r>
+            <a:endParaRPr lang="en-US" sz="1800" dirty="0"/>
+          </a:p>
+        </p:txBody>
+      </p:sp>
+      <p:sp>
+        <p:nvSpPr>
+          <p:cNvPr id="4" name="Text 2"/>
+          <p:cNvSpPr/>
+          <p:nvPr/>
+        </p:nvSpPr>
+        <p:spPr>
+          <a:xfrm>
+            <a:off x="406301" y="883593"/>
+            <a:ext cx="8331398" cy="2264569"/>
+          </a:xfrm>
+          <a:prstGeom prst="rect">
+            <a:avLst/>
+          </a:prstGeom>
+          <a:solidFill>
+            <a:srgbClr val="F4F8F9"/>
+          </a:solidFill>
+          <a:ln/>
+        </p:spPr>
+        <p:txBody>
+          <a:bodyPr wrap="square" rtlCol="0" anchor="ctr"/>
+          <a:lstStyle/>
+          <a:p>
+            <a:pPr indent="0" marL="0">
+              <a:buNone/>
+            </a:pPr>
+            <a:endParaRPr lang="en-US" dirty="0"/>
+          </a:p>
+        </p:txBody>
+      </p:sp>
+      <p:sp>
+        <p:nvSpPr>
+          <p:cNvPr id="5" name="Shape 3"/>
+          <p:cNvSpPr/>
+          <p:nvPr/>
+        </p:nvSpPr>
+        <p:spPr>
+          <a:xfrm>
+            <a:off x="434876" y="883593"/>
+            <a:ext cx="0" cy="2264569"/>
+          </a:xfrm>
+          <a:prstGeom prst="line">
+            <a:avLst/>
+          </a:prstGeom>
+          <a:noFill/>
+          <a:ln w="57150">
+            <a:solidFill>
+              <a:srgbClr val="FE4447"/>
+            </a:solidFill>
+            <a:prstDash val="solid"/>
+          </a:ln>
+        </p:spPr>
+      </p:sp>
+      <p:sp>
+        <p:nvSpPr>
+          <p:cNvPr id="6" name="Text 4"/>
+          <p:cNvSpPr/>
+          <p:nvPr/>
+        </p:nvSpPr>
+        <p:spPr>
+          <a:xfrm>
+            <a:off x="692051" y="1074093"/>
+            <a:ext cx="7973389" cy="230981"/>
+          </a:xfrm>
+          <a:prstGeom prst="rect">
+            <a:avLst/>
+          </a:prstGeom>
+          <a:noFill/>
+          <a:ln/>
+        </p:spPr>
+        <p:txBody>
+          <a:bodyPr wrap="square" lIns="0" tIns="0" rIns="0" bIns="0" rtlCol="0" anchor="t"/>
+          <a:lstStyle/>
+          <a:p>
+            <a:pPr algn="l" indent="0" marL="0">
+              <a:lnSpc>
+                <a:spcPts val="1820"/>
+              </a:lnSpc>
+              <a:spcBef>
+                <a:spcPts val="300"/>
+              </a:spcBef>
+              <a:spcAft>
+                <a:spcPts val="300"/>
+              </a:spcAft>
+              <a:buNone/>
+            </a:pPr>
+            <a:r>
+              <a:rPr lang="en-US" sz="1300" b="1" i="1" dirty="0">
+                <a:solidFill>
+                  <a:srgbClr val="1C2833"/>
+                </a:solidFill>
+                <a:latin typeface="Georgia" pitchFamily="34" charset="0"/>
+                <a:ea typeface="Georgia" pitchFamily="34" charset="-122"/>
+                <a:cs typeface="Georgia" pitchFamily="34" charset="-120"/>
+              </a:rPr>
+              <a:t>Dot method, one column:</a:t>
+            </a:r>
+            <a:endParaRPr lang="en-US" sz="1300" dirty="0"/>
+          </a:p>
+        </p:txBody>
+      </p:sp>
+      <p:sp>
+        <p:nvSpPr>
+          <p:cNvPr id="7" name="Text 5"/>
+          <p:cNvSpPr/>
+          <p:nvPr/>
+        </p:nvSpPr>
+        <p:spPr>
+          <a:xfrm>
+            <a:off x="692051" y="1343174"/>
+            <a:ext cx="7973389" cy="230981"/>
+          </a:xfrm>
+          <a:prstGeom prst="rect">
+            <a:avLst/>
+          </a:prstGeom>
+          <a:noFill/>
+          <a:ln/>
+        </p:spPr>
+        <p:txBody>
+          <a:bodyPr wrap="square" lIns="0" tIns="0" rIns="0" bIns="0" rtlCol="0" anchor="t"/>
+          <a:lstStyle/>
+          <a:p>
+            <a:pPr algn="l" indent="0" marL="0">
+              <a:lnSpc>
+                <a:spcPts val="1820"/>
+              </a:lnSpc>
+              <a:spcBef>
+                <a:spcPts val="300"/>
+              </a:spcBef>
+              <a:spcAft>
+                <a:spcPts val="300"/>
+              </a:spcAft>
+              <a:buNone/>
+            </a:pPr>
+            <a:r>
+              <a:rPr lang="en-US" sz="1300" i="1" dirty="0">
+                <a:solidFill>
+                  <a:srgbClr val="1C2833"/>
+                </a:solidFill>
+                <a:latin typeface="Georgia" pitchFamily="34" charset="0"/>
+                <a:ea typeface="Georgia" pitchFamily="34" charset="-122"/>
+                <a:cs typeface="Georgia" pitchFamily="34" charset="-120"/>
+              </a:rPr>
+              <a:t>Running total = 0.</a:t>
+            </a:r>
+            <a:endParaRPr lang="en-US" sz="1300" dirty="0"/>
+          </a:p>
+        </p:txBody>
+      </p:sp>
+      <p:sp>
+        <p:nvSpPr>
+          <p:cNvPr id="8" name="Text 6"/>
+          <p:cNvSpPr/>
+          <p:nvPr/>
+        </p:nvSpPr>
+        <p:spPr>
+          <a:xfrm>
+            <a:off x="692051" y="1612255"/>
+            <a:ext cx="7973389" cy="230981"/>
+          </a:xfrm>
+          <a:prstGeom prst="rect">
+            <a:avLst/>
+          </a:prstGeom>
+          <a:noFill/>
+          <a:ln/>
+        </p:spPr>
+        <p:txBody>
+          <a:bodyPr wrap="square" lIns="0" tIns="0" rIns="0" bIns="0" rtlCol="0" anchor="t"/>
+          <a:lstStyle/>
+          <a:p>
+            <a:pPr algn="l" indent="0" marL="0">
+              <a:lnSpc>
+                <a:spcPts val="1820"/>
+              </a:lnSpc>
+              <a:spcBef>
+                <a:spcPts val="300"/>
+              </a:spcBef>
+              <a:spcAft>
+                <a:spcPts val="300"/>
+              </a:spcAft>
+              <a:buNone/>
+            </a:pPr>
+            <a:r>
+              <a:rPr lang="en-US" sz="1300" i="1" dirty="0">
+                <a:solidFill>
+                  <a:srgbClr val="1C2833"/>
+                </a:solidFill>
+                <a:latin typeface="Georgia" pitchFamily="34" charset="0"/>
+                <a:ea typeface="Georgia" pitchFamily="34" charset="-122"/>
+                <a:cs typeface="Georgia" pitchFamily="34" charset="-120"/>
+              </a:rPr>
+              <a:t>Scan top to bottom.</a:t>
+            </a:r>
+            <a:endParaRPr lang="en-US" sz="1300" dirty="0"/>
+          </a:p>
+        </p:txBody>
+      </p:sp>
+      <p:sp>
+        <p:nvSpPr>
+          <p:cNvPr id="9" name="Text 7"/>
+          <p:cNvSpPr/>
+          <p:nvPr/>
+        </p:nvSpPr>
+        <p:spPr>
+          <a:xfrm>
+            <a:off x="692051" y="1881336"/>
+            <a:ext cx="7973389" cy="230981"/>
+          </a:xfrm>
+          <a:prstGeom prst="rect">
+            <a:avLst/>
+          </a:prstGeom>
+          <a:noFill/>
+          <a:ln/>
+        </p:spPr>
+        <p:txBody>
+          <a:bodyPr wrap="square" lIns="0" tIns="0" rIns="0" bIns="0" rtlCol="0" anchor="t"/>
+          <a:lstStyle/>
+          <a:p>
+            <a:pPr algn="l" indent="0" marL="0">
+              <a:lnSpc>
+                <a:spcPts val="1820"/>
+              </a:lnSpc>
+              <a:spcBef>
+                <a:spcPts val="300"/>
+              </a:spcBef>
+              <a:spcAft>
+                <a:spcPts val="300"/>
+              </a:spcAft>
+              <a:buNone/>
+            </a:pPr>
+            <a:r>
+              <a:rPr lang="en-US" sz="1300" i="1" dirty="0">
+                <a:solidFill>
+                  <a:srgbClr val="1C2833"/>
+                </a:solidFill>
+                <a:latin typeface="Georgia" pitchFamily="34" charset="0"/>
+                <a:ea typeface="Georgia" pitchFamily="34" charset="-122"/>
+                <a:cs typeface="Georgia" pitchFamily="34" charset="-120"/>
+              </a:rPr>
+              <a:t>When total ≥ 10: mark a dot, subtract 10.</a:t>
+            </a:r>
+            <a:endParaRPr lang="en-US" sz="1300" dirty="0"/>
+          </a:p>
+        </p:txBody>
+      </p:sp>
+      <p:sp>
+        <p:nvSpPr>
+          <p:cNvPr id="10" name="Text 8"/>
+          <p:cNvSpPr/>
+          <p:nvPr/>
+        </p:nvSpPr>
+        <p:spPr>
+          <a:xfrm>
+            <a:off x="692051" y="2150418"/>
+            <a:ext cx="7973389" cy="230981"/>
+          </a:xfrm>
+          <a:prstGeom prst="rect">
+            <a:avLst/>
+          </a:prstGeom>
+          <a:noFill/>
+          <a:ln/>
+        </p:spPr>
+        <p:txBody>
+          <a:bodyPr wrap="square" lIns="0" tIns="0" rIns="0" bIns="0" rtlCol="0" anchor="t"/>
+          <a:lstStyle/>
+          <a:p>
+            <a:pPr algn="l" indent="0" marL="0">
+              <a:lnSpc>
+                <a:spcPts val="1820"/>
+              </a:lnSpc>
+              <a:spcBef>
+                <a:spcPts val="300"/>
+              </a:spcBef>
+              <a:spcAft>
+                <a:spcPts val="300"/>
+              </a:spcAft>
+              <a:buNone/>
+            </a:pPr>
+            <a:r>
+              <a:rPr lang="en-US" sz="1300" i="1" dirty="0">
+                <a:solidFill>
+                  <a:srgbClr val="1C2833"/>
+                </a:solidFill>
+                <a:latin typeface="Georgia" pitchFamily="34" charset="0"/>
+                <a:ea typeface="Georgia" pitchFamily="34" charset="-122"/>
+                <a:cs typeface="Georgia" pitchFamily="34" charset="-120"/>
+              </a:rPr>
+              <a:t>Final running total = units digit. Dot count = carry.</a:t>
+            </a:r>
+            <a:endParaRPr lang="en-US" sz="1300" dirty="0"/>
+          </a:p>
+        </p:txBody>
+      </p:sp>
+      <p:sp>
+        <p:nvSpPr>
+          <p:cNvPr id="11" name="Text 9"/>
+          <p:cNvSpPr/>
+          <p:nvPr/>
+        </p:nvSpPr>
+        <p:spPr>
+          <a:xfrm>
+            <a:off x="692051" y="2419499"/>
+            <a:ext cx="7973389" cy="250031"/>
+          </a:xfrm>
+          <a:prstGeom prst="rect">
+            <a:avLst/>
+          </a:prstGeom>
+          <a:noFill/>
+          <a:ln/>
+        </p:spPr>
+        <p:txBody>
+          <a:bodyPr wrap="square" lIns="0" tIns="0" rIns="0" bIns="0" rtlCol="0" anchor="t"/>
+          <a:lstStyle/>
+          <a:p>
+            <a:pPr algn="l" indent="0" marL="0">
+              <a:lnSpc>
+                <a:spcPts val="1820"/>
+              </a:lnSpc>
+              <a:spcBef>
+                <a:spcPts val="300"/>
+              </a:spcBef>
+              <a:spcAft>
+                <a:spcPts val="300"/>
+              </a:spcAft>
+              <a:buNone/>
+            </a:pPr>
+            <a:r>
+              <a:rPr lang="en-US" sz="1300" b="1" i="1" dirty="0">
+                <a:solidFill>
+                  <a:srgbClr val="1C2833"/>
+                </a:solidFill>
+                <a:latin typeface="Georgia" pitchFamily="34" charset="0"/>
+                <a:ea typeface="Georgia" pitchFamily="34" charset="-122"/>
+                <a:cs typeface="Georgia" pitchFamily="34" charset="-120"/>
+              </a:rPr>
+              <a:t>Example:</a:t>
+            </a:r>
+            <a:pPr algn="l" indent="0" marL="0">
+              <a:lnSpc>
+                <a:spcPts val="1820"/>
+              </a:lnSpc>
+              <a:spcBef>
+                <a:spcPts val="300"/>
+              </a:spcBef>
+              <a:spcAft>
+                <a:spcPts val="300"/>
+              </a:spcAft>
+              <a:buNone/>
+            </a:pPr>
+            <a:r>
+              <a:rPr lang="en-US" sz="1300" dirty="0">
+                <a:solidFill>
+                  <a:srgbClr val="1C2833"/>
+                </a:solidFill>
+                <a:latin typeface="Georgia" pitchFamily="34" charset="0"/>
+                <a:ea typeface="Georgia" pitchFamily="34" charset="-122"/>
+                <a:cs typeface="Georgia" pitchFamily="34" charset="-120"/>
+              </a:rPr>
+              <a:t> column </a:t>
+            </a:r>
+            <a:pPr algn="l" indent="0" marL="0">
+              <a:lnSpc>
+                <a:spcPts val="1820"/>
+              </a:lnSpc>
+              <a:spcBef>
+                <a:spcPts val="300"/>
+              </a:spcBef>
+              <a:spcAft>
+                <a:spcPts val="300"/>
+              </a:spcAft>
+              <a:buNone/>
+            </a:pPr>
+            <a:r>
+              <a:rPr lang="en-US" sz="1300" i="1" dirty="0">
+                <a:solidFill>
+                  <a:srgbClr val="1C2833"/>
+                </a:solidFill>
+                <a:latin typeface="Georgia" pitchFamily="34" charset="0"/>
+                <a:ea typeface="Georgia" pitchFamily="34" charset="-122"/>
+                <a:cs typeface="Georgia" pitchFamily="34" charset="-120"/>
+              </a:rPr>
+              <a:t>6, 3, 7, 5, 8, 4, 2</a:t>
+            </a:r>
+            <a:endParaRPr lang="en-US" sz="1300" dirty="0"/>
+          </a:p>
+        </p:txBody>
+      </p:sp>
+      <p:sp>
+        <p:nvSpPr>
+          <p:cNvPr id="12" name="Text 10"/>
+          <p:cNvSpPr/>
+          <p:nvPr/>
+        </p:nvSpPr>
+        <p:spPr>
+          <a:xfrm>
+            <a:off x="692051" y="2707630"/>
+            <a:ext cx="7973389" cy="250031"/>
+          </a:xfrm>
+          <a:prstGeom prst="rect">
+            <a:avLst/>
+          </a:prstGeom>
+          <a:noFill/>
+          <a:ln/>
+        </p:spPr>
+        <p:txBody>
+          <a:bodyPr wrap="square" lIns="0" tIns="0" rIns="0" bIns="0" rtlCol="0" anchor="t"/>
+          <a:lstStyle/>
+          <a:p>
+            <a:pPr algn="l" indent="0" marL="0">
+              <a:lnSpc>
+                <a:spcPts val="1820"/>
+              </a:lnSpc>
+              <a:spcBef>
+                <a:spcPts val="300"/>
+              </a:spcBef>
+              <a:spcAft>
+                <a:spcPts val="300"/>
+              </a:spcAft>
+              <a:buNone/>
+            </a:pPr>
+            <a:r>
+              <a:rPr lang="en-US" sz="1300" dirty="0">
+                <a:solidFill>
+                  <a:srgbClr val="1C2833"/>
+                </a:solidFill>
+                <a:latin typeface="Georgia" pitchFamily="34" charset="0"/>
+                <a:ea typeface="Georgia" pitchFamily="34" charset="-122"/>
+                <a:cs typeface="Georgia" pitchFamily="34" charset="-120"/>
+              </a:rPr>
+              <a:t>``</a:t>
+            </a:r>
+            <a:pPr algn="l" indent="0" marL="0">
+              <a:lnSpc>
+                <a:spcPts val="1820"/>
+              </a:lnSpc>
+              <a:spcBef>
+                <a:spcPts val="300"/>
+              </a:spcBef>
+              <a:spcAft>
+                <a:spcPts val="300"/>
+              </a:spcAft>
+              <a:buNone/>
+            </a:pPr>
+            <a:r>
+              <a:rPr lang="en-US" sz="1300" i="1" dirty="0">
+                <a:solidFill>
+                  <a:srgbClr val="1C2833"/>
+                </a:solidFill>
+                <a:latin typeface="Georgia" pitchFamily="34" charset="0"/>
+                <a:ea typeface="Georgia" pitchFamily="34" charset="-122"/>
+                <a:cs typeface="Georgia" pitchFamily="34" charset="-120"/>
+              </a:rPr>
+              <a:t> 6 3 7 · 5 · 8 4 · 2 __ 5 ← units 3 dots = carry 3 to the next column</a:t>
+            </a:r>
+            <a:pPr algn="l" indent="0" marL="0">
+              <a:lnSpc>
+                <a:spcPts val="1820"/>
+              </a:lnSpc>
+              <a:spcBef>
+                <a:spcPts val="300"/>
+              </a:spcBef>
+              <a:spcAft>
+                <a:spcPts val="300"/>
+              </a:spcAft>
+              <a:buNone/>
+            </a:pPr>
+            <a:r>
+              <a:rPr lang="en-US" sz="1300" dirty="0">
+                <a:solidFill>
+                  <a:srgbClr val="1C2833"/>
+                </a:solidFill>
+                <a:latin typeface="Georgia" pitchFamily="34" charset="0"/>
+                <a:ea typeface="Georgia" pitchFamily="34" charset="-122"/>
+                <a:cs typeface="Georgia" pitchFamily="34" charset="-120"/>
+              </a:rPr>
+              <a:t>``</a:t>
+            </a:r>
+            <a:endParaRPr lang="en-US" sz="1300" dirty="0"/>
+          </a:p>
+        </p:txBody>
+      </p:sp>
+      <p:sp>
+        <p:nvSpPr>
+          <p:cNvPr id="13" name="Text 11"/>
+          <p:cNvSpPr/>
+          <p:nvPr/>
+        </p:nvSpPr>
+        <p:spPr>
+          <a:xfrm>
+            <a:off x="406301" y="4434929"/>
+            <a:ext cx="8498026" cy="213271"/>
+          </a:xfrm>
+          <a:prstGeom prst="rect">
+            <a:avLst/>
+          </a:prstGeom>
+          <a:noFill/>
+          <a:ln/>
+        </p:spPr>
+        <p:txBody>
+          <a:bodyPr wrap="square" lIns="0" tIns="0" rIns="0" bIns="0" rtlCol="0" anchor="t"/>
+          <a:lstStyle/>
+          <a:p>
+            <a:pPr algn="l" indent="0" marL="0">
+              <a:lnSpc>
+                <a:spcPts val="1680"/>
+              </a:lnSpc>
+              <a:spcBef>
+                <a:spcPts val="300"/>
+              </a:spcBef>
+              <a:spcAft>
+                <a:spcPts val="300"/>
+              </a:spcAft>
+              <a:buNone/>
+            </a:pPr>
+            <a:r>
+              <a:rPr lang="en-US" sz="1200" dirty="0">
+                <a:solidFill>
+                  <a:srgbClr val="1C2833"/>
+                </a:solidFill>
+                <a:latin typeface="Arial" pitchFamily="34" charset="0"/>
+                <a:ea typeface="Arial" pitchFamily="34" charset="-122"/>
+                <a:cs typeface="Arial" pitchFamily="34" charset="-120"/>
+              </a:rPr>
+              <a:t>Middle ·  · IKS Curriculum</a:t>
+            </a:r>
+            <a:endParaRPr lang="en-US" sz="1200" dirty="0"/>
+          </a:p>
+        </p:txBody>
+      </p:sp>
+    </p:spTree>
+  </p:cSld>
+  <p:clrMapOvr>
+    <a:masterClrMapping/>
+  </p:clrMapOvr>
+</p:sld>
+</file>
+
+<file path=ppt/slides/slide16.xml><?xml version="1.0" encoding="utf-8"?>
+<p:sld xmlns:a="http://schemas.openxmlformats.org/drawingml/2006/main" xmlns:r="http://schemas.openxmlformats.org/officeDocument/2006/relationships" xmlns:p="http://schemas.openxmlformats.org/presentationml/2006/main">
+  <p:cSld name="Slide 16">
+    <p:bg>
+      <p:bgPr>
+        <a:solidFill>
+          <a:srgbClr val="FFFFFF"/>
+        </a:solidFill>
+      </p:bgPr>
+    </p:bg>
+    <p:spTree>
+      <p:nvGrpSpPr>
+        <p:cNvPr id="1" name=""/>
+        <p:cNvGrpSpPr/>
+        <p:nvPr/>
+      </p:nvGrpSpPr>
+      <p:grpSpPr>
+        <a:xfrm>
+          <a:off x="0" y="0"/>
+          <a:ext cx="0" cy="0"/>
+          <a:chOff x="0" y="0"/>
+          <a:chExt cx="0" cy="0"/>
+        </a:xfrm>
+      </p:grpSpPr>
+      <p:sp>
+        <p:nvSpPr>
+          <p:cNvPr id="2" name="Text 0"/>
+          <p:cNvSpPr/>
+          <p:nvPr/>
+        </p:nvSpPr>
+        <p:spPr>
+          <a:xfrm>
+            <a:off x="0" y="0"/>
+            <a:ext cx="9144000" cy="101501"/>
+          </a:xfrm>
+          <a:prstGeom prst="rect">
+            <a:avLst/>
+          </a:prstGeom>
+          <a:solidFill>
+            <a:srgbClr val="277884"/>
+          </a:solidFill>
+          <a:ln/>
+        </p:spPr>
+        <p:txBody>
+          <a:bodyPr wrap="square" rtlCol="0" anchor="ctr"/>
+          <a:lstStyle/>
+          <a:p>
+            <a:pPr indent="0" marL="0">
+              <a:buNone/>
+            </a:pPr>
+            <a:endParaRPr lang="en-US" dirty="0"/>
+          </a:p>
+        </p:txBody>
+      </p:sp>
+      <p:sp>
+        <p:nvSpPr>
+          <p:cNvPr id="3" name="Text 1"/>
+          <p:cNvSpPr/>
+          <p:nvPr/>
+        </p:nvSpPr>
+        <p:spPr>
+          <a:xfrm>
+            <a:off x="406301" y="457051"/>
+            <a:ext cx="8498026" cy="274290"/>
+          </a:xfrm>
+          <a:prstGeom prst="rect">
+            <a:avLst/>
+          </a:prstGeom>
+          <a:noFill/>
+          <a:ln/>
+        </p:spPr>
+        <p:txBody>
+          <a:bodyPr wrap="square" lIns="0" tIns="0" rIns="0" bIns="0" rtlCol="0" anchor="t"/>
+          <a:lstStyle/>
+          <a:p>
+            <a:pPr algn="l" indent="0" marL="0">
+              <a:lnSpc>
+                <a:spcPts val="2160"/>
+              </a:lnSpc>
+              <a:spcBef>
+                <a:spcPts val="600"/>
+              </a:spcBef>
+              <a:spcAft>
+                <a:spcPts val="800"/>
+              </a:spcAft>
+              <a:buNone/>
+            </a:pPr>
+            <a:r>
+              <a:rPr lang="en-US" sz="1800" b="1" dirty="0">
+                <a:solidFill>
+                  <a:srgbClr val="FE4447"/>
+                </a:solidFill>
+                <a:latin typeface="Georgia" pitchFamily="34" charset="0"/>
+                <a:ea typeface="Georgia" pitchFamily="34" charset="-122"/>
+                <a:cs typeface="Georgia" pitchFamily="34" charset="-120"/>
+              </a:rPr>
+              <a:t>Homework</a:t>
+            </a:r>
+            <a:endParaRPr lang="en-US" sz="1800" dirty="0"/>
+          </a:p>
+        </p:txBody>
+      </p:sp>
+      <p:sp>
+        <p:nvSpPr>
+          <p:cNvPr id="4" name="Text 2"/>
+          <p:cNvSpPr/>
+          <p:nvPr/>
+        </p:nvSpPr>
+        <p:spPr>
+          <a:xfrm>
+            <a:off x="634901" y="883593"/>
+            <a:ext cx="8102798" cy="281880"/>
+          </a:xfrm>
+          <a:prstGeom prst="rect">
+            <a:avLst/>
+          </a:prstGeom>
+          <a:noFill/>
+          <a:ln/>
+        </p:spPr>
+        <p:txBody>
+          <a:bodyPr wrap="square" lIns="0" tIns="0" rIns="0" bIns="0" rtlCol="0" anchor="t"/>
+          <a:lstStyle/>
+          <a:p>
+            <a:pPr algn="l" marL="342900" indent="-342900">
+              <a:lnSpc>
+                <a:spcPts val="1620"/>
+              </a:lnSpc>
+              <a:spcAft>
+                <a:spcPts val="300"/>
+              </a:spcAft>
+              <a:buSzPct val="100000"/>
+              <a:buChar char="•"/>
+            </a:pPr>
+            <a:r>
+              <a:rPr lang="en-US" sz="1200" dirty="0">
+                <a:solidFill>
+                  <a:srgbClr val="1C2833"/>
+                </a:solidFill>
+                <a:latin typeface="Arial" pitchFamily="34" charset="0"/>
+                <a:ea typeface="Arial" pitchFamily="34" charset="-122"/>
+                <a:cs typeface="Arial" pitchFamily="34" charset="-120"/>
+              </a:rPr>
+              <a:t>Solve the back of the worksheet (10 more single-column problems). Self-check answers against standard addition.</a:t>
+            </a:r>
+            <a:endParaRPr lang="en-US" sz="1200" dirty="0"/>
+          </a:p>
+        </p:txBody>
+      </p:sp>
+      <p:sp>
+        <p:nvSpPr>
+          <p:cNvPr id="5" name="Text 3"/>
+          <p:cNvSpPr/>
+          <p:nvPr/>
+        </p:nvSpPr>
+        <p:spPr>
+          <a:xfrm>
+            <a:off x="406301" y="4434929"/>
+            <a:ext cx="8498026" cy="213271"/>
+          </a:xfrm>
+          <a:prstGeom prst="rect">
+            <a:avLst/>
+          </a:prstGeom>
+          <a:noFill/>
+          <a:ln/>
+        </p:spPr>
+        <p:txBody>
+          <a:bodyPr wrap="square" lIns="0" tIns="0" rIns="0" bIns="0" rtlCol="0" anchor="t"/>
+          <a:lstStyle/>
+          <a:p>
+            <a:pPr algn="l" indent="0" marL="0">
+              <a:lnSpc>
+                <a:spcPts val="1680"/>
+              </a:lnSpc>
+              <a:spcBef>
+                <a:spcPts val="300"/>
+              </a:spcBef>
+              <a:spcAft>
+                <a:spcPts val="300"/>
+              </a:spcAft>
+              <a:buNone/>
+            </a:pPr>
+            <a:r>
+              <a:rPr lang="en-US" sz="1200" dirty="0">
+                <a:solidFill>
+                  <a:srgbClr val="1C2833"/>
+                </a:solidFill>
+                <a:latin typeface="Arial" pitchFamily="34" charset="0"/>
+                <a:ea typeface="Arial" pitchFamily="34" charset="-122"/>
+                <a:cs typeface="Arial" pitchFamily="34" charset="-120"/>
+              </a:rPr>
+              <a:t>Middle ·  · IKS Curriculum</a:t>
+            </a:r>
+            <a:endParaRPr lang="en-US" sz="1200" dirty="0"/>
+          </a:p>
+        </p:txBody>
+      </p:sp>
+    </p:spTree>
+  </p:cSld>
+  <p:clrMapOvr>
+    <a:masterClrMapping/>
+  </p:clrMapOvr>
+</p:sld>
+</file>
+
+<file path=ppt/slides/slide17.xml><?xml version="1.0" encoding="utf-8"?>
+<p:sld xmlns:a="http://schemas.openxmlformats.org/drawingml/2006/main" xmlns:r="http://schemas.openxmlformats.org/officeDocument/2006/relationships" xmlns:p="http://schemas.openxmlformats.org/presentationml/2006/main">
+  <p:cSld name="Slide 17">
+    <p:bg>
+      <p:bgPr>
+        <a:solidFill>
+          <a:srgbClr val="FFFFFF"/>
+        </a:solidFill>
+      </p:bgPr>
+    </p:bg>
+    <p:spTree>
+      <p:nvGrpSpPr>
+        <p:cNvPr id="1" name=""/>
+        <p:cNvGrpSpPr/>
+        <p:nvPr/>
+      </p:nvGrpSpPr>
+      <p:grpSpPr>
+        <a:xfrm>
+          <a:off x="0" y="0"/>
+          <a:ext cx="0" cy="0"/>
+          <a:chOff x="0" y="0"/>
+          <a:chExt cx="0" cy="0"/>
+        </a:xfrm>
+      </p:grpSpPr>
+      <p:sp>
+        <p:nvSpPr>
+          <p:cNvPr id="2" name="Text 0"/>
+          <p:cNvSpPr/>
+          <p:nvPr/>
+        </p:nvSpPr>
+        <p:spPr>
+          <a:xfrm>
+            <a:off x="0" y="0"/>
+            <a:ext cx="9144000" cy="101501"/>
+          </a:xfrm>
+          <a:prstGeom prst="rect">
+            <a:avLst/>
+          </a:prstGeom>
+          <a:solidFill>
+            <a:srgbClr val="277884"/>
+          </a:solidFill>
+          <a:ln/>
+        </p:spPr>
+        <p:txBody>
+          <a:bodyPr wrap="square" rtlCol="0" anchor="ctr"/>
+          <a:lstStyle/>
+          <a:p>
+            <a:pPr indent="0" marL="0">
+              <a:buNone/>
+            </a:pPr>
+            <a:endParaRPr lang="en-US" dirty="0"/>
+          </a:p>
+        </p:txBody>
+      </p:sp>
+      <p:sp>
+        <p:nvSpPr>
+          <p:cNvPr id="3" name="Text 1"/>
+          <p:cNvSpPr/>
+          <p:nvPr/>
+        </p:nvSpPr>
+        <p:spPr>
+          <a:xfrm>
+            <a:off x="406301" y="457051"/>
+            <a:ext cx="8498026" cy="274290"/>
+          </a:xfrm>
+          <a:prstGeom prst="rect">
+            <a:avLst/>
+          </a:prstGeom>
+          <a:noFill/>
+          <a:ln/>
+        </p:spPr>
+        <p:txBody>
+          <a:bodyPr wrap="square" lIns="0" tIns="0" rIns="0" bIns="0" rtlCol="0" anchor="t"/>
+          <a:lstStyle/>
+          <a:p>
+            <a:pPr algn="l" indent="0" marL="0">
+              <a:lnSpc>
+                <a:spcPts val="2160"/>
+              </a:lnSpc>
+              <a:spcBef>
+                <a:spcPts val="600"/>
+              </a:spcBef>
+              <a:spcAft>
+                <a:spcPts val="800"/>
+              </a:spcAft>
+              <a:buNone/>
+            </a:pPr>
+            <a:r>
+              <a:rPr lang="en-US" sz="1800" b="1" dirty="0">
+                <a:solidFill>
+                  <a:srgbClr val="FE4447"/>
+                </a:solidFill>
+                <a:latin typeface="Georgia" pitchFamily="34" charset="0"/>
+                <a:ea typeface="Georgia" pitchFamily="34" charset="-122"/>
+                <a:cs typeface="Georgia" pitchFamily="34" charset="-120"/>
+              </a:rPr>
+              <a:t>Differentiation</a:t>
+            </a:r>
+            <a:endParaRPr lang="en-US" sz="1800" dirty="0"/>
+          </a:p>
+        </p:txBody>
+      </p:sp>
+      <p:sp>
+        <p:nvSpPr>
+          <p:cNvPr id="4" name="Text 2"/>
+          <p:cNvSpPr/>
+          <p:nvPr/>
+        </p:nvSpPr>
+        <p:spPr>
+          <a:xfrm>
+            <a:off x="634901" y="883593"/>
+            <a:ext cx="8102798" cy="525661"/>
+          </a:xfrm>
+          <a:prstGeom prst="rect">
+            <a:avLst/>
+          </a:prstGeom>
+          <a:noFill/>
+          <a:ln/>
+        </p:spPr>
+        <p:txBody>
+          <a:bodyPr wrap="square" lIns="0" tIns="0" rIns="0" bIns="0" rtlCol="0" anchor="t"/>
+          <a:lstStyle/>
+          <a:p>
+            <a:pPr algn="l" marL="342900" indent="-342900">
+              <a:lnSpc>
+                <a:spcPts val="1620"/>
+              </a:lnSpc>
+              <a:spcAft>
+                <a:spcPts val="300"/>
+              </a:spcAft>
+              <a:buSzPct val="100000"/>
+              <a:buChar char="•"/>
+            </a:pPr>
+            <a:r>
+              <a:rPr lang="en-US" sz="1200" b="1" dirty="0">
+                <a:solidFill>
+                  <a:srgbClr val="1C2833"/>
+                </a:solidFill>
+                <a:latin typeface="Arial" pitchFamily="34" charset="0"/>
+                <a:ea typeface="Arial" pitchFamily="34" charset="-122"/>
+                <a:cs typeface="Arial" pitchFamily="34" charset="-120"/>
+              </a:rPr>
+              <a:t>Tier up:</a:t>
+            </a:r>
+            <a:pPr algn="l" indent="0" marL="0">
+              <a:lnSpc>
+                <a:spcPts val="1620"/>
+              </a:lnSpc>
+              <a:spcAft>
+                <a:spcPts val="300"/>
+              </a:spcAft>
+              <a:buNone/>
+            </a:pPr>
+            <a:r>
+              <a:rPr lang="en-US" sz="1200" dirty="0">
+                <a:solidFill>
+                  <a:srgbClr val="1C2833"/>
+                </a:solidFill>
+                <a:latin typeface="Arial" pitchFamily="34" charset="0"/>
+                <a:ea typeface="Arial" pitchFamily="34" charset="-122"/>
+                <a:cs typeface="Arial" pitchFamily="34" charset="-120"/>
+              </a:rPr>
+              <a:t> Solve columns of 8–10 numbers each (challenge sheet).</a:t>
+            </a:r>
+            <a:endParaRPr lang="en-US" sz="1200" dirty="0"/>
+          </a:p>
+          <a:p>
+            <a:pPr algn="l" marL="342900" indent="-342900">
+              <a:lnSpc>
+                <a:spcPts val="1620"/>
+              </a:lnSpc>
+              <a:spcAft>
+                <a:spcPts val="300"/>
+              </a:spcAft>
+              <a:buSzPct val="100000"/>
+              <a:buChar char="•"/>
+            </a:pPr>
+            <a:r>
+              <a:rPr lang="en-US" sz="1200" b="1" dirty="0">
+                <a:solidFill>
+                  <a:srgbClr val="1C2833"/>
+                </a:solidFill>
+                <a:latin typeface="Arial" pitchFamily="34" charset="0"/>
+                <a:ea typeface="Arial" pitchFamily="34" charset="-122"/>
+                <a:cs typeface="Arial" pitchFamily="34" charset="-120"/>
+              </a:rPr>
+              <a:t>Tier down:</a:t>
+            </a:r>
+            <a:pPr algn="l" indent="0" marL="0">
+              <a:lnSpc>
+                <a:spcPts val="1620"/>
+              </a:lnSpc>
+              <a:spcAft>
+                <a:spcPts val="300"/>
+              </a:spcAft>
+              <a:buNone/>
+            </a:pPr>
+            <a:r>
+              <a:rPr lang="en-US" sz="1200" dirty="0">
+                <a:solidFill>
+                  <a:srgbClr val="1C2833"/>
+                </a:solidFill>
+                <a:latin typeface="Arial" pitchFamily="34" charset="0"/>
+                <a:ea typeface="Arial" pitchFamily="34" charset="-122"/>
+                <a:cs typeface="Arial" pitchFamily="34" charset="-120"/>
+              </a:rPr>
+              <a:t> Stick to columns of 4 numbers each. Build up.</a:t>
+            </a:r>
+            <a:endParaRPr lang="en-US" sz="1200" dirty="0"/>
+          </a:p>
+        </p:txBody>
+      </p:sp>
+      <p:sp>
+        <p:nvSpPr>
+          <p:cNvPr id="5" name="Text 3"/>
+          <p:cNvSpPr/>
+          <p:nvPr/>
+        </p:nvSpPr>
+        <p:spPr>
+          <a:xfrm>
+            <a:off x="406301" y="4434929"/>
+            <a:ext cx="8498026" cy="213271"/>
+          </a:xfrm>
+          <a:prstGeom prst="rect">
+            <a:avLst/>
+          </a:prstGeom>
+          <a:noFill/>
+          <a:ln/>
+        </p:spPr>
+        <p:txBody>
+          <a:bodyPr wrap="square" lIns="0" tIns="0" rIns="0" bIns="0" rtlCol="0" anchor="t"/>
+          <a:lstStyle/>
+          <a:p>
+            <a:pPr algn="l" indent="0" marL="0">
+              <a:lnSpc>
+                <a:spcPts val="1680"/>
+              </a:lnSpc>
+              <a:spcBef>
+                <a:spcPts val="300"/>
+              </a:spcBef>
+              <a:spcAft>
+                <a:spcPts val="300"/>
+              </a:spcAft>
+              <a:buNone/>
+            </a:pPr>
+            <a:r>
+              <a:rPr lang="en-US" sz="1200" dirty="0">
+                <a:solidFill>
+                  <a:srgbClr val="1C2833"/>
+                </a:solidFill>
+                <a:latin typeface="Arial" pitchFamily="34" charset="0"/>
+                <a:ea typeface="Arial" pitchFamily="34" charset="-122"/>
+                <a:cs typeface="Arial" pitchFamily="34" charset="-120"/>
+              </a:rPr>
+              <a:t>Middle ·  · IKS Curriculum</a:t>
+            </a:r>
+            <a:endParaRPr lang="en-US" sz="1200" dirty="0"/>
+          </a:p>
+        </p:txBody>
+      </p:sp>
+    </p:spTree>
+  </p:cSld>
+  <p:clrMapOvr>
+    <a:masterClrMapping/>
+  </p:clrMapOvr>
+</p:sld>
+</file>
+
+<file path=ppt/slides/slide18.xml><?xml version="1.0" encoding="utf-8"?>
+<p:sld xmlns:a="http://schemas.openxmlformats.org/drawingml/2006/main" xmlns:r="http://schemas.openxmlformats.org/officeDocument/2006/relationships" xmlns:p="http://schemas.openxmlformats.org/presentationml/2006/main">
+  <p:cSld name="Slide 18">
+    <p:bg>
+      <p:bgPr>
+        <a:solidFill>
+          <a:srgbClr val="FFFFFF"/>
+        </a:solidFill>
+      </p:bgPr>
+    </p:bg>
+    <p:spTree>
+      <p:nvGrpSpPr>
+        <p:cNvPr id="1" name=""/>
+        <p:cNvGrpSpPr/>
+        <p:nvPr/>
+      </p:nvGrpSpPr>
+      <p:grpSpPr>
+        <a:xfrm>
+          <a:off x="0" y="0"/>
+          <a:ext cx="0" cy="0"/>
+          <a:chOff x="0" y="0"/>
+          <a:chExt cx="0" cy="0"/>
+        </a:xfrm>
+      </p:grpSpPr>
+      <p:sp>
+        <p:nvSpPr>
+          <p:cNvPr id="2" name="Text 0"/>
+          <p:cNvSpPr/>
+          <p:nvPr/>
+        </p:nvSpPr>
+        <p:spPr>
+          <a:xfrm>
+            <a:off x="0" y="0"/>
+            <a:ext cx="9144000" cy="101501"/>
+          </a:xfrm>
+          <a:prstGeom prst="rect">
+            <a:avLst/>
+          </a:prstGeom>
+          <a:solidFill>
+            <a:srgbClr val="277884"/>
+          </a:solidFill>
+          <a:ln/>
+        </p:spPr>
+        <p:txBody>
+          <a:bodyPr wrap="square" rtlCol="0" anchor="ctr"/>
+          <a:lstStyle/>
+          <a:p>
+            <a:pPr indent="0" marL="0">
+              <a:buNone/>
+            </a:pPr>
+            <a:endParaRPr lang="en-US" dirty="0"/>
+          </a:p>
+        </p:txBody>
+      </p:sp>
+      <p:sp>
+        <p:nvSpPr>
+          <p:cNvPr id="3" name="Text 1"/>
+          <p:cNvSpPr/>
+          <p:nvPr/>
+        </p:nvSpPr>
+        <p:spPr>
+          <a:xfrm>
+            <a:off x="406301" y="457051"/>
+            <a:ext cx="8498026" cy="274290"/>
+          </a:xfrm>
+          <a:prstGeom prst="rect">
+            <a:avLst/>
+          </a:prstGeom>
+          <a:noFill/>
+          <a:ln/>
+        </p:spPr>
+        <p:txBody>
+          <a:bodyPr wrap="square" lIns="0" tIns="0" rIns="0" bIns="0" rtlCol="0" anchor="t"/>
+          <a:lstStyle/>
+          <a:p>
+            <a:pPr algn="l" indent="0" marL="0">
+              <a:lnSpc>
+                <a:spcPts val="2160"/>
+              </a:lnSpc>
+              <a:spcBef>
+                <a:spcPts val="600"/>
+              </a:spcBef>
+              <a:spcAft>
+                <a:spcPts val="800"/>
+              </a:spcAft>
+              <a:buNone/>
+            </a:pPr>
+            <a:r>
+              <a:rPr lang="en-US" sz="1800" b="1" dirty="0">
+                <a:solidFill>
+                  <a:srgbClr val="FE4447"/>
+                </a:solidFill>
+                <a:latin typeface="Georgia" pitchFamily="34" charset="0"/>
+                <a:ea typeface="Georgia" pitchFamily="34" charset="-122"/>
+                <a:cs typeface="Georgia" pitchFamily="34" charset="-120"/>
+              </a:rPr>
+              <a:t>Teacher notes</a:t>
+            </a:r>
+            <a:endParaRPr lang="en-US" sz="1800" dirty="0"/>
+          </a:p>
+        </p:txBody>
+      </p:sp>
+      <p:sp>
+        <p:nvSpPr>
+          <p:cNvPr id="4" name="Text 2"/>
+          <p:cNvSpPr/>
+          <p:nvPr/>
+        </p:nvSpPr>
+        <p:spPr>
+          <a:xfrm>
+            <a:off x="634901" y="883593"/>
+            <a:ext cx="8102798" cy="937022"/>
+          </a:xfrm>
+          <a:prstGeom prst="rect">
+            <a:avLst/>
+          </a:prstGeom>
+          <a:noFill/>
+          <a:ln/>
+        </p:spPr>
+        <p:txBody>
+          <a:bodyPr wrap="square" lIns="0" tIns="0" rIns="0" bIns="0" rtlCol="0" anchor="t"/>
+          <a:lstStyle/>
+          <a:p>
+            <a:pPr algn="l" marL="342900" indent="-342900">
+              <a:lnSpc>
+                <a:spcPts val="1620"/>
+              </a:lnSpc>
+              <a:spcAft>
+                <a:spcPts val="300"/>
+              </a:spcAft>
+              <a:buSzPct val="100000"/>
+              <a:buChar char="•"/>
+            </a:pPr>
+            <a:r>
+              <a:rPr lang="en-US" sz="1200" dirty="0">
+                <a:solidFill>
+                  <a:srgbClr val="1C2833"/>
+                </a:solidFill>
+                <a:latin typeface="Arial" pitchFamily="34" charset="0"/>
+                <a:ea typeface="Arial" pitchFamily="34" charset="-122"/>
+                <a:cs typeface="Arial" pitchFamily="34" charset="-120"/>
+              </a:rPr>
+              <a:t>Common error: students forget that the dot count IS the carry — they recount the dots wrongly. Reinforce: 1 dot = +1 carry, 2 dots = +2 carry, etc.</a:t>
+            </a:r>
+            <a:endParaRPr lang="en-US" sz="1200" dirty="0"/>
+          </a:p>
+          <a:p>
+            <a:pPr algn="l" marL="342900" indent="-342900">
+              <a:lnSpc>
+                <a:spcPts val="1620"/>
+              </a:lnSpc>
+              <a:spcAft>
+                <a:spcPts val="300"/>
+              </a:spcAft>
+              <a:buSzPct val="100000"/>
+              <a:buChar char="•"/>
+            </a:pPr>
+            <a:r>
+              <a:rPr lang="en-US" sz="1200" dirty="0">
+                <a:solidFill>
+                  <a:srgbClr val="1C2833"/>
+                </a:solidFill>
+                <a:latin typeface="Arial" pitchFamily="34" charset="0"/>
+                <a:ea typeface="Arial" pitchFamily="34" charset="-122"/>
+                <a:cs typeface="Arial" pitchFamily="34" charset="-120"/>
+              </a:rPr>
+              <a:t>A second common error: students mark a dot but forget to subtract 10 from the running total — so they keep counting up. Watch for total &gt; 20 mid-column; if so, they missed a subtraction.</a:t>
+            </a:r>
+            <a:endParaRPr lang="en-US" sz="1200" dirty="0"/>
+          </a:p>
+        </p:txBody>
+      </p:sp>
+      <p:sp>
+        <p:nvSpPr>
+          <p:cNvPr id="5" name="Text 3"/>
+          <p:cNvSpPr/>
+          <p:nvPr/>
+        </p:nvSpPr>
+        <p:spPr>
+          <a:xfrm>
+            <a:off x="406301" y="4434929"/>
+            <a:ext cx="8498026" cy="213271"/>
+          </a:xfrm>
+          <a:prstGeom prst="rect">
+            <a:avLst/>
+          </a:prstGeom>
+          <a:noFill/>
+          <a:ln/>
+        </p:spPr>
+        <p:txBody>
+          <a:bodyPr wrap="square" lIns="0" tIns="0" rIns="0" bIns="0" rtlCol="0" anchor="t"/>
+          <a:lstStyle/>
+          <a:p>
+            <a:pPr algn="l" indent="0" marL="0">
+              <a:lnSpc>
+                <a:spcPts val="1680"/>
+              </a:lnSpc>
+              <a:spcBef>
+                <a:spcPts val="300"/>
+              </a:spcBef>
+              <a:spcAft>
+                <a:spcPts val="300"/>
+              </a:spcAft>
+              <a:buNone/>
+            </a:pPr>
+            <a:r>
+              <a:rPr lang="en-US" sz="1200" dirty="0">
+                <a:solidFill>
+                  <a:srgbClr val="1C2833"/>
+                </a:solidFill>
+                <a:latin typeface="Arial" pitchFamily="34" charset="0"/>
+                <a:ea typeface="Arial" pitchFamily="34" charset="-122"/>
+                <a:cs typeface="Arial" pitchFamily="34" charset="-120"/>
+              </a:rPr>
+              <a:t>Middle ·  · IKS Curriculum</a:t>
+            </a:r>
+            <a:endParaRPr lang="en-US" sz="1200" dirty="0"/>
+          </a:p>
+        </p:txBody>
+      </p:sp>
+    </p:spTree>
+  </p:cSld>
+  <p:clrMapOvr>
+    <a:masterClrMapping/>
+  </p:clrMapOvr>
+</p:sld>
+</file>
+
+<file path=ppt/slides/slide19.xml><?xml version="1.0" encoding="utf-8"?>
+<p:sld xmlns:a="http://schemas.openxmlformats.org/drawingml/2006/main" xmlns:r="http://schemas.openxmlformats.org/officeDocument/2006/relationships" xmlns:p="http://schemas.openxmlformats.org/presentationml/2006/main">
+  <p:cSld name="Slide 19">
+    <p:bg>
+      <p:bgPr>
+        <a:solidFill>
+          <a:srgbClr val="FFFFFF"/>
+        </a:solidFill>
+      </p:bgPr>
+    </p:bg>
+    <p:spTree>
+      <p:nvGrpSpPr>
+        <p:cNvPr id="1" name=""/>
+        <p:cNvGrpSpPr/>
+        <p:nvPr/>
+      </p:nvGrpSpPr>
+      <p:grpSpPr>
+        <a:xfrm>
+          <a:off x="0" y="0"/>
+          <a:ext cx="0" cy="0"/>
+          <a:chOff x="0" y="0"/>
+          <a:chExt cx="0" cy="0"/>
+        </a:xfrm>
+      </p:grpSpPr>
+      <p:sp>
+        <p:nvSpPr>
+          <p:cNvPr id="2" name="Text 0"/>
+          <p:cNvSpPr/>
+          <p:nvPr/>
+        </p:nvSpPr>
+        <p:spPr>
+          <a:xfrm>
+            <a:off x="0" y="0"/>
+            <a:ext cx="9144000" cy="101501"/>
+          </a:xfrm>
+          <a:prstGeom prst="rect">
+            <a:avLst/>
+          </a:prstGeom>
+          <a:solidFill>
+            <a:srgbClr val="277884"/>
+          </a:solidFill>
+          <a:ln/>
+        </p:spPr>
+        <p:txBody>
+          <a:bodyPr wrap="square" rtlCol="0" anchor="ctr"/>
+          <a:lstStyle/>
+          <a:p>
+            <a:pPr indent="0" marL="0">
+              <a:buNone/>
+            </a:pPr>
+            <a:endParaRPr lang="en-US" dirty="0"/>
+          </a:p>
+        </p:txBody>
+      </p:sp>
+      <p:sp>
+        <p:nvSpPr>
+          <p:cNvPr id="3" name="Text 1"/>
+          <p:cNvSpPr/>
+          <p:nvPr/>
+        </p:nvSpPr>
+        <p:spPr>
+          <a:xfrm>
+            <a:off x="406301" y="457051"/>
+            <a:ext cx="8498026" cy="274290"/>
+          </a:xfrm>
+          <a:prstGeom prst="rect">
+            <a:avLst/>
+          </a:prstGeom>
+          <a:noFill/>
+          <a:ln/>
+        </p:spPr>
+        <p:txBody>
+          <a:bodyPr wrap="square" lIns="0" tIns="0" rIns="0" bIns="0" rtlCol="0" anchor="t"/>
+          <a:lstStyle/>
+          <a:p>
+            <a:pPr algn="l" indent="0" marL="0">
+              <a:lnSpc>
+                <a:spcPts val="2160"/>
+              </a:lnSpc>
+              <a:spcBef>
+                <a:spcPts val="600"/>
+              </a:spcBef>
+              <a:spcAft>
+                <a:spcPts val="800"/>
+              </a:spcAft>
+              <a:buNone/>
+            </a:pPr>
+            <a:r>
+              <a:rPr lang="en-US" sz="1800" b="1" dirty="0">
+                <a:solidFill>
+                  <a:srgbClr val="FE4447"/>
+                </a:solidFill>
+                <a:latin typeface="Georgia" pitchFamily="34" charset="0"/>
+                <a:ea typeface="Georgia" pitchFamily="34" charset="-122"/>
+                <a:cs typeface="Georgia" pitchFamily="34" charset="-120"/>
+              </a:rPr>
               <a:t>Citation(s) used in this lesson</a:t>
             </a:r>
             <a:endParaRPr lang="en-US" sz="1800" dirty="0"/>
@@ -3038,7 +6034,7 @@
                 <a:ea typeface="Georgia" pitchFamily="34" charset="-122"/>
                 <a:cs typeface="Georgia" pitchFamily="34" charset="-120"/>
               </a:rPr>
-              <a:t>Materials</a:t>
+              <a:t>Learning objective</a:t>
             </a:r>
             <a:endParaRPr lang="en-US" sz="1800" dirty="0"/>
           </a:p>
@@ -3053,7 +6049,7 @@
         <p:spPr>
           <a:xfrm>
             <a:off x="406301" y="870942"/>
-            <a:ext cx="8498026" cy="213271"/>
+            <a:ext cx="8498026" cy="426541"/>
           </a:xfrm>
           <a:prstGeom prst="rect">
             <a:avLst/>
@@ -3086,7 +6082,7 @@
                 <a:ea typeface="Arial" pitchFamily="34" charset="-122"/>
                 <a:cs typeface="Arial" pitchFamily="34" charset="-120"/>
               </a:rPr>
-              <a:t>– Worksheet: 10 single columns of 4–6 digits each (no carrying yet — just write the result + count dots). – Whiteboard.</a:t>
+              <a:t>By the end of this lesson, students will add a single column of 4–6 single-digit numbers using the dot method, correctly identifying both the units digit and the number of dots (the carry).</a:t>
             </a:r>
             <a:endParaRPr lang="en-US" sz="1200" dirty="0"/>
           </a:p>
@@ -3244,7 +6240,7 @@
                 <a:ea typeface="Georgia" pitchFamily="34" charset="-122"/>
                 <a:cs typeface="Georgia" pitchFamily="34" charset="-120"/>
               </a:rPr>
-              <a:t>Lesson flow</a:t>
+              <a:t>Materials</a:t>
             </a:r>
             <a:endParaRPr lang="en-US" sz="1800" dirty="0"/>
           </a:p>
@@ -3253,6 +6249,76 @@
       <p:sp>
         <p:nvSpPr>
           <p:cNvPr id="4" name="Text 2"/>
+          <p:cNvSpPr/>
+          <p:nvPr/>
+        </p:nvSpPr>
+        <p:spPr>
+          <a:xfrm>
+            <a:off x="634901" y="883593"/>
+            <a:ext cx="8102798" cy="525661"/>
+          </a:xfrm>
+          <a:prstGeom prst="rect">
+            <a:avLst/>
+          </a:prstGeom>
+          <a:noFill/>
+          <a:ln/>
+        </p:spPr>
+        <p:txBody>
+          <a:bodyPr wrap="square" lIns="0" tIns="0" rIns="0" bIns="0" rtlCol="0" anchor="t"/>
+          <a:lstStyle/>
+          <a:p>
+            <a:pPr algn="l" marL="342900" indent="-342900">
+              <a:lnSpc>
+                <a:spcPts val="1620"/>
+              </a:lnSpc>
+              <a:spcAft>
+                <a:spcPts val="300"/>
+              </a:spcAft>
+              <a:buSzPct val="100000"/>
+              <a:buChar char="•"/>
+            </a:pPr>
+            <a:r>
+              <a:rPr lang="en-US" sz="1200" dirty="0">
+                <a:solidFill>
+                  <a:srgbClr val="1C2833"/>
+                </a:solidFill>
+                <a:latin typeface="Arial" pitchFamily="34" charset="0"/>
+                <a:ea typeface="Arial" pitchFamily="34" charset="-122"/>
+                <a:cs typeface="Arial" pitchFamily="34" charset="-120"/>
+              </a:rPr>
+              <a:t>Worksheet: 10 single columns of 4–6 digits each (no carrying yet — just write the result + count dots).</a:t>
+            </a:r>
+            <a:endParaRPr lang="en-US" sz="1200" dirty="0"/>
+          </a:p>
+          <a:p>
+            <a:pPr algn="l" marL="342900" indent="-342900">
+              <a:lnSpc>
+                <a:spcPts val="1620"/>
+              </a:lnSpc>
+              <a:spcAft>
+                <a:spcPts val="300"/>
+              </a:spcAft>
+              <a:buSzPct val="100000"/>
+              <a:buChar char="•"/>
+            </a:pPr>
+            <a:r>
+              <a:rPr lang="en-US" sz="1200" dirty="0">
+                <a:solidFill>
+                  <a:srgbClr val="1C2833"/>
+                </a:solidFill>
+                <a:latin typeface="Arial" pitchFamily="34" charset="0"/>
+                <a:ea typeface="Arial" pitchFamily="34" charset="-122"/>
+                <a:cs typeface="Arial" pitchFamily="34" charset="-120"/>
+              </a:rPr>
+              <a:t>Whiteboard.</a:t>
+            </a:r>
+            <a:endParaRPr lang="en-US" sz="1200" dirty="0"/>
+          </a:p>
+        </p:txBody>
+      </p:sp>
+      <p:sp>
+        <p:nvSpPr>
+          <p:cNvPr id="5" name="Text 3"/>
           <p:cNvSpPr/>
           <p:nvPr/>
         </p:nvSpPr>
@@ -3402,7 +6468,7 @@
                 <a:ea typeface="Georgia" pitchFamily="34" charset="-122"/>
                 <a:cs typeface="Georgia" pitchFamily="34" charset="-120"/>
               </a:rPr>
-              <a:t>Warm-up (5 min)</a:t>
+              <a:t>Lesson flow</a:t>
             </a:r>
             <a:endParaRPr lang="en-US" sz="1800" dirty="0"/>
           </a:p>
@@ -3411,100 +6477,6 @@
       <p:sp>
         <p:nvSpPr>
           <p:cNvPr id="4" name="Text 2"/>
-          <p:cNvSpPr/>
-          <p:nvPr/>
-        </p:nvSpPr>
-        <p:spPr>
-          <a:xfrm>
-            <a:off x="406301" y="870942"/>
-            <a:ext cx="8498026" cy="426541"/>
-          </a:xfrm>
-          <a:prstGeom prst="rect">
-            <a:avLst/>
-          </a:prstGeom>
-          <a:noFill/>
-          <a:ln/>
-        </p:spPr>
-        <p:txBody>
-          <a:bodyPr wrap="square" lIns="0" tIns="0" rIns="0" bIns="0" rtlCol="0" anchor="t"/>
-          <a:lstStyle/>
-          <a:p>
-            <a:pPr algn="l" indent="0" marL="0">
-              <a:lnSpc>
-                <a:spcPts val="1680"/>
-              </a:lnSpc>
-              <a:spcBef>
-                <a:spcPts val="300"/>
-              </a:spcBef>
-              <a:spcAft>
-                <a:spcPts val="300"/>
-              </a:spcAft>
-              <a:buNone/>
-            </a:pPr>
-            <a:r>
-              <a:rPr lang="en-US" sz="1200" dirty="0">
-                <a:solidFill>
-                  <a:srgbClr val="1C2833"/>
-                </a:solidFill>
-                <a:latin typeface="Arial" pitchFamily="34" charset="0"/>
-                <a:ea typeface="Arial" pitchFamily="34" charset="-122"/>
-                <a:cs typeface="Arial" pitchFamily="34" charset="-120"/>
-              </a:rPr>
-              <a:t>– Make-10 lightning round (30 sec). – Recall: </a:t>
-            </a:r>
-            <a:pPr algn="l" indent="0" marL="0">
-              <a:lnSpc>
-                <a:spcPts val="1680"/>
-              </a:lnSpc>
-              <a:spcBef>
-                <a:spcPts val="300"/>
-              </a:spcBef>
-              <a:spcAft>
-                <a:spcPts val="300"/>
-              </a:spcAft>
-              <a:buNone/>
-            </a:pPr>
-            <a:r>
-              <a:rPr lang="en-US" sz="1200" i="1" dirty="0">
-                <a:solidFill>
-                  <a:srgbClr val="1C2833"/>
-                </a:solidFill>
-                <a:latin typeface="Arial" pitchFamily="34" charset="0"/>
-                <a:ea typeface="Arial" pitchFamily="34" charset="-122"/>
-                <a:cs typeface="Arial" pitchFamily="34" charset="-120"/>
-              </a:rPr>
-              <a:t>"In any list of digits, how do I find the units digit if I'm using the dot method?"</a:t>
-            </a:r>
-            <a:pPr algn="l" indent="0" marL="0">
-              <a:lnSpc>
-                <a:spcPts val="1680"/>
-              </a:lnSpc>
-              <a:spcBef>
-                <a:spcPts val="300"/>
-              </a:spcBef>
-              <a:spcAft>
-                <a:spcPts val="300"/>
-              </a:spcAft>
-              <a:buNone/>
-            </a:pPr>
-            <a:r>
-              <a:rPr lang="en-US" sz="1200" dirty="0">
-                <a:solidFill>
-                  <a:srgbClr val="1C2833"/>
-                </a:solidFill>
-                <a:latin typeface="Arial" pitchFamily="34" charset="0"/>
-                <a:ea typeface="Arial" pitchFamily="34" charset="-122"/>
-                <a:cs typeface="Arial" pitchFamily="34" charset="-120"/>
-              </a:rPr>
-              <a:t> (Take a student answer. Reinforce: scan, mark dots, the unwritten leftover is the units.)</a:t>
-            </a:r>
-            <a:endParaRPr lang="en-US" sz="1200" dirty="0"/>
-          </a:p>
-        </p:txBody>
-      </p:sp>
-      <p:sp>
-        <p:nvSpPr>
-          <p:cNvPr id="5" name="Text 3"/>
           <p:cNvSpPr/>
           <p:nvPr/>
         </p:nvSpPr>
@@ -3654,7 +6626,7 @@
                 <a:ea typeface="Georgia" pitchFamily="34" charset="-122"/>
                 <a:cs typeface="Georgia" pitchFamily="34" charset="-120"/>
               </a:rPr>
-              <a:t>Core (15 min) — The procedure formalised</a:t>
+              <a:t>Warm-up (5 min)</a:t>
             </a:r>
             <a:endParaRPr lang="en-US" sz="1800" dirty="0"/>
           </a:p>
@@ -3668,8 +6640,8 @@
         </p:nvSpPr>
         <p:spPr>
           <a:xfrm>
-            <a:off x="406301" y="870942"/>
-            <a:ext cx="8498026" cy="213271"/>
+            <a:off x="634901" y="883593"/>
+            <a:ext cx="8102798" cy="731341"/>
           </a:xfrm>
           <a:prstGeom prst="rect">
             <a:avLst/>
@@ -3681,17 +6653,15 @@
           <a:bodyPr wrap="square" lIns="0" tIns="0" rIns="0" bIns="0" rtlCol="0" anchor="t"/>
           <a:lstStyle/>
           <a:p>
-            <a:pPr algn="l" indent="0" marL="0">
-              <a:lnSpc>
-                <a:spcPts val="1680"/>
-              </a:lnSpc>
-              <a:spcBef>
-                <a:spcPts val="300"/>
-              </a:spcBef>
-              <a:spcAft>
-                <a:spcPts val="300"/>
-              </a:spcAft>
-              <a:buNone/>
+            <a:pPr algn="l" marL="342900" indent="-342900">
+              <a:lnSpc>
+                <a:spcPts val="1620"/>
+              </a:lnSpc>
+              <a:spcAft>
+                <a:spcPts val="300"/>
+              </a:spcAft>
+              <a:buSzPct val="100000"/>
+              <a:buChar char="•"/>
             </a:pPr>
             <a:r>
               <a:rPr lang="en-US" sz="1200" dirty="0">
@@ -3702,475 +6672,20 @@
                 <a:ea typeface="Arial" pitchFamily="34" charset="-122"/>
                 <a:cs typeface="Arial" pitchFamily="34" charset="-120"/>
               </a:rPr>
-              <a:t>Write on the board, large:</a:t>
+              <a:t>Make-10 lightning round (30 sec).</a:t>
             </a:r>
             <a:endParaRPr lang="en-US" sz="1200" dirty="0"/>
           </a:p>
-        </p:txBody>
-      </p:sp>
-      <p:sp>
-        <p:nvSpPr>
-          <p:cNvPr id="5" name="Text 3"/>
-          <p:cNvSpPr/>
-          <p:nvPr/>
-        </p:nvSpPr>
-        <p:spPr>
-          <a:xfrm>
-            <a:off x="406301" y="1173063"/>
-            <a:ext cx="8331398" cy="1999655"/>
-          </a:xfrm>
-          <a:prstGeom prst="rect">
-            <a:avLst/>
-          </a:prstGeom>
-          <a:solidFill>
-            <a:srgbClr val="F4F8F9"/>
-          </a:solidFill>
-          <a:ln/>
-        </p:spPr>
-        <p:txBody>
-          <a:bodyPr wrap="square" rtlCol="0" anchor="ctr"/>
-          <a:lstStyle/>
-          <a:p>
-            <a:pPr indent="0" marL="0">
-              <a:buNone/>
-            </a:pPr>
-            <a:endParaRPr lang="en-US" dirty="0"/>
-          </a:p>
-        </p:txBody>
-      </p:sp>
-      <p:sp>
-        <p:nvSpPr>
-          <p:cNvPr id="6" name="Shape 4"/>
-          <p:cNvSpPr/>
-          <p:nvPr/>
-        </p:nvSpPr>
-        <p:spPr>
-          <a:xfrm>
-            <a:off x="430113" y="1173063"/>
-            <a:ext cx="0" cy="1999655"/>
-          </a:xfrm>
-          <a:prstGeom prst="line">
-            <a:avLst/>
-          </a:prstGeom>
-          <a:noFill/>
-          <a:ln w="47625">
-            <a:solidFill>
-              <a:srgbClr val="277884"/>
-            </a:solidFill>
-            <a:prstDash val="solid"/>
-          </a:ln>
-        </p:spPr>
-      </p:sp>
-      <p:sp>
-        <p:nvSpPr>
-          <p:cNvPr id="7" name="Text 5"/>
-          <p:cNvSpPr/>
-          <p:nvPr/>
-        </p:nvSpPr>
-        <p:spPr>
-          <a:xfrm>
-            <a:off x="631627" y="1300014"/>
-            <a:ext cx="8086939" cy="174575"/>
-          </a:xfrm>
-          <a:prstGeom prst="rect">
-            <a:avLst/>
-          </a:prstGeom>
-          <a:noFill/>
-          <a:ln/>
-        </p:spPr>
-        <p:txBody>
-          <a:bodyPr wrap="square" lIns="0" tIns="0" rIns="0" bIns="0" rtlCol="0" anchor="t"/>
-          <a:lstStyle/>
-          <a:p>
-            <a:pPr algn="l" indent="0" marL="0">
-              <a:lnSpc>
-                <a:spcPts val="1375"/>
-              </a:lnSpc>
-              <a:buNone/>
-            </a:pPr>
-            <a:r>
-              <a:rPr lang="en-US" sz="1100" dirty="0">
-                <a:solidFill>
-                  <a:srgbClr val="1C2833"/>
-                </a:solidFill>
-                <a:latin typeface="Courier New" pitchFamily="34" charset="0"/>
-                <a:ea typeface="Courier New" pitchFamily="34" charset="-122"/>
-                <a:cs typeface="Courier New" pitchFamily="34" charset="-120"/>
-              </a:rPr>
-              <a:t>THE DOT METHOD FOR ONE COLUMN</a:t>
-            </a:r>
-            <a:endParaRPr lang="en-US" sz="1100" dirty="0"/>
-          </a:p>
-        </p:txBody>
-      </p:sp>
-      <p:sp>
-        <p:nvSpPr>
-          <p:cNvPr id="8" name="Text 6"/>
-          <p:cNvSpPr/>
-          <p:nvPr/>
-        </p:nvSpPr>
-        <p:spPr>
-          <a:xfrm>
-            <a:off x="631627" y="1649164"/>
-            <a:ext cx="8086939" cy="174575"/>
-          </a:xfrm>
-          <a:prstGeom prst="rect">
-            <a:avLst/>
-          </a:prstGeom>
-          <a:noFill/>
-          <a:ln/>
-        </p:spPr>
-        <p:txBody>
-          <a:bodyPr wrap="square" lIns="0" tIns="0" rIns="0" bIns="0" rtlCol="0" anchor="t"/>
-          <a:lstStyle/>
-          <a:p>
-            <a:pPr algn="l" indent="0" marL="0">
-              <a:lnSpc>
-                <a:spcPts val="1375"/>
-              </a:lnSpc>
-              <a:buNone/>
-            </a:pPr>
-            <a:r>
-              <a:rPr lang="en-US" sz="1100" dirty="0">
-                <a:solidFill>
-                  <a:srgbClr val="1C2833"/>
-                </a:solidFill>
-                <a:latin typeface="Courier New" pitchFamily="34" charset="0"/>
-                <a:ea typeface="Courier New" pitchFamily="34" charset="-122"/>
-                <a:cs typeface="Courier New" pitchFamily="34" charset="-120"/>
-              </a:rPr>
-              <a:t>1. Start with running total = 0.</a:t>
-            </a:r>
-            <a:endParaRPr lang="en-US" sz="1100" dirty="0"/>
-          </a:p>
-        </p:txBody>
-      </p:sp>
-      <p:sp>
-        <p:nvSpPr>
-          <p:cNvPr id="9" name="Text 7"/>
-          <p:cNvSpPr/>
-          <p:nvPr/>
-        </p:nvSpPr>
-        <p:spPr>
-          <a:xfrm>
-            <a:off x="631627" y="1823740"/>
-            <a:ext cx="8086939" cy="174575"/>
-          </a:xfrm>
-          <a:prstGeom prst="rect">
-            <a:avLst/>
-          </a:prstGeom>
-          <a:noFill/>
-          <a:ln/>
-        </p:spPr>
-        <p:txBody>
-          <a:bodyPr wrap="square" lIns="0" tIns="0" rIns="0" bIns="0" rtlCol="0" anchor="t"/>
-          <a:lstStyle/>
-          <a:p>
-            <a:pPr algn="l" indent="0" marL="0">
-              <a:lnSpc>
-                <a:spcPts val="1375"/>
-              </a:lnSpc>
-              <a:buNone/>
-            </a:pPr>
-            <a:r>
-              <a:rPr lang="en-US" sz="1100" dirty="0">
-                <a:solidFill>
-                  <a:srgbClr val="1C2833"/>
-                </a:solidFill>
-                <a:latin typeface="Courier New" pitchFamily="34" charset="0"/>
-                <a:ea typeface="Courier New" pitchFamily="34" charset="-122"/>
-                <a:cs typeface="Courier New" pitchFamily="34" charset="-120"/>
-              </a:rPr>
-              <a:t>2. Scan top to bottom.</a:t>
-            </a:r>
-            <a:endParaRPr lang="en-US" sz="1100" dirty="0"/>
-          </a:p>
-        </p:txBody>
-      </p:sp>
-      <p:sp>
-        <p:nvSpPr>
-          <p:cNvPr id="10" name="Text 8"/>
-          <p:cNvSpPr/>
-          <p:nvPr/>
-        </p:nvSpPr>
-        <p:spPr>
-          <a:xfrm>
-            <a:off x="631627" y="1998315"/>
-            <a:ext cx="8086939" cy="174575"/>
-          </a:xfrm>
-          <a:prstGeom prst="rect">
-            <a:avLst/>
-          </a:prstGeom>
-          <a:noFill/>
-          <a:ln/>
-        </p:spPr>
-        <p:txBody>
-          <a:bodyPr wrap="square" lIns="0" tIns="0" rIns="0" bIns="0" rtlCol="0" anchor="t"/>
-          <a:lstStyle/>
-          <a:p>
-            <a:pPr algn="l" indent="0" marL="0">
-              <a:lnSpc>
-                <a:spcPts val="1375"/>
-              </a:lnSpc>
-              <a:buNone/>
-            </a:pPr>
-            <a:r>
-              <a:rPr lang="en-US" sz="1100" dirty="0">
-                <a:solidFill>
-                  <a:srgbClr val="1C2833"/>
-                </a:solidFill>
-                <a:latin typeface="Courier New" pitchFamily="34" charset="0"/>
-                <a:ea typeface="Courier New" pitchFamily="34" charset="-122"/>
-                <a:cs typeface="Courier New" pitchFamily="34" charset="-120"/>
-              </a:rPr>
-              <a:t>3. When adding a digit makes total ≥ 10, mark a DOT</a:t>
-            </a:r>
-            <a:endParaRPr lang="en-US" sz="1100" dirty="0"/>
-          </a:p>
-        </p:txBody>
-      </p:sp>
-      <p:sp>
-        <p:nvSpPr>
-          <p:cNvPr id="11" name="Text 9"/>
-          <p:cNvSpPr/>
-          <p:nvPr/>
-        </p:nvSpPr>
-        <p:spPr>
-          <a:xfrm>
-            <a:off x="631627" y="2172891"/>
-            <a:ext cx="8086939" cy="174575"/>
-          </a:xfrm>
-          <a:prstGeom prst="rect">
-            <a:avLst/>
-          </a:prstGeom>
-          <a:noFill/>
-          <a:ln/>
-        </p:spPr>
-        <p:txBody>
-          <a:bodyPr wrap="square" lIns="0" tIns="0" rIns="0" bIns="0" rtlCol="0" anchor="t"/>
-          <a:lstStyle/>
-          <a:p>
-            <a:pPr algn="l" indent="0" marL="0">
-              <a:lnSpc>
-                <a:spcPts val="1375"/>
-              </a:lnSpc>
-              <a:buNone/>
-            </a:pPr>
-            <a:r>
-              <a:rPr lang="en-US" sz="1100" dirty="0">
-                <a:solidFill>
-                  <a:srgbClr val="1C2833"/>
-                </a:solidFill>
-                <a:latin typeface="Courier New" pitchFamily="34" charset="0"/>
-                <a:ea typeface="Courier New" pitchFamily="34" charset="-122"/>
-                <a:cs typeface="Courier New" pitchFamily="34" charset="-120"/>
-              </a:rPr>
-              <a:t>above that digit. Subtract 10 from the running total.</a:t>
-            </a:r>
-            <a:endParaRPr lang="en-US" sz="1100" dirty="0"/>
-          </a:p>
-        </p:txBody>
-      </p:sp>
-      <p:sp>
-        <p:nvSpPr>
-          <p:cNvPr id="12" name="Text 10"/>
-          <p:cNvSpPr/>
-          <p:nvPr/>
-        </p:nvSpPr>
-        <p:spPr>
-          <a:xfrm>
-            <a:off x="631627" y="2347466"/>
-            <a:ext cx="8086939" cy="174575"/>
-          </a:xfrm>
-          <a:prstGeom prst="rect">
-            <a:avLst/>
-          </a:prstGeom>
-          <a:noFill/>
-          <a:ln/>
-        </p:spPr>
-        <p:txBody>
-          <a:bodyPr wrap="square" lIns="0" tIns="0" rIns="0" bIns="0" rtlCol="0" anchor="t"/>
-          <a:lstStyle/>
-          <a:p>
-            <a:pPr algn="l" indent="0" marL="0">
-              <a:lnSpc>
-                <a:spcPts val="1375"/>
-              </a:lnSpc>
-              <a:buNone/>
-            </a:pPr>
-            <a:r>
-              <a:rPr lang="en-US" sz="1100" dirty="0">
-                <a:solidFill>
-                  <a:srgbClr val="1C2833"/>
-                </a:solidFill>
-                <a:latin typeface="Courier New" pitchFamily="34" charset="0"/>
-                <a:ea typeface="Courier New" pitchFamily="34" charset="-122"/>
-                <a:cs typeface="Courier New" pitchFamily="34" charset="-120"/>
-              </a:rPr>
-              <a:t>4. Continue.</a:t>
-            </a:r>
-            <a:endParaRPr lang="en-US" sz="1100" dirty="0"/>
-          </a:p>
-        </p:txBody>
-      </p:sp>
-      <p:sp>
-        <p:nvSpPr>
-          <p:cNvPr id="13" name="Text 11"/>
-          <p:cNvSpPr/>
-          <p:nvPr/>
-        </p:nvSpPr>
-        <p:spPr>
-          <a:xfrm>
-            <a:off x="631627" y="2522041"/>
-            <a:ext cx="8086939" cy="174575"/>
-          </a:xfrm>
-          <a:prstGeom prst="rect">
-            <a:avLst/>
-          </a:prstGeom>
-          <a:noFill/>
-          <a:ln/>
-        </p:spPr>
-        <p:txBody>
-          <a:bodyPr wrap="square" lIns="0" tIns="0" rIns="0" bIns="0" rtlCol="0" anchor="t"/>
-          <a:lstStyle/>
-          <a:p>
-            <a:pPr algn="l" indent="0" marL="0">
-              <a:lnSpc>
-                <a:spcPts val="1375"/>
-              </a:lnSpc>
-              <a:buNone/>
-            </a:pPr>
-            <a:r>
-              <a:rPr lang="en-US" sz="1100" dirty="0">
-                <a:solidFill>
-                  <a:srgbClr val="1C2833"/>
-                </a:solidFill>
-                <a:latin typeface="Courier New" pitchFamily="34" charset="0"/>
-                <a:ea typeface="Courier New" pitchFamily="34" charset="-122"/>
-                <a:cs typeface="Courier New" pitchFamily="34" charset="-120"/>
-              </a:rPr>
-              <a:t>5. At the end:</a:t>
-            </a:r>
-            <a:endParaRPr lang="en-US" sz="1100" dirty="0"/>
-          </a:p>
-        </p:txBody>
-      </p:sp>
-      <p:sp>
-        <p:nvSpPr>
-          <p:cNvPr id="14" name="Text 12"/>
-          <p:cNvSpPr/>
-          <p:nvPr/>
-        </p:nvSpPr>
-        <p:spPr>
-          <a:xfrm>
-            <a:off x="631627" y="2696617"/>
-            <a:ext cx="8086939" cy="174575"/>
-          </a:xfrm>
-          <a:prstGeom prst="rect">
-            <a:avLst/>
-          </a:prstGeom>
-          <a:noFill/>
-          <a:ln/>
-        </p:spPr>
-        <p:txBody>
-          <a:bodyPr wrap="square" lIns="0" tIns="0" rIns="0" bIns="0" rtlCol="0" anchor="t"/>
-          <a:lstStyle/>
-          <a:p>
-            <a:pPr algn="l" indent="0" marL="0">
-              <a:lnSpc>
-                <a:spcPts val="1375"/>
-              </a:lnSpc>
-              <a:buNone/>
-            </a:pPr>
-            <a:r>
-              <a:rPr lang="en-US" sz="1100" dirty="0">
-                <a:solidFill>
-                  <a:srgbClr val="1C2833"/>
-                </a:solidFill>
-                <a:latin typeface="Courier New" pitchFamily="34" charset="0"/>
-                <a:ea typeface="Courier New" pitchFamily="34" charset="-122"/>
-                <a:cs typeface="Courier New" pitchFamily="34" charset="-120"/>
-              </a:rPr>
-              <a:t>– Final running total is the UNITS DIGIT (write below).</a:t>
-            </a:r>
-            <a:endParaRPr lang="en-US" sz="1100" dirty="0"/>
-          </a:p>
-        </p:txBody>
-      </p:sp>
-      <p:sp>
-        <p:nvSpPr>
-          <p:cNvPr id="15" name="Text 13"/>
-          <p:cNvSpPr/>
-          <p:nvPr/>
-        </p:nvSpPr>
-        <p:spPr>
-          <a:xfrm>
-            <a:off x="631627" y="2871192"/>
-            <a:ext cx="8086939" cy="174575"/>
-          </a:xfrm>
-          <a:prstGeom prst="rect">
-            <a:avLst/>
-          </a:prstGeom>
-          <a:noFill/>
-          <a:ln/>
-        </p:spPr>
-        <p:txBody>
-          <a:bodyPr wrap="square" lIns="0" tIns="0" rIns="0" bIns="0" rtlCol="0" anchor="t"/>
-          <a:lstStyle/>
-          <a:p>
-            <a:pPr algn="l" indent="0" marL="0">
-              <a:lnSpc>
-                <a:spcPts val="1375"/>
-              </a:lnSpc>
-              <a:buNone/>
-            </a:pPr>
-            <a:r>
-              <a:rPr lang="en-US" sz="1100" dirty="0">
-                <a:solidFill>
-                  <a:srgbClr val="1C2833"/>
-                </a:solidFill>
-                <a:latin typeface="Courier New" pitchFamily="34" charset="0"/>
-                <a:ea typeface="Courier New" pitchFamily="34" charset="-122"/>
-                <a:cs typeface="Courier New" pitchFamily="34" charset="-120"/>
-              </a:rPr>
-              <a:t>– Number of dots = CARRY (to next column).</a:t>
-            </a:r>
-            <a:endParaRPr lang="en-US" sz="1100" dirty="0"/>
-          </a:p>
-        </p:txBody>
-      </p:sp>
-      <p:sp>
-        <p:nvSpPr>
-          <p:cNvPr id="16" name="Text 14"/>
-          <p:cNvSpPr/>
-          <p:nvPr/>
-        </p:nvSpPr>
-        <p:spPr>
-          <a:xfrm>
-            <a:off x="406301" y="3261568"/>
-            <a:ext cx="8498026" cy="213271"/>
-          </a:xfrm>
-          <a:prstGeom prst="rect">
-            <a:avLst/>
-          </a:prstGeom>
-          <a:noFill/>
-          <a:ln/>
-        </p:spPr>
-        <p:txBody>
-          <a:bodyPr wrap="square" lIns="0" tIns="0" rIns="0" bIns="0" rtlCol="0" anchor="t"/>
-          <a:lstStyle/>
-          <a:p>
-            <a:pPr algn="l" indent="0" marL="0">
-              <a:lnSpc>
-                <a:spcPts val="1680"/>
-              </a:lnSpc>
-              <a:spcBef>
-                <a:spcPts val="300"/>
-              </a:spcBef>
-              <a:spcAft>
-                <a:spcPts val="300"/>
-              </a:spcAft>
-              <a:buNone/>
+          <a:p>
+            <a:pPr algn="l" marL="342900" indent="-342900">
+              <a:lnSpc>
+                <a:spcPts val="1620"/>
+              </a:lnSpc>
+              <a:spcAft>
+                <a:spcPts val="300"/>
+              </a:spcAft>
+              <a:buSzPct val="100000"/>
+              <a:buChar char="•"/>
             </a:pPr>
             <a:r>
               <a:rPr lang="en-US" sz="1200" dirty="0">
@@ -4181,520 +6696,19 @@
                 <a:ea typeface="Arial" pitchFamily="34" charset="-122"/>
                 <a:cs typeface="Arial" pitchFamily="34" charset="-120"/>
               </a:rPr>
-              <a:t>Worked example on the board:</a:t>
-            </a:r>
-            <a:endParaRPr lang="en-US" sz="1200" dirty="0"/>
-          </a:p>
-        </p:txBody>
-      </p:sp>
-      <p:sp>
-        <p:nvSpPr>
-          <p:cNvPr id="17" name="Text 15"/>
-          <p:cNvSpPr/>
-          <p:nvPr/>
-        </p:nvSpPr>
-        <p:spPr>
-          <a:xfrm>
-            <a:off x="406301" y="3563689"/>
-            <a:ext cx="8331398" cy="1999655"/>
-          </a:xfrm>
-          <a:prstGeom prst="rect">
-            <a:avLst/>
-          </a:prstGeom>
-          <a:solidFill>
-            <a:srgbClr val="F4F8F9"/>
-          </a:solidFill>
-          <a:ln/>
-        </p:spPr>
-        <p:txBody>
-          <a:bodyPr wrap="square" rtlCol="0" anchor="ctr"/>
-          <a:lstStyle/>
-          <a:p>
-            <a:pPr indent="0" marL="0">
-              <a:buNone/>
-            </a:pPr>
-            <a:endParaRPr lang="en-US" dirty="0"/>
-          </a:p>
-        </p:txBody>
-      </p:sp>
-      <p:sp>
-        <p:nvSpPr>
-          <p:cNvPr id="18" name="Shape 16"/>
-          <p:cNvSpPr/>
-          <p:nvPr/>
-        </p:nvSpPr>
-        <p:spPr>
-          <a:xfrm>
-            <a:off x="430113" y="3563689"/>
-            <a:ext cx="0" cy="1999655"/>
-          </a:xfrm>
-          <a:prstGeom prst="line">
-            <a:avLst/>
-          </a:prstGeom>
-          <a:noFill/>
-          <a:ln w="47625">
-            <a:solidFill>
-              <a:srgbClr val="277884"/>
-            </a:solidFill>
-            <a:prstDash val="solid"/>
-          </a:ln>
-        </p:spPr>
-      </p:sp>
-      <p:sp>
-        <p:nvSpPr>
-          <p:cNvPr id="19" name="Text 17"/>
-          <p:cNvSpPr/>
-          <p:nvPr/>
-        </p:nvSpPr>
-        <p:spPr>
-          <a:xfrm>
-            <a:off x="631627" y="3690640"/>
-            <a:ext cx="8086939" cy="174575"/>
-          </a:xfrm>
-          <a:prstGeom prst="rect">
-            <a:avLst/>
-          </a:prstGeom>
-          <a:noFill/>
-          <a:ln/>
-        </p:spPr>
-        <p:txBody>
-          <a:bodyPr wrap="square" lIns="0" tIns="0" rIns="0" bIns="0" rtlCol="0" anchor="t"/>
-          <a:lstStyle/>
-          <a:p>
-            <a:pPr algn="l" indent="0" marL="0">
-              <a:lnSpc>
-                <a:spcPts val="1375"/>
-              </a:lnSpc>
-              <a:buNone/>
-            </a:pPr>
-            <a:r>
-              <a:rPr lang="en-US" sz="1100" dirty="0">
-                <a:solidFill>
-                  <a:srgbClr val="1C2833"/>
-                </a:solidFill>
-                <a:latin typeface="Courier New" pitchFamily="34" charset="0"/>
-                <a:ea typeface="Courier New" pitchFamily="34" charset="-122"/>
-                <a:cs typeface="Courier New" pitchFamily="34" charset="-120"/>
-              </a:rPr>
-              <a:t>6</a:t>
-            </a:r>
-            <a:endParaRPr lang="en-US" sz="1100" dirty="0"/>
-          </a:p>
-        </p:txBody>
-      </p:sp>
-      <p:sp>
-        <p:nvSpPr>
-          <p:cNvPr id="20" name="Text 18"/>
-          <p:cNvSpPr/>
-          <p:nvPr/>
-        </p:nvSpPr>
-        <p:spPr>
-          <a:xfrm>
-            <a:off x="631627" y="3865215"/>
-            <a:ext cx="8086939" cy="174575"/>
-          </a:xfrm>
-          <a:prstGeom prst="rect">
-            <a:avLst/>
-          </a:prstGeom>
-          <a:noFill/>
-          <a:ln/>
-        </p:spPr>
-        <p:txBody>
-          <a:bodyPr wrap="square" lIns="0" tIns="0" rIns="0" bIns="0" rtlCol="0" anchor="t"/>
-          <a:lstStyle/>
-          <a:p>
-            <a:pPr algn="l" indent="0" marL="0">
-              <a:lnSpc>
-                <a:spcPts val="1375"/>
-              </a:lnSpc>
-              <a:buNone/>
-            </a:pPr>
-            <a:r>
-              <a:rPr lang="en-US" sz="1100" dirty="0">
-                <a:solidFill>
-                  <a:srgbClr val="1C2833"/>
-                </a:solidFill>
-                <a:latin typeface="Courier New" pitchFamily="34" charset="0"/>
-                <a:ea typeface="Courier New" pitchFamily="34" charset="-122"/>
-                <a:cs typeface="Courier New" pitchFamily="34" charset="-120"/>
-              </a:rPr>
-              <a:t>3</a:t>
-            </a:r>
-            <a:endParaRPr lang="en-US" sz="1100" dirty="0"/>
-          </a:p>
-        </p:txBody>
-      </p:sp>
-      <p:sp>
-        <p:nvSpPr>
-          <p:cNvPr id="21" name="Text 19"/>
-          <p:cNvSpPr/>
-          <p:nvPr/>
-        </p:nvSpPr>
-        <p:spPr>
-          <a:xfrm>
-            <a:off x="631627" y="4039791"/>
-            <a:ext cx="8086939" cy="174575"/>
-          </a:xfrm>
-          <a:prstGeom prst="rect">
-            <a:avLst/>
-          </a:prstGeom>
-          <a:noFill/>
-          <a:ln/>
-        </p:spPr>
-        <p:txBody>
-          <a:bodyPr wrap="square" lIns="0" tIns="0" rIns="0" bIns="0" rtlCol="0" anchor="t"/>
-          <a:lstStyle/>
-          <a:p>
-            <a:pPr algn="l" indent="0" marL="0">
-              <a:lnSpc>
-                <a:spcPts val="1375"/>
-              </a:lnSpc>
-              <a:buNone/>
-            </a:pPr>
-            <a:r>
-              <a:rPr lang="en-US" sz="1100" dirty="0">
-                <a:solidFill>
-                  <a:srgbClr val="1C2833"/>
-                </a:solidFill>
-                <a:latin typeface="Courier New" pitchFamily="34" charset="0"/>
-                <a:ea typeface="Courier New" pitchFamily="34" charset="-122"/>
-                <a:cs typeface="Courier New" pitchFamily="34" charset="-120"/>
-              </a:rPr>
-              <a:t>7  ← total 6 → 9 → 16 ≥ 10, dot ·, total = 6</a:t>
-            </a:r>
-            <a:endParaRPr lang="en-US" sz="1100" dirty="0"/>
-          </a:p>
-        </p:txBody>
-      </p:sp>
-      <p:sp>
-        <p:nvSpPr>
-          <p:cNvPr id="22" name="Text 20"/>
-          <p:cNvSpPr/>
-          <p:nvPr/>
-        </p:nvSpPr>
-        <p:spPr>
-          <a:xfrm>
-            <a:off x="631627" y="4214366"/>
-            <a:ext cx="8086939" cy="174575"/>
-          </a:xfrm>
-          <a:prstGeom prst="rect">
-            <a:avLst/>
-          </a:prstGeom>
-          <a:noFill/>
-          <a:ln/>
-        </p:spPr>
-        <p:txBody>
-          <a:bodyPr wrap="square" lIns="0" tIns="0" rIns="0" bIns="0" rtlCol="0" anchor="t"/>
-          <a:lstStyle/>
-          <a:p>
-            <a:pPr algn="l" indent="0" marL="0">
-              <a:lnSpc>
-                <a:spcPts val="1375"/>
-              </a:lnSpc>
-              <a:buNone/>
-            </a:pPr>
-            <a:r>
-              <a:rPr lang="en-US" sz="1100" dirty="0">
-                <a:solidFill>
-                  <a:srgbClr val="1C2833"/>
-                </a:solidFill>
-                <a:latin typeface="Courier New" pitchFamily="34" charset="0"/>
-                <a:ea typeface="Courier New" pitchFamily="34" charset="-122"/>
-                <a:cs typeface="Courier New" pitchFamily="34" charset="-120"/>
-              </a:rPr>
-              <a:t>5</a:t>
-            </a:r>
-            <a:endParaRPr lang="en-US" sz="1100" dirty="0"/>
-          </a:p>
-        </p:txBody>
-      </p:sp>
-      <p:sp>
-        <p:nvSpPr>
-          <p:cNvPr id="23" name="Text 21"/>
-          <p:cNvSpPr/>
-          <p:nvPr/>
-        </p:nvSpPr>
-        <p:spPr>
-          <a:xfrm>
-            <a:off x="631627" y="4388941"/>
-            <a:ext cx="8086939" cy="174575"/>
-          </a:xfrm>
-          <a:prstGeom prst="rect">
-            <a:avLst/>
-          </a:prstGeom>
-          <a:noFill/>
-          <a:ln/>
-        </p:spPr>
-        <p:txBody>
-          <a:bodyPr wrap="square" lIns="0" tIns="0" rIns="0" bIns="0" rtlCol="0" anchor="t"/>
-          <a:lstStyle/>
-          <a:p>
-            <a:pPr algn="l" indent="0" marL="0">
-              <a:lnSpc>
-                <a:spcPts val="1375"/>
-              </a:lnSpc>
-              <a:buNone/>
-            </a:pPr>
-            <a:r>
-              <a:rPr lang="en-US" sz="1100" dirty="0">
-                <a:solidFill>
-                  <a:srgbClr val="1C2833"/>
-                </a:solidFill>
-                <a:latin typeface="Courier New" pitchFamily="34" charset="0"/>
-                <a:ea typeface="Courier New" pitchFamily="34" charset="-122"/>
-                <a:cs typeface="Courier New" pitchFamily="34" charset="-120"/>
-              </a:rPr>
-              <a:t>8  ← total 6 → 11 ≥ 10, dot ·, total = 1</a:t>
-            </a:r>
-            <a:endParaRPr lang="en-US" sz="1100" dirty="0"/>
-          </a:p>
-        </p:txBody>
-      </p:sp>
-      <p:sp>
-        <p:nvSpPr>
-          <p:cNvPr id="24" name="Text 22"/>
-          <p:cNvSpPr/>
-          <p:nvPr/>
-        </p:nvSpPr>
-        <p:spPr>
-          <a:xfrm>
-            <a:off x="631627" y="4563517"/>
-            <a:ext cx="8086939" cy="174575"/>
-          </a:xfrm>
-          <a:prstGeom prst="rect">
-            <a:avLst/>
-          </a:prstGeom>
-          <a:noFill/>
-          <a:ln/>
-        </p:spPr>
-        <p:txBody>
-          <a:bodyPr wrap="square" lIns="0" tIns="0" rIns="0" bIns="0" rtlCol="0" anchor="t"/>
-          <a:lstStyle/>
-          <a:p>
-            <a:pPr algn="l" indent="0" marL="0">
-              <a:lnSpc>
-                <a:spcPts val="1375"/>
-              </a:lnSpc>
-              <a:buNone/>
-            </a:pPr>
-            <a:r>
-              <a:rPr lang="en-US" sz="1100" dirty="0">
-                <a:solidFill>
-                  <a:srgbClr val="1C2833"/>
-                </a:solidFill>
-                <a:latin typeface="Courier New" pitchFamily="34" charset="0"/>
-                <a:ea typeface="Courier New" pitchFamily="34" charset="-122"/>
-                <a:cs typeface="Courier New" pitchFamily="34" charset="-120"/>
-              </a:rPr>
-              <a:t>4</a:t>
-            </a:r>
-            <a:endParaRPr lang="en-US" sz="1100" dirty="0"/>
-          </a:p>
-        </p:txBody>
-      </p:sp>
-      <p:sp>
-        <p:nvSpPr>
-          <p:cNvPr id="25" name="Text 23"/>
-          <p:cNvSpPr/>
-          <p:nvPr/>
-        </p:nvSpPr>
-        <p:spPr>
-          <a:xfrm>
-            <a:off x="631627" y="4738092"/>
-            <a:ext cx="8086939" cy="174575"/>
-          </a:xfrm>
-          <a:prstGeom prst="rect">
-            <a:avLst/>
-          </a:prstGeom>
-          <a:noFill/>
-          <a:ln/>
-        </p:spPr>
-        <p:txBody>
-          <a:bodyPr wrap="square" lIns="0" tIns="0" rIns="0" bIns="0" rtlCol="0" anchor="t"/>
-          <a:lstStyle/>
-          <a:p>
-            <a:pPr algn="l" indent="0" marL="0">
-              <a:lnSpc>
-                <a:spcPts val="1375"/>
-              </a:lnSpc>
-              <a:buNone/>
-            </a:pPr>
-            <a:r>
-              <a:rPr lang="en-US" sz="1100" dirty="0">
-                <a:solidFill>
-                  <a:srgbClr val="1C2833"/>
-                </a:solidFill>
-                <a:latin typeface="Courier New" pitchFamily="34" charset="0"/>
-                <a:ea typeface="Courier New" pitchFamily="34" charset="-122"/>
-                <a:cs typeface="Courier New" pitchFamily="34" charset="-120"/>
-              </a:rPr>
-              <a:t>2</a:t>
-            </a:r>
-            <a:endParaRPr lang="en-US" sz="1100" dirty="0"/>
-          </a:p>
-        </p:txBody>
-      </p:sp>
-      <p:sp>
-        <p:nvSpPr>
-          <p:cNvPr id="26" name="Text 24"/>
-          <p:cNvSpPr/>
-          <p:nvPr/>
-        </p:nvSpPr>
-        <p:spPr>
-          <a:xfrm>
-            <a:off x="631627" y="4912668"/>
-            <a:ext cx="8086939" cy="174575"/>
-          </a:xfrm>
-          <a:prstGeom prst="rect">
-            <a:avLst/>
-          </a:prstGeom>
-          <a:noFill/>
-          <a:ln/>
-        </p:spPr>
-        <p:txBody>
-          <a:bodyPr wrap="square" lIns="0" tIns="0" rIns="0" bIns="0" rtlCol="0" anchor="t"/>
-          <a:lstStyle/>
-          <a:p>
-            <a:pPr algn="l" indent="0" marL="0">
-              <a:lnSpc>
-                <a:spcPts val="1375"/>
-              </a:lnSpc>
-              <a:buNone/>
-            </a:pPr>
-            <a:r>
-              <a:rPr lang="en-US" sz="1100" dirty="0">
-                <a:solidFill>
-                  <a:srgbClr val="1C2833"/>
-                </a:solidFill>
-                <a:latin typeface="Courier New" pitchFamily="34" charset="0"/>
-                <a:ea typeface="Courier New" pitchFamily="34" charset="-122"/>
-                <a:cs typeface="Courier New" pitchFamily="34" charset="-120"/>
-              </a:rPr>
-              <a:t>__</a:t>
-            </a:r>
-            <a:endParaRPr lang="en-US" sz="1100" dirty="0"/>
-          </a:p>
-        </p:txBody>
-      </p:sp>
-      <p:sp>
-        <p:nvSpPr>
-          <p:cNvPr id="27" name="Text 25"/>
-          <p:cNvSpPr/>
-          <p:nvPr/>
-        </p:nvSpPr>
-        <p:spPr>
-          <a:xfrm>
-            <a:off x="631627" y="5087243"/>
-            <a:ext cx="8086939" cy="174575"/>
-          </a:xfrm>
-          <a:prstGeom prst="rect">
-            <a:avLst/>
-          </a:prstGeom>
-          <a:noFill/>
-          <a:ln/>
-        </p:spPr>
-        <p:txBody>
-          <a:bodyPr wrap="square" lIns="0" tIns="0" rIns="0" bIns="0" rtlCol="0" anchor="t"/>
-          <a:lstStyle/>
-          <a:p>
-            <a:pPr algn="l" indent="0" marL="0">
-              <a:lnSpc>
-                <a:spcPts val="1375"/>
-              </a:lnSpc>
-              <a:buNone/>
-            </a:pPr>
-            <a:r>
-              <a:rPr lang="en-US" sz="1100" dirty="0">
-                <a:solidFill>
-                  <a:srgbClr val="1C2833"/>
-                </a:solidFill>
-                <a:latin typeface="Courier New" pitchFamily="34" charset="0"/>
-                <a:ea typeface="Courier New" pitchFamily="34" charset="-122"/>
-                <a:cs typeface="Courier New" pitchFamily="34" charset="-120"/>
-              </a:rPr>
-              <a:t>1   ← running total at end</a:t>
-            </a:r>
-            <a:endParaRPr lang="en-US" sz="1100" dirty="0"/>
-          </a:p>
-        </p:txBody>
-      </p:sp>
-      <p:sp>
-        <p:nvSpPr>
-          <p:cNvPr id="28" name="Text 26"/>
-          <p:cNvSpPr/>
-          <p:nvPr/>
-        </p:nvSpPr>
-        <p:spPr>
-          <a:xfrm>
-            <a:off x="631627" y="5261818"/>
-            <a:ext cx="8086939" cy="174575"/>
-          </a:xfrm>
-          <a:prstGeom prst="rect">
-            <a:avLst/>
-          </a:prstGeom>
-          <a:noFill/>
-          <a:ln/>
-        </p:spPr>
-        <p:txBody>
-          <a:bodyPr wrap="square" lIns="0" tIns="0" rIns="0" bIns="0" rtlCol="0" anchor="t"/>
-          <a:lstStyle/>
-          <a:p>
-            <a:pPr algn="l" indent="0" marL="0">
-              <a:lnSpc>
-                <a:spcPts val="1375"/>
-              </a:lnSpc>
-              <a:buNone/>
-            </a:pPr>
-            <a:r>
-              <a:rPr lang="en-US" sz="1100" dirty="0">
-                <a:solidFill>
-                  <a:srgbClr val="1C2833"/>
-                </a:solidFill>
-                <a:latin typeface="Courier New" pitchFamily="34" charset="0"/>
-                <a:ea typeface="Courier New" pitchFamily="34" charset="-122"/>
-                <a:cs typeface="Courier New" pitchFamily="34" charset="-120"/>
-              </a:rPr>
-              <a:t>··· wait, let me recount</a:t>
-            </a:r>
-            <a:endParaRPr lang="en-US" sz="1100" dirty="0"/>
-          </a:p>
-        </p:txBody>
-      </p:sp>
-      <p:sp>
-        <p:nvSpPr>
-          <p:cNvPr id="29" name="Text 27"/>
-          <p:cNvSpPr/>
-          <p:nvPr/>
-        </p:nvSpPr>
-        <p:spPr>
-          <a:xfrm>
-            <a:off x="406301" y="5652195"/>
-            <a:ext cx="8498026" cy="213271"/>
-          </a:xfrm>
-          <a:prstGeom prst="rect">
-            <a:avLst/>
-          </a:prstGeom>
-          <a:noFill/>
-          <a:ln/>
-        </p:spPr>
-        <p:txBody>
-          <a:bodyPr wrap="square" lIns="0" tIns="0" rIns="0" bIns="0" rtlCol="0" anchor="t"/>
-          <a:lstStyle/>
-          <a:p>
-            <a:pPr algn="l" indent="0" marL="0">
-              <a:lnSpc>
-                <a:spcPts val="1680"/>
-              </a:lnSpc>
-              <a:spcBef>
-                <a:spcPts val="300"/>
-              </a:spcBef>
-              <a:spcAft>
-                <a:spcPts val="300"/>
-              </a:spcAft>
-              <a:buNone/>
-            </a:pPr>
-            <a:r>
-              <a:rPr lang="en-US" sz="1200" dirty="0">
+              <a:t>Recall: </a:t>
+            </a:r>
+            <a:pPr algn="l" indent="0" marL="0">
+              <a:lnSpc>
+                <a:spcPts val="1620"/>
+              </a:lnSpc>
+              <a:spcAft>
+                <a:spcPts val="300"/>
+              </a:spcAft>
+              <a:buNone/>
+            </a:pPr>
+            <a:r>
+              <a:rPr lang="en-US" sz="1200" i="1" dirty="0">
                 <a:solidFill>
                   <a:srgbClr val="1C2833"/>
                 </a:solidFill>
@@ -4702,40 +6716,12 @@
                 <a:ea typeface="Arial" pitchFamily="34" charset="-122"/>
                 <a:cs typeface="Arial" pitchFamily="34" charset="-120"/>
               </a:rPr>
-              <a:t>(Be honest with yourself — recount aloud. Models the self-checking habit.)</a:t>
-            </a:r>
-            <a:endParaRPr lang="en-US" sz="1200" dirty="0"/>
-          </a:p>
-        </p:txBody>
-      </p:sp>
-      <p:sp>
-        <p:nvSpPr>
-          <p:cNvPr id="30" name="Text 28"/>
-          <p:cNvSpPr/>
-          <p:nvPr/>
-        </p:nvSpPr>
-        <p:spPr>
-          <a:xfrm>
-            <a:off x="406301" y="5941665"/>
-            <a:ext cx="8498026" cy="213271"/>
-          </a:xfrm>
-          <a:prstGeom prst="rect">
-            <a:avLst/>
-          </a:prstGeom>
-          <a:noFill/>
-          <a:ln/>
-        </p:spPr>
-        <p:txBody>
-          <a:bodyPr wrap="square" lIns="0" tIns="0" rIns="0" bIns="0" rtlCol="0" anchor="t"/>
-          <a:lstStyle/>
-          <a:p>
-            <a:pPr algn="l" indent="0" marL="0">
-              <a:lnSpc>
-                <a:spcPts val="1680"/>
-              </a:lnSpc>
-              <a:spcBef>
-                <a:spcPts val="300"/>
-              </a:spcBef>
+              <a:t>"In any list of digits, how do I find the units digit if I'm using the dot method?"</a:t>
+            </a:r>
+            <a:pPr algn="l" indent="0" marL="0">
+              <a:lnSpc>
+                <a:spcPts val="1620"/>
+              </a:lnSpc>
               <a:spcAft>
                 <a:spcPts val="300"/>
               </a:spcAft>
@@ -4750,7 +6736,7 @@
                 <a:ea typeface="Arial" pitchFamily="34" charset="-122"/>
                 <a:cs typeface="Arial" pitchFamily="34" charset="-120"/>
               </a:rPr>
-              <a:t>Correct walk-through: – Start: 0</a:t>
+              <a:t> (Take a student answer. Reinforce: scan, mark dots, the unwritten leftover is the units.)</a:t>
             </a:r>
             <a:endParaRPr lang="en-US" sz="1200" dirty="0"/>
           </a:p>
@@ -4758,395 +6744,13 @@
       </p:sp>
       <p:sp>
         <p:nvSpPr>
-          <p:cNvPr id="31" name="Text 29"/>
-          <p:cNvSpPr/>
-          <p:nvPr/>
-        </p:nvSpPr>
-        <p:spPr>
-          <a:xfrm>
-            <a:off x="634901" y="6243786"/>
-            <a:ext cx="8102798" cy="1988344"/>
-          </a:xfrm>
-          <a:prstGeom prst="rect">
-            <a:avLst/>
-          </a:prstGeom>
-          <a:noFill/>
-          <a:ln/>
-        </p:spPr>
-        <p:txBody>
-          <a:bodyPr wrap="square" lIns="0" tIns="0" rIns="0" bIns="0" rtlCol="0" anchor="t"/>
-          <a:lstStyle/>
-          <a:p>
-            <a:pPr algn="l" marL="342900" indent="-342900">
-              <a:lnSpc>
-                <a:spcPts val="1620"/>
-              </a:lnSpc>
-              <a:spcAft>
-                <a:spcPts val="300"/>
-              </a:spcAft>
-              <a:buSzPct val="100000"/>
-              <a:buChar char="•"/>
-            </a:pPr>
-            <a:r>
-              <a:rPr lang="en-US" sz="1200" dirty="0">
-                <a:solidFill>
-                  <a:srgbClr val="1C2833"/>
-                </a:solidFill>
-                <a:latin typeface="Arial" pitchFamily="34" charset="0"/>
-                <a:ea typeface="Arial" pitchFamily="34" charset="-122"/>
-                <a:cs typeface="Arial" pitchFamily="34" charset="-120"/>
-              </a:rPr>
-              <a:t>+ 6 → 6</a:t>
-            </a:r>
-            <a:endParaRPr lang="en-US" sz="1200" dirty="0"/>
-          </a:p>
-          <a:p>
-            <a:pPr algn="l" marL="342900" indent="-342900">
-              <a:lnSpc>
-                <a:spcPts val="1620"/>
-              </a:lnSpc>
-              <a:spcAft>
-                <a:spcPts val="300"/>
-              </a:spcAft>
-              <a:buSzPct val="100000"/>
-              <a:buChar char="•"/>
-            </a:pPr>
-            <a:r>
-              <a:rPr lang="en-US" sz="1200" dirty="0">
-                <a:solidFill>
-                  <a:srgbClr val="1C2833"/>
-                </a:solidFill>
-                <a:latin typeface="Arial" pitchFamily="34" charset="0"/>
-                <a:ea typeface="Arial" pitchFamily="34" charset="-122"/>
-                <a:cs typeface="Arial" pitchFamily="34" charset="-120"/>
-              </a:rPr>
-              <a:t>+ 3 → 9</a:t>
-            </a:r>
-            <a:endParaRPr lang="en-US" sz="1200" dirty="0"/>
-          </a:p>
-          <a:p>
-            <a:pPr algn="l" marL="342900" indent="-342900">
-              <a:lnSpc>
-                <a:spcPts val="1620"/>
-              </a:lnSpc>
-              <a:spcAft>
-                <a:spcPts val="300"/>
-              </a:spcAft>
-              <a:buSzPct val="100000"/>
-              <a:buChar char="•"/>
-            </a:pPr>
-            <a:r>
-              <a:rPr lang="en-US" sz="1200" dirty="0">
-                <a:solidFill>
-                  <a:srgbClr val="1C2833"/>
-                </a:solidFill>
-                <a:latin typeface="Arial" pitchFamily="34" charset="0"/>
-                <a:ea typeface="Arial" pitchFamily="34" charset="-122"/>
-                <a:cs typeface="Arial" pitchFamily="34" charset="-120"/>
-              </a:rPr>
-              <a:t>+ 7 → 16. Total ≥ 10: mark </a:t>
-            </a:r>
-            <a:pPr algn="l" indent="0" marL="0">
-              <a:lnSpc>
-                <a:spcPts val="1620"/>
-              </a:lnSpc>
-              <a:spcAft>
-                <a:spcPts val="300"/>
-              </a:spcAft>
-              <a:buNone/>
-            </a:pPr>
-            <a:r>
-              <a:rPr lang="en-US" sz="1200" b="1" dirty="0">
-                <a:solidFill>
-                  <a:srgbClr val="1C2833"/>
-                </a:solidFill>
-                <a:latin typeface="Arial" pitchFamily="34" charset="0"/>
-                <a:ea typeface="Arial" pitchFamily="34" charset="-122"/>
-                <a:cs typeface="Arial" pitchFamily="34" charset="-120"/>
-              </a:rPr>
-              <a:t>·</a:t>
-            </a:r>
-            <a:pPr algn="l" indent="0" marL="0">
-              <a:lnSpc>
-                <a:spcPts val="1620"/>
-              </a:lnSpc>
-              <a:spcAft>
-                <a:spcPts val="300"/>
-              </a:spcAft>
-              <a:buNone/>
-            </a:pPr>
-            <a:r>
-              <a:rPr lang="en-US" sz="1200" dirty="0">
-                <a:solidFill>
-                  <a:srgbClr val="1C2833"/>
-                </a:solidFill>
-                <a:latin typeface="Arial" pitchFamily="34" charset="0"/>
-                <a:ea typeface="Arial" pitchFamily="34" charset="-122"/>
-                <a:cs typeface="Arial" pitchFamily="34" charset="-120"/>
-              </a:rPr>
-              <a:t> above 7. Total = 6.</a:t>
-            </a:r>
-            <a:endParaRPr lang="en-US" sz="1200" dirty="0"/>
-          </a:p>
-          <a:p>
-            <a:pPr algn="l" marL="342900" indent="-342900">
-              <a:lnSpc>
-                <a:spcPts val="1620"/>
-              </a:lnSpc>
-              <a:spcAft>
-                <a:spcPts val="300"/>
-              </a:spcAft>
-              <a:buSzPct val="100000"/>
-              <a:buChar char="•"/>
-            </a:pPr>
-            <a:r>
-              <a:rPr lang="en-US" sz="1200" dirty="0">
-                <a:solidFill>
-                  <a:srgbClr val="1C2833"/>
-                </a:solidFill>
-                <a:latin typeface="Arial" pitchFamily="34" charset="0"/>
-                <a:ea typeface="Arial" pitchFamily="34" charset="-122"/>
-                <a:cs typeface="Arial" pitchFamily="34" charset="-120"/>
-              </a:rPr>
-              <a:t>+ 5 → 11. Total ≥ 10: mark </a:t>
-            </a:r>
-            <a:pPr algn="l" indent="0" marL="0">
-              <a:lnSpc>
-                <a:spcPts val="1620"/>
-              </a:lnSpc>
-              <a:spcAft>
-                <a:spcPts val="300"/>
-              </a:spcAft>
-              <a:buNone/>
-            </a:pPr>
-            <a:r>
-              <a:rPr lang="en-US" sz="1200" b="1" dirty="0">
-                <a:solidFill>
-                  <a:srgbClr val="1C2833"/>
-                </a:solidFill>
-                <a:latin typeface="Arial" pitchFamily="34" charset="0"/>
-                <a:ea typeface="Arial" pitchFamily="34" charset="-122"/>
-                <a:cs typeface="Arial" pitchFamily="34" charset="-120"/>
-              </a:rPr>
-              <a:t>·</a:t>
-            </a:r>
-            <a:pPr algn="l" indent="0" marL="0">
-              <a:lnSpc>
-                <a:spcPts val="1620"/>
-              </a:lnSpc>
-              <a:spcAft>
-                <a:spcPts val="300"/>
-              </a:spcAft>
-              <a:buNone/>
-            </a:pPr>
-            <a:r>
-              <a:rPr lang="en-US" sz="1200" dirty="0">
-                <a:solidFill>
-                  <a:srgbClr val="1C2833"/>
-                </a:solidFill>
-                <a:latin typeface="Arial" pitchFamily="34" charset="0"/>
-                <a:ea typeface="Arial" pitchFamily="34" charset="-122"/>
-                <a:cs typeface="Arial" pitchFamily="34" charset="-120"/>
-              </a:rPr>
-              <a:t> above 5. Total = 1.</a:t>
-            </a:r>
-            <a:endParaRPr lang="en-US" sz="1200" dirty="0"/>
-          </a:p>
-          <a:p>
-            <a:pPr algn="l" marL="342900" indent="-342900">
-              <a:lnSpc>
-                <a:spcPts val="1620"/>
-              </a:lnSpc>
-              <a:spcAft>
-                <a:spcPts val="300"/>
-              </a:spcAft>
-              <a:buSzPct val="100000"/>
-              <a:buChar char="•"/>
-            </a:pPr>
-            <a:r>
-              <a:rPr lang="en-US" sz="1200" dirty="0">
-                <a:solidFill>
-                  <a:srgbClr val="1C2833"/>
-                </a:solidFill>
-                <a:latin typeface="Arial" pitchFamily="34" charset="0"/>
-                <a:ea typeface="Arial" pitchFamily="34" charset="-122"/>
-                <a:cs typeface="Arial" pitchFamily="34" charset="-120"/>
-              </a:rPr>
-              <a:t>+ 8 → 9.</a:t>
-            </a:r>
-            <a:endParaRPr lang="en-US" sz="1200" dirty="0"/>
-          </a:p>
-          <a:p>
-            <a:pPr algn="l" marL="342900" indent="-342900">
-              <a:lnSpc>
-                <a:spcPts val="1620"/>
-              </a:lnSpc>
-              <a:spcAft>
-                <a:spcPts val="300"/>
-              </a:spcAft>
-              <a:buSzPct val="100000"/>
-              <a:buChar char="•"/>
-            </a:pPr>
-            <a:r>
-              <a:rPr lang="en-US" sz="1200" dirty="0">
-                <a:solidFill>
-                  <a:srgbClr val="1C2833"/>
-                </a:solidFill>
-                <a:latin typeface="Arial" pitchFamily="34" charset="0"/>
-                <a:ea typeface="Arial" pitchFamily="34" charset="-122"/>
-                <a:cs typeface="Arial" pitchFamily="34" charset="-120"/>
-              </a:rPr>
-              <a:t>+ 4 → 13. Total ≥ 10: mark </a:t>
-            </a:r>
-            <a:pPr algn="l" indent="0" marL="0">
-              <a:lnSpc>
-                <a:spcPts val="1620"/>
-              </a:lnSpc>
-              <a:spcAft>
-                <a:spcPts val="300"/>
-              </a:spcAft>
-              <a:buNone/>
-            </a:pPr>
-            <a:r>
-              <a:rPr lang="en-US" sz="1200" b="1" dirty="0">
-                <a:solidFill>
-                  <a:srgbClr val="1C2833"/>
-                </a:solidFill>
-                <a:latin typeface="Arial" pitchFamily="34" charset="0"/>
-                <a:ea typeface="Arial" pitchFamily="34" charset="-122"/>
-                <a:cs typeface="Arial" pitchFamily="34" charset="-120"/>
-              </a:rPr>
-              <a:t>·</a:t>
-            </a:r>
-            <a:pPr algn="l" indent="0" marL="0">
-              <a:lnSpc>
-                <a:spcPts val="1620"/>
-              </a:lnSpc>
-              <a:spcAft>
-                <a:spcPts val="300"/>
-              </a:spcAft>
-              <a:buNone/>
-            </a:pPr>
-            <a:r>
-              <a:rPr lang="en-US" sz="1200" dirty="0">
-                <a:solidFill>
-                  <a:srgbClr val="1C2833"/>
-                </a:solidFill>
-                <a:latin typeface="Arial" pitchFamily="34" charset="0"/>
-                <a:ea typeface="Arial" pitchFamily="34" charset="-122"/>
-                <a:cs typeface="Arial" pitchFamily="34" charset="-120"/>
-              </a:rPr>
-              <a:t> above 4. Total = 3.</a:t>
-            </a:r>
-            <a:endParaRPr lang="en-US" sz="1200" dirty="0"/>
-          </a:p>
-          <a:p>
-            <a:pPr algn="l" marL="342900" indent="-342900">
-              <a:lnSpc>
-                <a:spcPts val="1620"/>
-              </a:lnSpc>
-              <a:spcAft>
-                <a:spcPts val="300"/>
-              </a:spcAft>
-              <a:buSzPct val="100000"/>
-              <a:buChar char="•"/>
-            </a:pPr>
-            <a:r>
-              <a:rPr lang="en-US" sz="1200" dirty="0">
-                <a:solidFill>
-                  <a:srgbClr val="1C2833"/>
-                </a:solidFill>
-                <a:latin typeface="Arial" pitchFamily="34" charset="0"/>
-                <a:ea typeface="Arial" pitchFamily="34" charset="-122"/>
-                <a:cs typeface="Arial" pitchFamily="34" charset="-120"/>
-              </a:rPr>
-              <a:t>+ 2 → 5.</a:t>
-            </a:r>
-            <a:endParaRPr lang="en-US" sz="1200" dirty="0"/>
-          </a:p>
-          <a:p>
-            <a:pPr algn="l" marL="342900" indent="-342900">
-              <a:lnSpc>
-                <a:spcPts val="1620"/>
-              </a:lnSpc>
-              <a:spcAft>
-                <a:spcPts val="300"/>
-              </a:spcAft>
-              <a:buSzPct val="100000"/>
-              <a:buChar char="•"/>
-            </a:pPr>
-            <a:r>
-              <a:rPr lang="en-US" sz="1200" b="1" dirty="0">
-                <a:solidFill>
-                  <a:srgbClr val="1C2833"/>
-                </a:solidFill>
-                <a:latin typeface="Arial" pitchFamily="34" charset="0"/>
-                <a:ea typeface="Arial" pitchFamily="34" charset="-122"/>
-                <a:cs typeface="Arial" pitchFamily="34" charset="-120"/>
-              </a:rPr>
-              <a:t>Units: 5. Dots: 3. Carry 3 to next column.</a:t>
-            </a:r>
-            <a:endParaRPr lang="en-US" sz="1200" dirty="0"/>
-          </a:p>
-        </p:txBody>
-      </p:sp>
-      <p:sp>
-        <p:nvSpPr>
-          <p:cNvPr id="32" name="Text 30"/>
-          <p:cNvSpPr/>
-          <p:nvPr/>
-        </p:nvSpPr>
-        <p:spPr>
-          <a:xfrm>
-            <a:off x="406301" y="8320980"/>
-            <a:ext cx="8498026" cy="213271"/>
-          </a:xfrm>
-          <a:prstGeom prst="rect">
-            <a:avLst/>
-          </a:prstGeom>
-          <a:noFill/>
-          <a:ln/>
-        </p:spPr>
-        <p:txBody>
-          <a:bodyPr wrap="square" lIns="0" tIns="0" rIns="0" bIns="0" rtlCol="0" anchor="t"/>
-          <a:lstStyle/>
-          <a:p>
-            <a:pPr algn="l" indent="0" marL="0">
-              <a:lnSpc>
-                <a:spcPts val="1680"/>
-              </a:lnSpc>
-              <a:spcBef>
-                <a:spcPts val="300"/>
-              </a:spcBef>
-              <a:spcAft>
-                <a:spcPts val="300"/>
-              </a:spcAft>
-              <a:buNone/>
-            </a:pPr>
-            <a:r>
-              <a:rPr lang="en-US" sz="1200" dirty="0">
-                <a:solidFill>
-                  <a:srgbClr val="1C2833"/>
-                </a:solidFill>
-                <a:latin typeface="Arial" pitchFamily="34" charset="0"/>
-                <a:ea typeface="Arial" pitchFamily="34" charset="-122"/>
-                <a:cs typeface="Arial" pitchFamily="34" charset="-120"/>
-              </a:rPr>
-              <a:t>Verify by standard addition: 6+3+7+5+8+4+2 = 35. Units = 5. Carry = 3. ✓</a:t>
-            </a:r>
-            <a:endParaRPr lang="en-US" sz="1200" dirty="0"/>
-          </a:p>
-        </p:txBody>
-      </p:sp>
-      <p:sp>
-        <p:nvSpPr>
-          <p:cNvPr id="33" name="Text 31"/>
-          <p:cNvSpPr/>
-          <p:nvPr/>
-        </p:nvSpPr>
-        <p:spPr>
-          <a:xfrm>
-            <a:off x="406301" y="8686651"/>
+          <p:cNvPr id="5" name="Text 3"/>
+          <p:cNvSpPr/>
+          <p:nvPr/>
+        </p:nvSpPr>
+        <p:spPr>
+          <a:xfrm>
+            <a:off x="406301" y="4434929"/>
             <a:ext cx="8498026" cy="213271"/>
           </a:xfrm>
           <a:prstGeom prst="rect">
@@ -5290,7 +6894,7 @@
                 <a:ea typeface="Georgia" pitchFamily="34" charset="-122"/>
                 <a:cs typeface="Georgia" pitchFamily="34" charset="-120"/>
               </a:rPr>
-              <a:t>Activity (20 min) — Single-column drill</a:t>
+              <a:t>Core (15 min) — The procedure formalised</a:t>
             </a:r>
             <a:endParaRPr lang="en-US" sz="1800" dirty="0"/>
           </a:p>
@@ -5305,7 +6909,7 @@
         <p:spPr>
           <a:xfrm>
             <a:off x="406301" y="870942"/>
-            <a:ext cx="8498026" cy="639812"/>
+            <a:ext cx="8498026" cy="213271"/>
           </a:xfrm>
           <a:prstGeom prst="rect">
             <a:avLst/>
@@ -5338,7 +6942,7 @@
                 <a:ea typeface="Arial" pitchFamily="34" charset="-122"/>
                 <a:cs typeface="Arial" pitchFamily="34" charset="-120"/>
               </a:rPr>
-              <a:t>– Hand out worksheet of 10 columns. – 5 minutes individual work. – 10 minutes paired correction: partner-A solves column 1 aloud while partner-B watches and corrects. Swap. Continue alternating. – Final 5 minutes: silent retry on any column students got wrong.</a:t>
+              <a:t>Write on the board, large:</a:t>
             </a:r>
             <a:endParaRPr lang="en-US" sz="1200" dirty="0"/>
           </a:p>
@@ -5496,7 +7100,7 @@
                 <a:ea typeface="Georgia" pitchFamily="34" charset="-122"/>
                 <a:cs typeface="Georgia" pitchFamily="34" charset="-120"/>
               </a:rPr>
-              <a:t>Wrap-up (5 min)</a:t>
+              <a:t>Core (15 min) — The procedure formalised (cont.)</a:t>
             </a:r>
             <a:endParaRPr lang="en-US" sz="1800" dirty="0"/>
           </a:p>
@@ -5510,13 +7114,66 @@
         </p:nvSpPr>
         <p:spPr>
           <a:xfrm>
-            <a:off x="406301" y="870942"/>
-            <a:ext cx="8498026" cy="436066"/>
-          </a:xfrm>
-          <a:prstGeom prst="rect">
+            <a:off x="406301" y="883593"/>
+            <a:ext cx="8331398" cy="1999655"/>
+          </a:xfrm>
+          <a:prstGeom prst="rect">
+            <a:avLst/>
+          </a:prstGeom>
+          <a:solidFill>
+            <a:srgbClr val="F4F8F9"/>
+          </a:solidFill>
+          <a:ln/>
+        </p:spPr>
+        <p:txBody>
+          <a:bodyPr wrap="square" rtlCol="0" anchor="ctr"/>
+          <a:lstStyle/>
+          <a:p>
+            <a:pPr indent="0" marL="0">
+              <a:buNone/>
+            </a:pPr>
+            <a:endParaRPr lang="en-US" dirty="0"/>
+          </a:p>
+        </p:txBody>
+      </p:sp>
+      <p:sp>
+        <p:nvSpPr>
+          <p:cNvPr id="5" name="Shape 3"/>
+          <p:cNvSpPr/>
+          <p:nvPr/>
+        </p:nvSpPr>
+        <p:spPr>
+          <a:xfrm>
+            <a:off x="430113" y="883593"/>
+            <a:ext cx="0" cy="1999655"/>
+          </a:xfrm>
+          <a:prstGeom prst="line">
             <a:avLst/>
           </a:prstGeom>
           <a:noFill/>
+          <a:ln w="47625">
+            <a:solidFill>
+              <a:srgbClr val="277884"/>
+            </a:solidFill>
+            <a:prstDash val="solid"/>
+          </a:ln>
+        </p:spPr>
+      </p:sp>
+      <p:sp>
+        <p:nvSpPr>
+          <p:cNvPr id="6" name="Text 4"/>
+          <p:cNvSpPr/>
+          <p:nvPr/>
+        </p:nvSpPr>
+        <p:spPr>
+          <a:xfrm>
+            <a:off x="631627" y="1010543"/>
+            <a:ext cx="8086939" cy="174575"/>
+          </a:xfrm>
+          <a:prstGeom prst="rect">
+            <a:avLst/>
+          </a:prstGeom>
+          <a:noFill/>
           <a:ln/>
         </p:spPr>
         <p:txBody>
@@ -5525,149 +7182,364 @@
           <a:p>
             <a:pPr algn="l" indent="0" marL="0">
               <a:lnSpc>
-                <a:spcPts val="1680"/>
-              </a:lnSpc>
-              <a:spcBef>
-                <a:spcPts val="300"/>
-              </a:spcBef>
-              <a:spcAft>
-                <a:spcPts val="300"/>
-              </a:spcAft>
-              <a:buNone/>
-            </a:pPr>
-            <a:r>
-              <a:rPr lang="en-US" sz="1200" dirty="0">
-                <a:solidFill>
-                  <a:srgbClr val="1C2833"/>
-                </a:solidFill>
-                <a:latin typeface="Arial" pitchFamily="34" charset="0"/>
-                <a:ea typeface="Arial" pitchFamily="34" charset="-122"/>
-                <a:cs typeface="Arial" pitchFamily="34" charset="-120"/>
-              </a:rPr>
-              <a:t>– Hand out the </a:t>
-            </a:r>
-            <a:pPr algn="l" indent="0" marL="0">
-              <a:lnSpc>
-                <a:spcPts val="1680"/>
-              </a:lnSpc>
-              <a:spcBef>
-                <a:spcPts val="300"/>
-              </a:spcBef>
-              <a:spcAft>
-                <a:spcPts val="300"/>
-              </a:spcAft>
-              <a:buNone/>
-            </a:pPr>
-            <a:r>
-              <a:rPr lang="en-US" sz="1200" b="1" dirty="0">
-                <a:solidFill>
-                  <a:srgbClr val="1C2833"/>
-                </a:solidFill>
-                <a:latin typeface="Arial" pitchFamily="34" charset="0"/>
-                <a:ea typeface="Arial" pitchFamily="34" charset="-122"/>
-                <a:cs typeface="Arial" pitchFamily="34" charset="-120"/>
-              </a:rPr>
-              <a:t>formative quiz</a:t>
-            </a:r>
-            <a:pPr algn="l" indent="0" marL="0">
-              <a:lnSpc>
-                <a:spcPts val="1680"/>
-              </a:lnSpc>
-              <a:spcBef>
-                <a:spcPts val="300"/>
-              </a:spcBef>
-              <a:spcAft>
-                <a:spcPts val="300"/>
-              </a:spcAft>
-              <a:buNone/>
-            </a:pPr>
-            <a:r>
-              <a:rPr lang="en-US" sz="1200" dirty="0">
-                <a:solidFill>
-                  <a:srgbClr val="1C2833"/>
-                </a:solidFill>
-                <a:latin typeface="Arial" pitchFamily="34" charset="0"/>
-                <a:ea typeface="Arial" pitchFamily="34" charset="-122"/>
-                <a:cs typeface="Arial" pitchFamily="34" charset="-120"/>
-              </a:rPr>
-              <a:t> (</a:t>
-            </a:r>
-            <a:pPr algn="l" indent="0" marL="0">
-              <a:lnSpc>
-                <a:spcPts val="1680"/>
-              </a:lnSpc>
-              <a:spcBef>
-                <a:spcPts val="300"/>
-              </a:spcBef>
-              <a:spcAft>
-                <a:spcPts val="300"/>
-              </a:spcAft>
-              <a:buNone/>
-            </a:pPr>
-            <a:r>
-              <a:rPr lang="en-US" sz="1200" dirty="0">
-                <a:solidFill>
-                  <a:srgbClr val="1C2833"/>
-                </a:solidFill>
-                <a:latin typeface="Arial" pitchFamily="34" charset="0"/>
-                <a:ea typeface="Arial" pitchFamily="34" charset="-122"/>
-                <a:cs typeface="Arial" pitchFamily="34" charset="-120"/>
-              </a:rPr>
-              <a:t>quizzes/formative.md</a:t>
-            </a:r>
-            <a:pPr algn="l" indent="0" marL="0">
-              <a:lnSpc>
-                <a:spcPts val="1680"/>
-              </a:lnSpc>
-              <a:spcBef>
-                <a:spcPts val="300"/>
-              </a:spcBef>
-              <a:spcAft>
-                <a:spcPts val="300"/>
-              </a:spcAft>
-              <a:buNone/>
-            </a:pPr>
-            <a:r>
-              <a:rPr lang="en-US" sz="1200" dirty="0">
-                <a:solidFill>
-                  <a:srgbClr val="1C2833"/>
-                </a:solidFill>
-                <a:latin typeface="Arial" pitchFamily="34" charset="0"/>
-                <a:ea typeface="Arial" pitchFamily="34" charset="-122"/>
-                <a:cs typeface="Arial" pitchFamily="34" charset="-120"/>
-              </a:rPr>
-              <a:t> Part A) — 4 quick column problems, 3 min. – Collect; mark overnight. – Preview Day 4: </a:t>
-            </a:r>
-            <a:pPr algn="l" indent="0" marL="0">
-              <a:lnSpc>
-                <a:spcPts val="1680"/>
-              </a:lnSpc>
-              <a:spcBef>
-                <a:spcPts val="300"/>
-              </a:spcBef>
-              <a:spcAft>
-                <a:spcPts val="300"/>
-              </a:spcAft>
-              <a:buNone/>
-            </a:pPr>
-            <a:r>
-              <a:rPr lang="en-US" sz="1200" i="1" dirty="0">
-                <a:solidFill>
-                  <a:srgbClr val="1C2833"/>
-                </a:solidFill>
-                <a:latin typeface="Arial" pitchFamily="34" charset="0"/>
-                <a:ea typeface="Arial" pitchFamily="34" charset="-122"/>
-                <a:cs typeface="Arial" pitchFamily="34" charset="-120"/>
-              </a:rPr>
-              <a:t>"Now we put multiple columns together — with the carries flowing from one to the next."</a:t>
-            </a:r>
-            <a:endParaRPr lang="en-US" sz="1200" dirty="0"/>
-          </a:p>
-        </p:txBody>
-      </p:sp>
-      <p:sp>
-        <p:nvSpPr>
-          <p:cNvPr id="5" name="Text 3"/>
+                <a:spcPts val="1375"/>
+              </a:lnSpc>
+              <a:buNone/>
+            </a:pPr>
+            <a:r>
+              <a:rPr lang="en-US" sz="1100" dirty="0">
+                <a:solidFill>
+                  <a:srgbClr val="1C2833"/>
+                </a:solidFill>
+                <a:latin typeface="Courier New" pitchFamily="34" charset="0"/>
+                <a:ea typeface="Courier New" pitchFamily="34" charset="-122"/>
+                <a:cs typeface="Courier New" pitchFamily="34" charset="-120"/>
+              </a:rPr>
+              <a:t>THE DOT METHOD FOR ONE COLUMN</a:t>
+            </a:r>
+            <a:endParaRPr lang="en-US" sz="1100" dirty="0"/>
+          </a:p>
+        </p:txBody>
+      </p:sp>
+      <p:sp>
+        <p:nvSpPr>
+          <p:cNvPr id="7" name="Text 5"/>
+          <p:cNvSpPr/>
+          <p:nvPr/>
+        </p:nvSpPr>
+        <p:spPr>
+          <a:xfrm>
+            <a:off x="631627" y="1359694"/>
+            <a:ext cx="8086939" cy="174575"/>
+          </a:xfrm>
+          <a:prstGeom prst="rect">
+            <a:avLst/>
+          </a:prstGeom>
+          <a:noFill/>
+          <a:ln/>
+        </p:spPr>
+        <p:txBody>
+          <a:bodyPr wrap="square" lIns="0" tIns="0" rIns="0" bIns="0" rtlCol="0" anchor="t"/>
+          <a:lstStyle/>
+          <a:p>
+            <a:pPr algn="l" indent="0" marL="0">
+              <a:lnSpc>
+                <a:spcPts val="1375"/>
+              </a:lnSpc>
+              <a:buNone/>
+            </a:pPr>
+            <a:r>
+              <a:rPr lang="en-US" sz="1100" dirty="0">
+                <a:solidFill>
+                  <a:srgbClr val="1C2833"/>
+                </a:solidFill>
+                <a:latin typeface="Courier New" pitchFamily="34" charset="0"/>
+                <a:ea typeface="Courier New" pitchFamily="34" charset="-122"/>
+                <a:cs typeface="Courier New" pitchFamily="34" charset="-120"/>
+              </a:rPr>
+              <a:t>1. Start with running total = 0.</a:t>
+            </a:r>
+            <a:endParaRPr lang="en-US" sz="1100" dirty="0"/>
+          </a:p>
+        </p:txBody>
+      </p:sp>
+      <p:sp>
+        <p:nvSpPr>
+          <p:cNvPr id="8" name="Text 6"/>
+          <p:cNvSpPr/>
+          <p:nvPr/>
+        </p:nvSpPr>
+        <p:spPr>
+          <a:xfrm>
+            <a:off x="631627" y="1534269"/>
+            <a:ext cx="8086939" cy="174575"/>
+          </a:xfrm>
+          <a:prstGeom prst="rect">
+            <a:avLst/>
+          </a:prstGeom>
+          <a:noFill/>
+          <a:ln/>
+        </p:spPr>
+        <p:txBody>
+          <a:bodyPr wrap="square" lIns="0" tIns="0" rIns="0" bIns="0" rtlCol="0" anchor="t"/>
+          <a:lstStyle/>
+          <a:p>
+            <a:pPr algn="l" indent="0" marL="0">
+              <a:lnSpc>
+                <a:spcPts val="1375"/>
+              </a:lnSpc>
+              <a:buNone/>
+            </a:pPr>
+            <a:r>
+              <a:rPr lang="en-US" sz="1100" dirty="0">
+                <a:solidFill>
+                  <a:srgbClr val="1C2833"/>
+                </a:solidFill>
+                <a:latin typeface="Courier New" pitchFamily="34" charset="0"/>
+                <a:ea typeface="Courier New" pitchFamily="34" charset="-122"/>
+                <a:cs typeface="Courier New" pitchFamily="34" charset="-120"/>
+              </a:rPr>
+              <a:t>2. Scan top to bottom.</a:t>
+            </a:r>
+            <a:endParaRPr lang="en-US" sz="1100" dirty="0"/>
+          </a:p>
+        </p:txBody>
+      </p:sp>
+      <p:sp>
+        <p:nvSpPr>
+          <p:cNvPr id="9" name="Text 7"/>
+          <p:cNvSpPr/>
+          <p:nvPr/>
+        </p:nvSpPr>
+        <p:spPr>
+          <a:xfrm>
+            <a:off x="631627" y="1708845"/>
+            <a:ext cx="8086939" cy="174575"/>
+          </a:xfrm>
+          <a:prstGeom prst="rect">
+            <a:avLst/>
+          </a:prstGeom>
+          <a:noFill/>
+          <a:ln/>
+        </p:spPr>
+        <p:txBody>
+          <a:bodyPr wrap="square" lIns="0" tIns="0" rIns="0" bIns="0" rtlCol="0" anchor="t"/>
+          <a:lstStyle/>
+          <a:p>
+            <a:pPr algn="l" indent="0" marL="0">
+              <a:lnSpc>
+                <a:spcPts val="1375"/>
+              </a:lnSpc>
+              <a:buNone/>
+            </a:pPr>
+            <a:r>
+              <a:rPr lang="en-US" sz="1100" dirty="0">
+                <a:solidFill>
+                  <a:srgbClr val="1C2833"/>
+                </a:solidFill>
+                <a:latin typeface="Courier New" pitchFamily="34" charset="0"/>
+                <a:ea typeface="Courier New" pitchFamily="34" charset="-122"/>
+                <a:cs typeface="Courier New" pitchFamily="34" charset="-120"/>
+              </a:rPr>
+              <a:t>3. When adding a digit makes total ≥ 10, mark a DOT</a:t>
+            </a:r>
+            <a:endParaRPr lang="en-US" sz="1100" dirty="0"/>
+          </a:p>
+        </p:txBody>
+      </p:sp>
+      <p:sp>
+        <p:nvSpPr>
+          <p:cNvPr id="10" name="Text 8"/>
+          <p:cNvSpPr/>
+          <p:nvPr/>
+        </p:nvSpPr>
+        <p:spPr>
+          <a:xfrm>
+            <a:off x="631627" y="1883420"/>
+            <a:ext cx="8086939" cy="174575"/>
+          </a:xfrm>
+          <a:prstGeom prst="rect">
+            <a:avLst/>
+          </a:prstGeom>
+          <a:noFill/>
+          <a:ln/>
+        </p:spPr>
+        <p:txBody>
+          <a:bodyPr wrap="square" lIns="0" tIns="0" rIns="0" bIns="0" rtlCol="0" anchor="t"/>
+          <a:lstStyle/>
+          <a:p>
+            <a:pPr algn="l" indent="0" marL="0">
+              <a:lnSpc>
+                <a:spcPts val="1375"/>
+              </a:lnSpc>
+              <a:buNone/>
+            </a:pPr>
+            <a:r>
+              <a:rPr lang="en-US" sz="1100" dirty="0">
+                <a:solidFill>
+                  <a:srgbClr val="1C2833"/>
+                </a:solidFill>
+                <a:latin typeface="Courier New" pitchFamily="34" charset="0"/>
+                <a:ea typeface="Courier New" pitchFamily="34" charset="-122"/>
+                <a:cs typeface="Courier New" pitchFamily="34" charset="-120"/>
+              </a:rPr>
+              <a:t>above that digit. Subtract 10 from the running total.</a:t>
+            </a:r>
+            <a:endParaRPr lang="en-US" sz="1100" dirty="0"/>
+          </a:p>
+        </p:txBody>
+      </p:sp>
+      <p:sp>
+        <p:nvSpPr>
+          <p:cNvPr id="11" name="Text 9"/>
+          <p:cNvSpPr/>
+          <p:nvPr/>
+        </p:nvSpPr>
+        <p:spPr>
+          <a:xfrm>
+            <a:off x="631627" y="2057995"/>
+            <a:ext cx="8086939" cy="174575"/>
+          </a:xfrm>
+          <a:prstGeom prst="rect">
+            <a:avLst/>
+          </a:prstGeom>
+          <a:noFill/>
+          <a:ln/>
+        </p:spPr>
+        <p:txBody>
+          <a:bodyPr wrap="square" lIns="0" tIns="0" rIns="0" bIns="0" rtlCol="0" anchor="t"/>
+          <a:lstStyle/>
+          <a:p>
+            <a:pPr algn="l" indent="0" marL="0">
+              <a:lnSpc>
+                <a:spcPts val="1375"/>
+              </a:lnSpc>
+              <a:buNone/>
+            </a:pPr>
+            <a:r>
+              <a:rPr lang="en-US" sz="1100" dirty="0">
+                <a:solidFill>
+                  <a:srgbClr val="1C2833"/>
+                </a:solidFill>
+                <a:latin typeface="Courier New" pitchFamily="34" charset="0"/>
+                <a:ea typeface="Courier New" pitchFamily="34" charset="-122"/>
+                <a:cs typeface="Courier New" pitchFamily="34" charset="-120"/>
+              </a:rPr>
+              <a:t>4. Continue.</a:t>
+            </a:r>
+            <a:endParaRPr lang="en-US" sz="1100" dirty="0"/>
+          </a:p>
+        </p:txBody>
+      </p:sp>
+      <p:sp>
+        <p:nvSpPr>
+          <p:cNvPr id="12" name="Text 10"/>
+          <p:cNvSpPr/>
+          <p:nvPr/>
+        </p:nvSpPr>
+        <p:spPr>
+          <a:xfrm>
+            <a:off x="631627" y="2232571"/>
+            <a:ext cx="8086939" cy="174575"/>
+          </a:xfrm>
+          <a:prstGeom prst="rect">
+            <a:avLst/>
+          </a:prstGeom>
+          <a:noFill/>
+          <a:ln/>
+        </p:spPr>
+        <p:txBody>
+          <a:bodyPr wrap="square" lIns="0" tIns="0" rIns="0" bIns="0" rtlCol="0" anchor="t"/>
+          <a:lstStyle/>
+          <a:p>
+            <a:pPr algn="l" indent="0" marL="0">
+              <a:lnSpc>
+                <a:spcPts val="1375"/>
+              </a:lnSpc>
+              <a:buNone/>
+            </a:pPr>
+            <a:r>
+              <a:rPr lang="en-US" sz="1100" dirty="0">
+                <a:solidFill>
+                  <a:srgbClr val="1C2833"/>
+                </a:solidFill>
+                <a:latin typeface="Courier New" pitchFamily="34" charset="0"/>
+                <a:ea typeface="Courier New" pitchFamily="34" charset="-122"/>
+                <a:cs typeface="Courier New" pitchFamily="34" charset="-120"/>
+              </a:rPr>
+              <a:t>5. At the end:</a:t>
+            </a:r>
+            <a:endParaRPr lang="en-US" sz="1100" dirty="0"/>
+          </a:p>
+        </p:txBody>
+      </p:sp>
+      <p:sp>
+        <p:nvSpPr>
+          <p:cNvPr id="13" name="Text 11"/>
+          <p:cNvSpPr/>
+          <p:nvPr/>
+        </p:nvSpPr>
+        <p:spPr>
+          <a:xfrm>
+            <a:off x="631627" y="2407146"/>
+            <a:ext cx="8086939" cy="174575"/>
+          </a:xfrm>
+          <a:prstGeom prst="rect">
+            <a:avLst/>
+          </a:prstGeom>
+          <a:noFill/>
+          <a:ln/>
+        </p:spPr>
+        <p:txBody>
+          <a:bodyPr wrap="square" lIns="0" tIns="0" rIns="0" bIns="0" rtlCol="0" anchor="t"/>
+          <a:lstStyle/>
+          <a:p>
+            <a:pPr algn="l" indent="0" marL="0">
+              <a:lnSpc>
+                <a:spcPts val="1375"/>
+              </a:lnSpc>
+              <a:buNone/>
+            </a:pPr>
+            <a:r>
+              <a:rPr lang="en-US" sz="1100" dirty="0">
+                <a:solidFill>
+                  <a:srgbClr val="1C2833"/>
+                </a:solidFill>
+                <a:latin typeface="Courier New" pitchFamily="34" charset="0"/>
+                <a:ea typeface="Courier New" pitchFamily="34" charset="-122"/>
+                <a:cs typeface="Courier New" pitchFamily="34" charset="-120"/>
+              </a:rPr>
+              <a:t>– Final running total is the UNITS DIGIT (write below).</a:t>
+            </a:r>
+            <a:endParaRPr lang="en-US" sz="1100" dirty="0"/>
+          </a:p>
+        </p:txBody>
+      </p:sp>
+      <p:sp>
+        <p:nvSpPr>
+          <p:cNvPr id="14" name="Text 12"/>
+          <p:cNvSpPr/>
+          <p:nvPr/>
+        </p:nvSpPr>
+        <p:spPr>
+          <a:xfrm>
+            <a:off x="631627" y="2581721"/>
+            <a:ext cx="8086939" cy="174575"/>
+          </a:xfrm>
+          <a:prstGeom prst="rect">
+            <a:avLst/>
+          </a:prstGeom>
+          <a:noFill/>
+          <a:ln/>
+        </p:spPr>
+        <p:txBody>
+          <a:bodyPr wrap="square" lIns="0" tIns="0" rIns="0" bIns="0" rtlCol="0" anchor="t"/>
+          <a:lstStyle/>
+          <a:p>
+            <a:pPr algn="l" indent="0" marL="0">
+              <a:lnSpc>
+                <a:spcPts val="1375"/>
+              </a:lnSpc>
+              <a:buNone/>
+            </a:pPr>
+            <a:r>
+              <a:rPr lang="en-US" sz="1100" dirty="0">
+                <a:solidFill>
+                  <a:srgbClr val="1C2833"/>
+                </a:solidFill>
+                <a:latin typeface="Courier New" pitchFamily="34" charset="0"/>
+                <a:ea typeface="Courier New" pitchFamily="34" charset="-122"/>
+                <a:cs typeface="Courier New" pitchFamily="34" charset="-120"/>
+              </a:rPr>
+              <a:t>– Number of dots = CARRY (to next column).</a:t>
+            </a:r>
+            <a:endParaRPr lang="en-US" sz="1100" dirty="0"/>
+          </a:p>
+        </p:txBody>
+      </p:sp>
+      <p:sp>
+        <p:nvSpPr>
+          <p:cNvPr id="15" name="Text 13"/>
           <p:cNvSpPr/>
           <p:nvPr/>
         </p:nvSpPr>
@@ -5817,7 +7689,7 @@
                 <a:ea typeface="Georgia" pitchFamily="34" charset="-122"/>
                 <a:cs typeface="Georgia" pitchFamily="34" charset="-120"/>
               </a:rPr>
-              <a:t>Student-facing content</a:t>
+              <a:t>Core (15 min) — The procedure formalised (cont.)</a:t>
             </a:r>
             <a:endParaRPr lang="en-US" sz="1800" dirty="0"/>
           </a:p>
@@ -5831,66 +7703,13 @@
         </p:nvSpPr>
         <p:spPr>
           <a:xfrm>
-            <a:off x="406301" y="883593"/>
-            <a:ext cx="8331398" cy="1688306"/>
-          </a:xfrm>
-          <a:prstGeom prst="rect">
-            <a:avLst/>
-          </a:prstGeom>
-          <a:solidFill>
-            <a:srgbClr val="F4F8F9"/>
-          </a:solidFill>
-          <a:ln/>
-        </p:spPr>
-        <p:txBody>
-          <a:bodyPr wrap="square" rtlCol="0" anchor="ctr"/>
-          <a:lstStyle/>
-          <a:p>
-            <a:pPr indent="0" marL="0">
-              <a:buNone/>
-            </a:pPr>
-            <a:endParaRPr lang="en-US" dirty="0"/>
-          </a:p>
-        </p:txBody>
-      </p:sp>
-      <p:sp>
-        <p:nvSpPr>
-          <p:cNvPr id="5" name="Shape 3"/>
-          <p:cNvSpPr/>
-          <p:nvPr/>
-        </p:nvSpPr>
-        <p:spPr>
-          <a:xfrm>
-            <a:off x="434876" y="883593"/>
-            <a:ext cx="0" cy="1688306"/>
-          </a:xfrm>
-          <a:prstGeom prst="line">
+            <a:off x="406301" y="870942"/>
+            <a:ext cx="8498026" cy="213271"/>
+          </a:xfrm>
+          <a:prstGeom prst="rect">
             <a:avLst/>
           </a:prstGeom>
           <a:noFill/>
-          <a:ln w="57150">
-            <a:solidFill>
-              <a:srgbClr val="FE4447"/>
-            </a:solidFill>
-            <a:prstDash val="solid"/>
-          </a:ln>
-        </p:spPr>
-      </p:sp>
-      <p:sp>
-        <p:nvSpPr>
-          <p:cNvPr id="6" name="Text 4"/>
-          <p:cNvSpPr/>
-          <p:nvPr/>
-        </p:nvSpPr>
-        <p:spPr>
-          <a:xfrm>
-            <a:off x="692051" y="1074093"/>
-            <a:ext cx="7973389" cy="230981"/>
-          </a:xfrm>
-          <a:prstGeom prst="rect">
-            <a:avLst/>
-          </a:prstGeom>
-          <a:noFill/>
           <a:ln/>
         </p:spPr>
         <p:txBody>
@@ -5899,7 +7718,7 @@
           <a:p>
             <a:pPr algn="l" indent="0" marL="0">
               <a:lnSpc>
-                <a:spcPts val="1820"/>
+                <a:spcPts val="1680"/>
               </a:lnSpc>
               <a:spcBef>
                 <a:spcPts val="300"/>
@@ -5910,259 +7729,23 @@
               <a:buNone/>
             </a:pPr>
             <a:r>
-              <a:rPr lang="en-US" sz="1300" b="1" i="1" dirty="0">
-                <a:solidFill>
-                  <a:srgbClr val="1C2833"/>
-                </a:solidFill>
-                <a:latin typeface="Georgia" pitchFamily="34" charset="0"/>
-                <a:ea typeface="Georgia" pitchFamily="34" charset="-122"/>
-                <a:cs typeface="Georgia" pitchFamily="34" charset="-120"/>
-              </a:rPr>
-              <a:t>Dot method, one column:</a:t>
-            </a:r>
-            <a:endParaRPr lang="en-US" sz="1300" dirty="0"/>
-          </a:p>
-        </p:txBody>
-      </p:sp>
-      <p:sp>
-        <p:nvSpPr>
-          <p:cNvPr id="7" name="Text 5"/>
-          <p:cNvSpPr/>
-          <p:nvPr/>
-        </p:nvSpPr>
-        <p:spPr>
-          <a:xfrm>
-            <a:off x="692051" y="1343174"/>
-            <a:ext cx="7973389" cy="461963"/>
-          </a:xfrm>
-          <a:prstGeom prst="rect">
-            <a:avLst/>
-          </a:prstGeom>
-          <a:noFill/>
-          <a:ln/>
-        </p:spPr>
-        <p:txBody>
-          <a:bodyPr wrap="square" lIns="0" tIns="0" rIns="0" bIns="0" rtlCol="0" anchor="t"/>
-          <a:lstStyle/>
-          <a:p>
-            <a:pPr algn="l" indent="0" marL="0">
-              <a:lnSpc>
-                <a:spcPts val="1820"/>
-              </a:lnSpc>
-              <a:spcBef>
-                <a:spcPts val="300"/>
-              </a:spcBef>
-              <a:spcAft>
-                <a:spcPts val="300"/>
-              </a:spcAft>
-              <a:buNone/>
-            </a:pPr>
-            <a:r>
-              <a:rPr lang="en-US" sz="1300" i="1" dirty="0">
-                <a:solidFill>
-                  <a:srgbClr val="1C2833"/>
-                </a:solidFill>
-                <a:latin typeface="Georgia" pitchFamily="34" charset="0"/>
-                <a:ea typeface="Georgia" pitchFamily="34" charset="-122"/>
-                <a:cs typeface="Georgia" pitchFamily="34" charset="-120"/>
-              </a:rPr>
-              <a:t>1. Running total = 0. 2. Scan top to bottom. 3. When total ≥ 10: mark a dot, subtract 10. 4. Final running total = units digit. Dot count = carry.</a:t>
-            </a:r>
-            <a:endParaRPr lang="en-US" sz="1300" dirty="0"/>
-          </a:p>
-        </p:txBody>
-      </p:sp>
-      <p:sp>
-        <p:nvSpPr>
-          <p:cNvPr id="8" name="Text 6"/>
-          <p:cNvSpPr/>
-          <p:nvPr/>
-        </p:nvSpPr>
-        <p:spPr>
-          <a:xfrm>
-            <a:off x="692051" y="1843236"/>
-            <a:ext cx="7973389" cy="250031"/>
-          </a:xfrm>
-          <a:prstGeom prst="rect">
-            <a:avLst/>
-          </a:prstGeom>
-          <a:noFill/>
-          <a:ln/>
-        </p:spPr>
-        <p:txBody>
-          <a:bodyPr wrap="square" lIns="0" tIns="0" rIns="0" bIns="0" rtlCol="0" anchor="t"/>
-          <a:lstStyle/>
-          <a:p>
-            <a:pPr algn="l" indent="0" marL="0">
-              <a:lnSpc>
-                <a:spcPts val="1820"/>
-              </a:lnSpc>
-              <a:spcBef>
-                <a:spcPts val="300"/>
-              </a:spcBef>
-              <a:spcAft>
-                <a:spcPts val="300"/>
-              </a:spcAft>
-              <a:buNone/>
-            </a:pPr>
-            <a:r>
-              <a:rPr lang="en-US" sz="1300" b="1" i="1" dirty="0">
-                <a:solidFill>
-                  <a:srgbClr val="1C2833"/>
-                </a:solidFill>
-                <a:latin typeface="Georgia" pitchFamily="34" charset="0"/>
-                <a:ea typeface="Georgia" pitchFamily="34" charset="-122"/>
-                <a:cs typeface="Georgia" pitchFamily="34" charset="-120"/>
-              </a:rPr>
-              <a:t>Example:</a:t>
-            </a:r>
-            <a:pPr algn="l" indent="0" marL="0">
-              <a:lnSpc>
-                <a:spcPts val="1820"/>
-              </a:lnSpc>
-              <a:spcBef>
-                <a:spcPts val="300"/>
-              </a:spcBef>
-              <a:spcAft>
-                <a:spcPts val="300"/>
-              </a:spcAft>
-              <a:buNone/>
-            </a:pPr>
-            <a:r>
-              <a:rPr lang="en-US" sz="1300" dirty="0">
-                <a:solidFill>
-                  <a:srgbClr val="1C2833"/>
-                </a:solidFill>
-                <a:latin typeface="Georgia" pitchFamily="34" charset="0"/>
-                <a:ea typeface="Georgia" pitchFamily="34" charset="-122"/>
-                <a:cs typeface="Georgia" pitchFamily="34" charset="-120"/>
-              </a:rPr>
-              <a:t> column </a:t>
-            </a:r>
-            <a:pPr algn="l" indent="0" marL="0">
-              <a:lnSpc>
-                <a:spcPts val="1820"/>
-              </a:lnSpc>
-              <a:spcBef>
-                <a:spcPts val="300"/>
-              </a:spcBef>
-              <a:spcAft>
-                <a:spcPts val="300"/>
-              </a:spcAft>
-              <a:buNone/>
-            </a:pPr>
-            <a:r>
-              <a:rPr lang="en-US" sz="1300" i="1" dirty="0">
-                <a:solidFill>
-                  <a:srgbClr val="1C2833"/>
-                </a:solidFill>
-                <a:latin typeface="Georgia" pitchFamily="34" charset="0"/>
-                <a:ea typeface="Georgia" pitchFamily="34" charset="-122"/>
-                <a:cs typeface="Georgia" pitchFamily="34" charset="-120"/>
-              </a:rPr>
-              <a:t>6, 3, 7, 5, 8, 4, 2</a:t>
-            </a:r>
-            <a:endParaRPr lang="en-US" sz="1300" dirty="0"/>
-          </a:p>
-        </p:txBody>
-      </p:sp>
-      <p:sp>
-        <p:nvSpPr>
-          <p:cNvPr id="9" name="Text 7"/>
-          <p:cNvSpPr/>
-          <p:nvPr/>
-        </p:nvSpPr>
-        <p:spPr>
-          <a:xfrm>
-            <a:off x="692051" y="2131368"/>
-            <a:ext cx="7973389" cy="250031"/>
-          </a:xfrm>
-          <a:prstGeom prst="rect">
-            <a:avLst/>
-          </a:prstGeom>
-          <a:noFill/>
-          <a:ln/>
-        </p:spPr>
-        <p:txBody>
-          <a:bodyPr wrap="square" lIns="0" tIns="0" rIns="0" bIns="0" rtlCol="0" anchor="t"/>
-          <a:lstStyle/>
-          <a:p>
-            <a:pPr algn="l" indent="0" marL="0">
-              <a:lnSpc>
-                <a:spcPts val="1820"/>
-              </a:lnSpc>
-              <a:spcBef>
-                <a:spcPts val="300"/>
-              </a:spcBef>
-              <a:spcAft>
-                <a:spcPts val="300"/>
-              </a:spcAft>
-              <a:buNone/>
-            </a:pPr>
-            <a:r>
-              <a:rPr lang="en-US" sz="1300" dirty="0">
-                <a:solidFill>
-                  <a:srgbClr val="1C2833"/>
-                </a:solidFill>
-                <a:latin typeface="Georgia" pitchFamily="34" charset="0"/>
-                <a:ea typeface="Georgia" pitchFamily="34" charset="-122"/>
-                <a:cs typeface="Georgia" pitchFamily="34" charset="-120"/>
-              </a:rPr>
-              <a:t>``</a:t>
-            </a:r>
-            <a:pPr algn="l" indent="0" marL="0">
-              <a:lnSpc>
-                <a:spcPts val="1820"/>
-              </a:lnSpc>
-              <a:spcBef>
-                <a:spcPts val="300"/>
-              </a:spcBef>
-              <a:spcAft>
-                <a:spcPts val="300"/>
-              </a:spcAft>
-              <a:buNone/>
-            </a:pPr>
-            <a:r>
-              <a:rPr lang="en-US" sz="1300" i="1" dirty="0">
-                <a:solidFill>
-                  <a:srgbClr val="1C2833"/>
-                </a:solidFill>
-                <a:latin typeface="Georgia" pitchFamily="34" charset="0"/>
-                <a:ea typeface="Georgia" pitchFamily="34" charset="-122"/>
-                <a:cs typeface="Georgia" pitchFamily="34" charset="-120"/>
-              </a:rPr>
-              <a:t> 6 3 7 · 5 · 8 4 · 2 __ 5 ← units 3 dots = carry 3 to the next column</a:t>
-            </a:r>
-            <a:pPr algn="l" indent="0" marL="0">
-              <a:lnSpc>
-                <a:spcPts val="1820"/>
-              </a:lnSpc>
-              <a:spcBef>
-                <a:spcPts val="300"/>
-              </a:spcBef>
-              <a:spcAft>
-                <a:spcPts val="300"/>
-              </a:spcAft>
-              <a:buNone/>
-            </a:pPr>
-            <a:r>
-              <a:rPr lang="en-US" sz="1300" dirty="0">
-                <a:solidFill>
-                  <a:srgbClr val="1C2833"/>
-                </a:solidFill>
-                <a:latin typeface="Georgia" pitchFamily="34" charset="0"/>
-                <a:ea typeface="Georgia" pitchFamily="34" charset="-122"/>
-                <a:cs typeface="Georgia" pitchFamily="34" charset="-120"/>
-              </a:rPr>
-              <a:t>``</a:t>
-            </a:r>
-            <a:endParaRPr lang="en-US" sz="1300" dirty="0"/>
-          </a:p>
-        </p:txBody>
-      </p:sp>
-      <p:sp>
-        <p:nvSpPr>
-          <p:cNvPr id="10" name="Text 8"/>
+              <a:rPr lang="en-US" sz="1200" dirty="0">
+                <a:solidFill>
+                  <a:srgbClr val="1C2833"/>
+                </a:solidFill>
+                <a:latin typeface="Arial" pitchFamily="34" charset="0"/>
+                <a:ea typeface="Arial" pitchFamily="34" charset="-122"/>
+                <a:cs typeface="Arial" pitchFamily="34" charset="-120"/>
+              </a:rPr>
+              <a:t>Worked example on the board:</a:t>
+            </a:r>
+            <a:endParaRPr lang="en-US" sz="1200" dirty="0"/>
+          </a:p>
+        </p:txBody>
+      </p:sp>
+      <p:sp>
+        <p:nvSpPr>
+          <p:cNvPr id="5" name="Text 3"/>
           <p:cNvSpPr/>
           <p:nvPr/>
         </p:nvSpPr>
@@ -6312,7 +7895,7 @@
                 <a:ea typeface="Georgia" pitchFamily="34" charset="-122"/>
                 <a:cs typeface="Georgia" pitchFamily="34" charset="-120"/>
               </a:rPr>
-              <a:t>Homework</a:t>
+              <a:t>Core (15 min) — The procedure formalised (cont.)</a:t>
             </a:r>
             <a:endParaRPr lang="en-US" sz="1800" dirty="0"/>
           </a:p>
@@ -6326,13 +7909,66 @@
         </p:nvSpPr>
         <p:spPr>
           <a:xfrm>
-            <a:off x="406301" y="870942"/>
-            <a:ext cx="8498026" cy="213271"/>
-          </a:xfrm>
-          <a:prstGeom prst="rect">
+            <a:off x="406301" y="883593"/>
+            <a:ext cx="8331398" cy="1999655"/>
+          </a:xfrm>
+          <a:prstGeom prst="rect">
+            <a:avLst/>
+          </a:prstGeom>
+          <a:solidFill>
+            <a:srgbClr val="F4F8F9"/>
+          </a:solidFill>
+          <a:ln/>
+        </p:spPr>
+        <p:txBody>
+          <a:bodyPr wrap="square" rtlCol="0" anchor="ctr"/>
+          <a:lstStyle/>
+          <a:p>
+            <a:pPr indent="0" marL="0">
+              <a:buNone/>
+            </a:pPr>
+            <a:endParaRPr lang="en-US" dirty="0"/>
+          </a:p>
+        </p:txBody>
+      </p:sp>
+      <p:sp>
+        <p:nvSpPr>
+          <p:cNvPr id="5" name="Shape 3"/>
+          <p:cNvSpPr/>
+          <p:nvPr/>
+        </p:nvSpPr>
+        <p:spPr>
+          <a:xfrm>
+            <a:off x="430113" y="883593"/>
+            <a:ext cx="0" cy="1999655"/>
+          </a:xfrm>
+          <a:prstGeom prst="line">
             <a:avLst/>
           </a:prstGeom>
           <a:noFill/>
+          <a:ln w="47625">
+            <a:solidFill>
+              <a:srgbClr val="277884"/>
+            </a:solidFill>
+            <a:prstDash val="solid"/>
+          </a:ln>
+        </p:spPr>
+      </p:sp>
+      <p:sp>
+        <p:nvSpPr>
+          <p:cNvPr id="6" name="Text 4"/>
+          <p:cNvSpPr/>
+          <p:nvPr/>
+        </p:nvSpPr>
+        <p:spPr>
+          <a:xfrm>
+            <a:off x="631627" y="1010543"/>
+            <a:ext cx="8086939" cy="174575"/>
+          </a:xfrm>
+          <a:prstGeom prst="rect">
+            <a:avLst/>
+          </a:prstGeom>
+          <a:noFill/>
           <a:ln/>
         </p:spPr>
         <p:txBody>
@@ -6341,34 +7977,406 @@
           <a:p>
             <a:pPr algn="l" indent="0" marL="0">
               <a:lnSpc>
-                <a:spcPts val="1680"/>
-              </a:lnSpc>
-              <a:spcBef>
-                <a:spcPts val="300"/>
-              </a:spcBef>
-              <a:spcAft>
-                <a:spcPts val="300"/>
-              </a:spcAft>
-              <a:buNone/>
-            </a:pPr>
-            <a:r>
-              <a:rPr lang="en-US" sz="1200" dirty="0">
-                <a:solidFill>
-                  <a:srgbClr val="1C2833"/>
-                </a:solidFill>
-                <a:latin typeface="Arial" pitchFamily="34" charset="0"/>
-                <a:ea typeface="Arial" pitchFamily="34" charset="-122"/>
-                <a:cs typeface="Arial" pitchFamily="34" charset="-120"/>
-              </a:rPr>
-              <a:t>– Solve the back of the worksheet (10 more single-column problems). Self-check answers against standard addition.</a:t>
-            </a:r>
-            <a:endParaRPr lang="en-US" sz="1200" dirty="0"/>
-          </a:p>
-        </p:txBody>
-      </p:sp>
-      <p:sp>
-        <p:nvSpPr>
-          <p:cNvPr id="5" name="Text 3"/>
+                <a:spcPts val="1375"/>
+              </a:lnSpc>
+              <a:buNone/>
+            </a:pPr>
+            <a:r>
+              <a:rPr lang="en-US" sz="1100" dirty="0">
+                <a:solidFill>
+                  <a:srgbClr val="1C2833"/>
+                </a:solidFill>
+                <a:latin typeface="Courier New" pitchFamily="34" charset="0"/>
+                <a:ea typeface="Courier New" pitchFamily="34" charset="-122"/>
+                <a:cs typeface="Courier New" pitchFamily="34" charset="-120"/>
+              </a:rPr>
+              <a:t>6</a:t>
+            </a:r>
+            <a:endParaRPr lang="en-US" sz="1100" dirty="0"/>
+          </a:p>
+        </p:txBody>
+      </p:sp>
+      <p:sp>
+        <p:nvSpPr>
+          <p:cNvPr id="7" name="Text 5"/>
+          <p:cNvSpPr/>
+          <p:nvPr/>
+        </p:nvSpPr>
+        <p:spPr>
+          <a:xfrm>
+            <a:off x="631627" y="1185118"/>
+            <a:ext cx="8086939" cy="174575"/>
+          </a:xfrm>
+          <a:prstGeom prst="rect">
+            <a:avLst/>
+          </a:prstGeom>
+          <a:noFill/>
+          <a:ln/>
+        </p:spPr>
+        <p:txBody>
+          <a:bodyPr wrap="square" lIns="0" tIns="0" rIns="0" bIns="0" rtlCol="0" anchor="t"/>
+          <a:lstStyle/>
+          <a:p>
+            <a:pPr algn="l" indent="0" marL="0">
+              <a:lnSpc>
+                <a:spcPts val="1375"/>
+              </a:lnSpc>
+              <a:buNone/>
+            </a:pPr>
+            <a:r>
+              <a:rPr lang="en-US" sz="1100" dirty="0">
+                <a:solidFill>
+                  <a:srgbClr val="1C2833"/>
+                </a:solidFill>
+                <a:latin typeface="Courier New" pitchFamily="34" charset="0"/>
+                <a:ea typeface="Courier New" pitchFamily="34" charset="-122"/>
+                <a:cs typeface="Courier New" pitchFamily="34" charset="-120"/>
+              </a:rPr>
+              <a:t>3</a:t>
+            </a:r>
+            <a:endParaRPr lang="en-US" sz="1100" dirty="0"/>
+          </a:p>
+        </p:txBody>
+      </p:sp>
+      <p:sp>
+        <p:nvSpPr>
+          <p:cNvPr id="8" name="Text 6"/>
+          <p:cNvSpPr/>
+          <p:nvPr/>
+        </p:nvSpPr>
+        <p:spPr>
+          <a:xfrm>
+            <a:off x="631627" y="1359694"/>
+            <a:ext cx="8086939" cy="174575"/>
+          </a:xfrm>
+          <a:prstGeom prst="rect">
+            <a:avLst/>
+          </a:prstGeom>
+          <a:noFill/>
+          <a:ln/>
+        </p:spPr>
+        <p:txBody>
+          <a:bodyPr wrap="square" lIns="0" tIns="0" rIns="0" bIns="0" rtlCol="0" anchor="t"/>
+          <a:lstStyle/>
+          <a:p>
+            <a:pPr algn="l" indent="0" marL="0">
+              <a:lnSpc>
+                <a:spcPts val="1375"/>
+              </a:lnSpc>
+              <a:buNone/>
+            </a:pPr>
+            <a:r>
+              <a:rPr lang="en-US" sz="1100" dirty="0">
+                <a:solidFill>
+                  <a:srgbClr val="1C2833"/>
+                </a:solidFill>
+                <a:latin typeface="Courier New" pitchFamily="34" charset="0"/>
+                <a:ea typeface="Courier New" pitchFamily="34" charset="-122"/>
+                <a:cs typeface="Courier New" pitchFamily="34" charset="-120"/>
+              </a:rPr>
+              <a:t>7  ← total 6 → 9 → 16 ≥ 10, dot ·, total = 6</a:t>
+            </a:r>
+            <a:endParaRPr lang="en-US" sz="1100" dirty="0"/>
+          </a:p>
+        </p:txBody>
+      </p:sp>
+      <p:sp>
+        <p:nvSpPr>
+          <p:cNvPr id="9" name="Text 7"/>
+          <p:cNvSpPr/>
+          <p:nvPr/>
+        </p:nvSpPr>
+        <p:spPr>
+          <a:xfrm>
+            <a:off x="631627" y="1534269"/>
+            <a:ext cx="8086939" cy="174575"/>
+          </a:xfrm>
+          <a:prstGeom prst="rect">
+            <a:avLst/>
+          </a:prstGeom>
+          <a:noFill/>
+          <a:ln/>
+        </p:spPr>
+        <p:txBody>
+          <a:bodyPr wrap="square" lIns="0" tIns="0" rIns="0" bIns="0" rtlCol="0" anchor="t"/>
+          <a:lstStyle/>
+          <a:p>
+            <a:pPr algn="l" indent="0" marL="0">
+              <a:lnSpc>
+                <a:spcPts val="1375"/>
+              </a:lnSpc>
+              <a:buNone/>
+            </a:pPr>
+            <a:r>
+              <a:rPr lang="en-US" sz="1100" dirty="0">
+                <a:solidFill>
+                  <a:srgbClr val="1C2833"/>
+                </a:solidFill>
+                <a:latin typeface="Courier New" pitchFamily="34" charset="0"/>
+                <a:ea typeface="Courier New" pitchFamily="34" charset="-122"/>
+                <a:cs typeface="Courier New" pitchFamily="34" charset="-120"/>
+              </a:rPr>
+              <a:t>5</a:t>
+            </a:r>
+            <a:endParaRPr lang="en-US" sz="1100" dirty="0"/>
+          </a:p>
+        </p:txBody>
+      </p:sp>
+      <p:sp>
+        <p:nvSpPr>
+          <p:cNvPr id="10" name="Text 8"/>
+          <p:cNvSpPr/>
+          <p:nvPr/>
+        </p:nvSpPr>
+        <p:spPr>
+          <a:xfrm>
+            <a:off x="631627" y="1708845"/>
+            <a:ext cx="8086939" cy="174575"/>
+          </a:xfrm>
+          <a:prstGeom prst="rect">
+            <a:avLst/>
+          </a:prstGeom>
+          <a:noFill/>
+          <a:ln/>
+        </p:spPr>
+        <p:txBody>
+          <a:bodyPr wrap="square" lIns="0" tIns="0" rIns="0" bIns="0" rtlCol="0" anchor="t"/>
+          <a:lstStyle/>
+          <a:p>
+            <a:pPr algn="l" indent="0" marL="0">
+              <a:lnSpc>
+                <a:spcPts val="1375"/>
+              </a:lnSpc>
+              <a:buNone/>
+            </a:pPr>
+            <a:r>
+              <a:rPr lang="en-US" sz="1100" dirty="0">
+                <a:solidFill>
+                  <a:srgbClr val="1C2833"/>
+                </a:solidFill>
+                <a:latin typeface="Courier New" pitchFamily="34" charset="0"/>
+                <a:ea typeface="Courier New" pitchFamily="34" charset="-122"/>
+                <a:cs typeface="Courier New" pitchFamily="34" charset="-120"/>
+              </a:rPr>
+              <a:t>8  ← total 6 → 11 ≥ 10, dot ·, total = 1</a:t>
+            </a:r>
+            <a:endParaRPr lang="en-US" sz="1100" dirty="0"/>
+          </a:p>
+        </p:txBody>
+      </p:sp>
+      <p:sp>
+        <p:nvSpPr>
+          <p:cNvPr id="11" name="Text 9"/>
+          <p:cNvSpPr/>
+          <p:nvPr/>
+        </p:nvSpPr>
+        <p:spPr>
+          <a:xfrm>
+            <a:off x="631627" y="1883420"/>
+            <a:ext cx="8086939" cy="174575"/>
+          </a:xfrm>
+          <a:prstGeom prst="rect">
+            <a:avLst/>
+          </a:prstGeom>
+          <a:noFill/>
+          <a:ln/>
+        </p:spPr>
+        <p:txBody>
+          <a:bodyPr wrap="square" lIns="0" tIns="0" rIns="0" bIns="0" rtlCol="0" anchor="t"/>
+          <a:lstStyle/>
+          <a:p>
+            <a:pPr algn="l" indent="0" marL="0">
+              <a:lnSpc>
+                <a:spcPts val="1375"/>
+              </a:lnSpc>
+              <a:buNone/>
+            </a:pPr>
+            <a:r>
+              <a:rPr lang="en-US" sz="1100" dirty="0">
+                <a:solidFill>
+                  <a:srgbClr val="1C2833"/>
+                </a:solidFill>
+                <a:latin typeface="Courier New" pitchFamily="34" charset="0"/>
+                <a:ea typeface="Courier New" pitchFamily="34" charset="-122"/>
+                <a:cs typeface="Courier New" pitchFamily="34" charset="-120"/>
+              </a:rPr>
+              <a:t>4</a:t>
+            </a:r>
+            <a:endParaRPr lang="en-US" sz="1100" dirty="0"/>
+          </a:p>
+        </p:txBody>
+      </p:sp>
+      <p:sp>
+        <p:nvSpPr>
+          <p:cNvPr id="12" name="Text 10"/>
+          <p:cNvSpPr/>
+          <p:nvPr/>
+        </p:nvSpPr>
+        <p:spPr>
+          <a:xfrm>
+            <a:off x="631627" y="2057995"/>
+            <a:ext cx="8086939" cy="174575"/>
+          </a:xfrm>
+          <a:prstGeom prst="rect">
+            <a:avLst/>
+          </a:prstGeom>
+          <a:noFill/>
+          <a:ln/>
+        </p:spPr>
+        <p:txBody>
+          <a:bodyPr wrap="square" lIns="0" tIns="0" rIns="0" bIns="0" rtlCol="0" anchor="t"/>
+          <a:lstStyle/>
+          <a:p>
+            <a:pPr algn="l" indent="0" marL="0">
+              <a:lnSpc>
+                <a:spcPts val="1375"/>
+              </a:lnSpc>
+              <a:buNone/>
+            </a:pPr>
+            <a:r>
+              <a:rPr lang="en-US" sz="1100" dirty="0">
+                <a:solidFill>
+                  <a:srgbClr val="1C2833"/>
+                </a:solidFill>
+                <a:latin typeface="Courier New" pitchFamily="34" charset="0"/>
+                <a:ea typeface="Courier New" pitchFamily="34" charset="-122"/>
+                <a:cs typeface="Courier New" pitchFamily="34" charset="-120"/>
+              </a:rPr>
+              <a:t>2</a:t>
+            </a:r>
+            <a:endParaRPr lang="en-US" sz="1100" dirty="0"/>
+          </a:p>
+        </p:txBody>
+      </p:sp>
+      <p:sp>
+        <p:nvSpPr>
+          <p:cNvPr id="13" name="Text 11"/>
+          <p:cNvSpPr/>
+          <p:nvPr/>
+        </p:nvSpPr>
+        <p:spPr>
+          <a:xfrm>
+            <a:off x="631627" y="2232571"/>
+            <a:ext cx="8086939" cy="174575"/>
+          </a:xfrm>
+          <a:prstGeom prst="rect">
+            <a:avLst/>
+          </a:prstGeom>
+          <a:noFill/>
+          <a:ln/>
+        </p:spPr>
+        <p:txBody>
+          <a:bodyPr wrap="square" lIns="0" tIns="0" rIns="0" bIns="0" rtlCol="0" anchor="t"/>
+          <a:lstStyle/>
+          <a:p>
+            <a:pPr algn="l" indent="0" marL="0">
+              <a:lnSpc>
+                <a:spcPts val="1375"/>
+              </a:lnSpc>
+              <a:buNone/>
+            </a:pPr>
+            <a:r>
+              <a:rPr lang="en-US" sz="1100" dirty="0">
+                <a:solidFill>
+                  <a:srgbClr val="1C2833"/>
+                </a:solidFill>
+                <a:latin typeface="Courier New" pitchFamily="34" charset="0"/>
+                <a:ea typeface="Courier New" pitchFamily="34" charset="-122"/>
+                <a:cs typeface="Courier New" pitchFamily="34" charset="-120"/>
+              </a:rPr>
+              <a:t>__</a:t>
+            </a:r>
+            <a:endParaRPr lang="en-US" sz="1100" dirty="0"/>
+          </a:p>
+        </p:txBody>
+      </p:sp>
+      <p:sp>
+        <p:nvSpPr>
+          <p:cNvPr id="14" name="Text 12"/>
+          <p:cNvSpPr/>
+          <p:nvPr/>
+        </p:nvSpPr>
+        <p:spPr>
+          <a:xfrm>
+            <a:off x="631627" y="2407146"/>
+            <a:ext cx="8086939" cy="174575"/>
+          </a:xfrm>
+          <a:prstGeom prst="rect">
+            <a:avLst/>
+          </a:prstGeom>
+          <a:noFill/>
+          <a:ln/>
+        </p:spPr>
+        <p:txBody>
+          <a:bodyPr wrap="square" lIns="0" tIns="0" rIns="0" bIns="0" rtlCol="0" anchor="t"/>
+          <a:lstStyle/>
+          <a:p>
+            <a:pPr algn="l" indent="0" marL="0">
+              <a:lnSpc>
+                <a:spcPts val="1375"/>
+              </a:lnSpc>
+              <a:buNone/>
+            </a:pPr>
+            <a:r>
+              <a:rPr lang="en-US" sz="1100" dirty="0">
+                <a:solidFill>
+                  <a:srgbClr val="1C2833"/>
+                </a:solidFill>
+                <a:latin typeface="Courier New" pitchFamily="34" charset="0"/>
+                <a:ea typeface="Courier New" pitchFamily="34" charset="-122"/>
+                <a:cs typeface="Courier New" pitchFamily="34" charset="-120"/>
+              </a:rPr>
+              <a:t>1   ← running total at end</a:t>
+            </a:r>
+            <a:endParaRPr lang="en-US" sz="1100" dirty="0"/>
+          </a:p>
+        </p:txBody>
+      </p:sp>
+      <p:sp>
+        <p:nvSpPr>
+          <p:cNvPr id="15" name="Text 13"/>
+          <p:cNvSpPr/>
+          <p:nvPr/>
+        </p:nvSpPr>
+        <p:spPr>
+          <a:xfrm>
+            <a:off x="631627" y="2581721"/>
+            <a:ext cx="8086939" cy="174575"/>
+          </a:xfrm>
+          <a:prstGeom prst="rect">
+            <a:avLst/>
+          </a:prstGeom>
+          <a:noFill/>
+          <a:ln/>
+        </p:spPr>
+        <p:txBody>
+          <a:bodyPr wrap="square" lIns="0" tIns="0" rIns="0" bIns="0" rtlCol="0" anchor="t"/>
+          <a:lstStyle/>
+          <a:p>
+            <a:pPr algn="l" indent="0" marL="0">
+              <a:lnSpc>
+                <a:spcPts val="1375"/>
+              </a:lnSpc>
+              <a:buNone/>
+            </a:pPr>
+            <a:r>
+              <a:rPr lang="en-US" sz="1100" dirty="0">
+                <a:solidFill>
+                  <a:srgbClr val="1C2833"/>
+                </a:solidFill>
+                <a:latin typeface="Courier New" pitchFamily="34" charset="0"/>
+                <a:ea typeface="Courier New" pitchFamily="34" charset="-122"/>
+                <a:cs typeface="Courier New" pitchFamily="34" charset="-120"/>
+              </a:rPr>
+              <a:t>··· wait, let me recount</a:t>
+            </a:r>
+            <a:endParaRPr lang="en-US" sz="1100" dirty="0"/>
+          </a:p>
+        </p:txBody>
+      </p:sp>
+      <p:sp>
+        <p:nvSpPr>
+          <p:cNvPr id="16" name="Text 14"/>
           <p:cNvSpPr/>
           <p:nvPr/>
         </p:nvSpPr>
